--- a/docs/universalbank_consistente_proposal_en.pptx
+++ b/docs/universalbank_consistente_proposal_en.pptx
@@ -22,6 +22,12 @@
     <p:sldId id="270" r:id="rId21"/>
     <p:sldId id="271" r:id="rId22"/>
     <p:sldId id="272" r:id="rId23"/>
+    <p:sldId id="273" r:id="rId24"/>
+    <p:sldId id="274" r:id="rId25"/>
+    <p:sldId id="275" r:id="rId26"/>
+    <p:sldId id="276" r:id="rId27"/>
+    <p:sldId id="277" r:id="rId28"/>
+    <p:sldId id="278" r:id="rId29"/>
   </p:sldIdLst>
   <p:sldSz cx="12191695" cy="6858000" type="screen4x3"/>
   <p:notesSz cx="6858000" cy="9144000"/>
@@ -3301,6 +3307,1874 @@
                   <a:srgbClr val="C8A24B"/>
                 </a:solidFill>
               </a:rPr>
+              <a:t>PILLAR 1 · AI</a:t>
+            </a:r>
+          </a:p>
+        </p:txBody>
+      </p:sp>
+      <p:sp>
+        <p:nvSpPr>
+          <p:cNvPr id="4" name="Rectangle 3"/>
+          <p:cNvSpPr/>
+          <p:nvPr/>
+        </p:nvSpPr>
+        <p:spPr>
+          <a:xfrm>
+            <a:off x="640080" y="731520"/>
+            <a:ext cx="10881360" cy="777240"/>
+          </a:xfrm>
+          <a:prstGeom prst="rect">
+            <a:avLst/>
+          </a:prstGeom>
+          <a:solidFill>
+            <a:srgbClr val="1F5D43"/>
+          </a:solidFill>
+          <a:ln>
+            <a:noFill/>
+          </a:ln>
+          <a:effectLst/>
+        </p:spPr>
+        <p:style>
+          <a:lnRef idx="1">
+            <a:schemeClr val="accent1"/>
+          </a:lnRef>
+          <a:fillRef idx="3">
+            <a:schemeClr val="accent1"/>
+          </a:fillRef>
+          <a:effectRef idx="2">
+            <a:schemeClr val="accent1"/>
+          </a:effectRef>
+          <a:fontRef idx="minor">
+            <a:schemeClr val="lt1"/>
+          </a:fontRef>
+        </p:style>
+        <p:txBody>
+          <a:bodyPr rtlCol="0" anchor="ctr" wrap="square"/>
+          <a:lstStyle/>
+          <a:p>
+            <a:pPr algn="ctr"/>
+            <a:r>
+              <a:rPr sz="2100" b="1">
+                <a:solidFill>
+                  <a:srgbClr val="FFFFFF"/>
+                </a:solidFill>
+              </a:rPr>
+              <a:t>   Two conversational surfaces, one Grok core</a:t>
+            </a:r>
+          </a:p>
+        </p:txBody>
+      </p:sp>
+      <p:pic>
+        <p:nvPicPr>
+          <p:cNvPr id="5" name="Picture 4" descr="d2-ai-chat.png"/>
+          <p:cNvPicPr>
+            <a:picLocks noChangeAspect="1"/>
+          </p:cNvPicPr>
+          <p:nvPr/>
+        </p:nvPicPr>
+        <p:blipFill>
+          <a:blip r:embed="rId2"/>
+          <a:stretch>
+            <a:fillRect/>
+          </a:stretch>
+        </p:blipFill>
+        <p:spPr>
+          <a:xfrm>
+            <a:off x="548640" y="3366474"/>
+            <a:ext cx="6583680" cy="1405212"/>
+          </a:xfrm>
+          <a:prstGeom prst="rect">
+            <a:avLst/>
+          </a:prstGeom>
+        </p:spPr>
+      </p:pic>
+      <p:sp>
+        <p:nvSpPr>
+          <p:cNvPr id="6" name="TextBox 5"/>
+          <p:cNvSpPr txBox="1"/>
+          <p:nvPr/>
+        </p:nvSpPr>
+        <p:spPr>
+          <a:xfrm>
+            <a:off x="548640" y="6355080"/>
+            <a:ext cx="6583680" cy="365760"/>
+          </a:xfrm>
+          <a:prstGeom prst="rect">
+            <a:avLst/>
+          </a:prstGeom>
+          <a:noFill/>
+        </p:spPr>
+        <p:txBody>
+          <a:bodyPr wrap="none">
+            <a:spAutoFit/>
+          </a:bodyPr>
+          <a:lstStyle/>
+          <a:p>
+            <a:pPr algn="ctr"/>
+            <a:r>
+              <a:rPr sz="1000" i="1">
+                <a:solidFill>
+                  <a:srgbClr val="415046"/>
+                </a:solidFill>
+              </a:rPr>
+              <a:t>Chat-based loan triage and chat-based investor reporting</a:t>
+            </a:r>
+          </a:p>
+        </p:txBody>
+      </p:sp>
+      <p:sp>
+        <p:nvSpPr>
+          <p:cNvPr id="7" name="TextBox 6"/>
+          <p:cNvSpPr txBox="1"/>
+          <p:nvPr/>
+        </p:nvSpPr>
+        <p:spPr>
+          <a:xfrm>
+            <a:off x="7406640" y="1828800"/>
+            <a:ext cx="4480560" cy="4572000"/>
+          </a:xfrm>
+          <a:prstGeom prst="rect">
+            <a:avLst/>
+          </a:prstGeom>
+          <a:noFill/>
+        </p:spPr>
+        <p:txBody>
+          <a:bodyPr wrap="square">
+            <a:spAutoFit/>
+          </a:bodyPr>
+          <a:lstStyle/>
+          <a:p>
+            <a:pPr>
+              <a:spcAft>
+                <a:spcPts val="900"/>
+              </a:spcAft>
+            </a:pPr>
+            <a:r>
+              <a:rPr sz="1300">
+                <a:solidFill>
+                  <a:srgbClr val="14231B"/>
+                </a:solidFill>
+              </a:rPr>
+              <a:t>•  Triage turns a seller's plain-language description into an indicative grade, advance rate and document list — in seconds.</a:t>
+            </a:r>
+          </a:p>
+          <a:p>
+            <a:pPr>
+              <a:spcAft>
+                <a:spcPts val="900"/>
+              </a:spcAft>
+            </a:pPr>
+            <a:r>
+              <a:rPr sz="1300">
+                <a:solidFill>
+                  <a:srgbClr val="14231B"/>
+                </a:solidFill>
+              </a:rPr>
+              <a:t>•  Reporting answers an investor's questions grounded in their own live positions — no invented figures.</a:t>
+            </a:r>
+          </a:p>
+          <a:p>
+            <a:pPr>
+              <a:spcAft>
+                <a:spcPts val="900"/>
+              </a:spcAft>
+            </a:pPr>
+            <a:r>
+              <a:rPr sz="1300">
+                <a:solidFill>
+                  <a:srgbClr val="14231B"/>
+                </a:solidFill>
+              </a:rPr>
+              <a:t>•  Grok scores and explains; a human always approves. Every AI decision is logged and auditable.</a:t>
+            </a:r>
+          </a:p>
+        </p:txBody>
+      </p:sp>
+    </p:spTree>
+  </p:cSld>
+  <p:clrMapOvr>
+    <a:masterClrMapping/>
+  </p:clrMapOvr>
+</p:sld>
+</file>
+
+<file path=ppt/slides/slide11.xml><?xml version="1.0" encoding="utf-8"?>
+<p:sld xmlns:a="http://schemas.openxmlformats.org/drawingml/2006/main" xmlns:p="http://schemas.openxmlformats.org/presentationml/2006/main" xmlns:r="http://schemas.openxmlformats.org/officeDocument/2006/relationships">
+  <p:cSld>
+    <p:spTree>
+      <p:nvGrpSpPr>
+        <p:cNvPr id="1" name=""/>
+        <p:cNvGrpSpPr/>
+        <p:nvPr/>
+      </p:nvGrpSpPr>
+      <p:grpSpPr/>
+      <p:sp>
+        <p:nvSpPr>
+          <p:cNvPr id="2" name="Rectangle 1"/>
+          <p:cNvSpPr/>
+          <p:nvPr/>
+        </p:nvSpPr>
+        <p:spPr>
+          <a:xfrm>
+            <a:off x="0" y="0"/>
+            <a:ext cx="12191695" cy="6858000"/>
+          </a:xfrm>
+          <a:prstGeom prst="rect">
+            <a:avLst/>
+          </a:prstGeom>
+          <a:solidFill>
+            <a:srgbClr val="F7F6F1"/>
+          </a:solidFill>
+          <a:ln>
+            <a:noFill/>
+          </a:ln>
+          <a:effectLst/>
+        </p:spPr>
+        <p:style>
+          <a:lnRef idx="1">
+            <a:schemeClr val="accent1"/>
+          </a:lnRef>
+          <a:fillRef idx="3">
+            <a:schemeClr val="accent1"/>
+          </a:fillRef>
+          <a:effectRef idx="2">
+            <a:schemeClr val="accent1"/>
+          </a:effectRef>
+          <a:fontRef idx="minor">
+            <a:schemeClr val="lt1"/>
+          </a:fontRef>
+        </p:style>
+        <p:txBody>
+          <a:bodyPr rtlCol="0" anchor="ctr"/>
+          <a:lstStyle/>
+          <a:p>
+            <a:pPr algn="ctr"/>
+          </a:p>
+        </p:txBody>
+      </p:sp>
+      <p:sp>
+        <p:nvSpPr>
+          <p:cNvPr id="3" name="TextBox 2"/>
+          <p:cNvSpPr txBox="1"/>
+          <p:nvPr/>
+        </p:nvSpPr>
+        <p:spPr>
+          <a:xfrm>
+            <a:off x="640080" y="365760"/>
+            <a:ext cx="10972800" cy="365760"/>
+          </a:xfrm>
+          <a:prstGeom prst="rect">
+            <a:avLst/>
+          </a:prstGeom>
+          <a:noFill/>
+        </p:spPr>
+        <p:txBody>
+          <a:bodyPr wrap="none">
+            <a:spAutoFit/>
+          </a:bodyPr>
+          <a:lstStyle/>
+          <a:p>
+            <a:r>
+              <a:rPr sz="1100" b="1">
+                <a:solidFill>
+                  <a:srgbClr val="C8A24B"/>
+                </a:solidFill>
+              </a:rPr>
+              <a:t>PILLAR 1 · CREDIT SCORING</a:t>
+            </a:r>
+          </a:p>
+        </p:txBody>
+      </p:sp>
+      <p:sp>
+        <p:nvSpPr>
+          <p:cNvPr id="4" name="Rectangle 3"/>
+          <p:cNvSpPr/>
+          <p:nvPr/>
+        </p:nvSpPr>
+        <p:spPr>
+          <a:xfrm>
+            <a:off x="640080" y="731520"/>
+            <a:ext cx="10881360" cy="777240"/>
+          </a:xfrm>
+          <a:prstGeom prst="rect">
+            <a:avLst/>
+          </a:prstGeom>
+          <a:solidFill>
+            <a:srgbClr val="1F5D43"/>
+          </a:solidFill>
+          <a:ln>
+            <a:noFill/>
+          </a:ln>
+          <a:effectLst/>
+        </p:spPr>
+        <p:style>
+          <a:lnRef idx="1">
+            <a:schemeClr val="accent1"/>
+          </a:lnRef>
+          <a:fillRef idx="3">
+            <a:schemeClr val="accent1"/>
+          </a:fillRef>
+          <a:effectRef idx="2">
+            <a:schemeClr val="accent1"/>
+          </a:effectRef>
+          <a:fontRef idx="minor">
+            <a:schemeClr val="lt1"/>
+          </a:fontRef>
+        </p:style>
+        <p:txBody>
+          <a:bodyPr rtlCol="0" anchor="ctr" wrap="square"/>
+          <a:lstStyle/>
+          <a:p>
+            <a:pPr algn="ctr"/>
+            <a:r>
+              <a:rPr sz="2100" b="1">
+                <a:solidFill>
+                  <a:srgbClr val="FFFFFF"/>
+                </a:solidFill>
+              </a:rPr>
+              <a:t>   Open-banking-style scoring, Uzbek edition</a:t>
+            </a:r>
+          </a:p>
+        </p:txBody>
+      </p:sp>
+      <p:pic>
+        <p:nvPicPr>
+          <p:cNvPr id="5" name="Picture 4" descr="d3-scoring.png"/>
+          <p:cNvPicPr>
+            <a:picLocks noChangeAspect="1"/>
+          </p:cNvPicPr>
+          <p:nvPr/>
+        </p:nvPicPr>
+        <p:blipFill>
+          <a:blip r:embed="rId2"/>
+          <a:stretch>
+            <a:fillRect/>
+          </a:stretch>
+        </p:blipFill>
+        <p:spPr>
+          <a:xfrm>
+            <a:off x="548640" y="3192925"/>
+            <a:ext cx="6583680" cy="1752310"/>
+          </a:xfrm>
+          <a:prstGeom prst="rect">
+            <a:avLst/>
+          </a:prstGeom>
+        </p:spPr>
+      </p:pic>
+      <p:sp>
+        <p:nvSpPr>
+          <p:cNvPr id="6" name="TextBox 5"/>
+          <p:cNvSpPr txBox="1"/>
+          <p:nvPr/>
+        </p:nvSpPr>
+        <p:spPr>
+          <a:xfrm>
+            <a:off x="548640" y="6355080"/>
+            <a:ext cx="6583680" cy="365760"/>
+          </a:xfrm>
+          <a:prstGeom prst="rect">
+            <a:avLst/>
+          </a:prstGeom>
+          <a:noFill/>
+        </p:spPr>
+        <p:txBody>
+          <a:bodyPr wrap="none">
+            <a:spAutoFit/>
+          </a:bodyPr>
+          <a:lstStyle/>
+          <a:p>
+            <a:pPr algn="ctr"/>
+            <a:r>
+              <a:rPr sz="1000" i="1">
+                <a:solidFill>
+                  <a:srgbClr val="415046"/>
+                </a:solidFill>
+              </a:rPr>
+              <a:t>Plaid-style data fusion adapted to Uzbekistan's rails</a:t>
+            </a:r>
+          </a:p>
+        </p:txBody>
+      </p:sp>
+      <p:sp>
+        <p:nvSpPr>
+          <p:cNvPr id="7" name="TextBox 6"/>
+          <p:cNvSpPr txBox="1"/>
+          <p:nvPr/>
+        </p:nvSpPr>
+        <p:spPr>
+          <a:xfrm>
+            <a:off x="7406640" y="1828800"/>
+            <a:ext cx="4480560" cy="4572000"/>
+          </a:xfrm>
+          <a:prstGeom prst="rect">
+            <a:avLst/>
+          </a:prstGeom>
+          <a:noFill/>
+        </p:spPr>
+        <p:txBody>
+          <a:bodyPr wrap="square">
+            <a:spAutoFit/>
+          </a:bodyPr>
+          <a:lstStyle/>
+          <a:p>
+            <a:pPr>
+              <a:spcAft>
+                <a:spcPts val="900"/>
+              </a:spcAft>
+            </a:pPr>
+            <a:r>
+              <a:rPr sz="1300">
+                <a:solidFill>
+                  <a:srgbClr val="14231B"/>
+                </a:solidFill>
+              </a:rPr>
+              <a:t>•  The Plaid model is connect an account, read the cash flows, decide. In Uzbekistan the richest feed is SoliqOnline — verified invoices and tax-declared turnover — plus bank transaction data and the CRIF bureau.</a:t>
+            </a:r>
+          </a:p>
+          <a:p>
+            <a:pPr>
+              <a:spcAft>
+                <a:spcPts val="900"/>
+              </a:spcAft>
+            </a:pPr>
+            <a:r>
+              <a:rPr sz="1300">
+                <a:solidFill>
+                  <a:srgbClr val="14231B"/>
+                </a:solidFill>
+              </a:rPr>
+              <a:t>•  A model produces the grade, advance rate and price; Grok writes the plain-language rationale and adverse-action reasons.</a:t>
+            </a:r>
+          </a:p>
+          <a:p>
+            <a:pPr>
+              <a:spcAft>
+                <a:spcPts val="900"/>
+              </a:spcAft>
+            </a:pPr>
+            <a:r>
+              <a:rPr sz="1300">
+                <a:solidFill>
+                  <a:srgbClr val="14231B"/>
+                </a:solidFill>
+              </a:rPr>
+              <a:t>•  Every decision is versioned and reproducible — Consistente's core methodology, and what a regulator will ask for.</a:t>
+            </a:r>
+          </a:p>
+        </p:txBody>
+      </p:sp>
+    </p:spTree>
+  </p:cSld>
+  <p:clrMapOvr>
+    <a:masterClrMapping/>
+  </p:clrMapOvr>
+</p:sld>
+</file>
+
+<file path=ppt/slides/slide12.xml><?xml version="1.0" encoding="utf-8"?>
+<p:sld xmlns:a="http://schemas.openxmlformats.org/drawingml/2006/main" xmlns:p="http://schemas.openxmlformats.org/presentationml/2006/main" xmlns:r="http://schemas.openxmlformats.org/officeDocument/2006/relationships">
+  <p:cSld>
+    <p:spTree>
+      <p:nvGrpSpPr>
+        <p:cNvPr id="1" name=""/>
+        <p:cNvGrpSpPr/>
+        <p:nvPr/>
+      </p:nvGrpSpPr>
+      <p:grpSpPr/>
+      <p:sp>
+        <p:nvSpPr>
+          <p:cNvPr id="2" name="Rectangle 1"/>
+          <p:cNvSpPr/>
+          <p:nvPr/>
+        </p:nvSpPr>
+        <p:spPr>
+          <a:xfrm>
+            <a:off x="0" y="0"/>
+            <a:ext cx="12191695" cy="6858000"/>
+          </a:xfrm>
+          <a:prstGeom prst="rect">
+            <a:avLst/>
+          </a:prstGeom>
+          <a:solidFill>
+            <a:srgbClr val="F7F6F1"/>
+          </a:solidFill>
+          <a:ln>
+            <a:noFill/>
+          </a:ln>
+          <a:effectLst/>
+        </p:spPr>
+        <p:style>
+          <a:lnRef idx="1">
+            <a:schemeClr val="accent1"/>
+          </a:lnRef>
+          <a:fillRef idx="3">
+            <a:schemeClr val="accent1"/>
+          </a:fillRef>
+          <a:effectRef idx="2">
+            <a:schemeClr val="accent1"/>
+          </a:effectRef>
+          <a:fontRef idx="minor">
+            <a:schemeClr val="lt1"/>
+          </a:fontRef>
+        </p:style>
+        <p:txBody>
+          <a:bodyPr rtlCol="0" anchor="ctr"/>
+          <a:lstStyle/>
+          <a:p>
+            <a:pPr algn="ctr"/>
+          </a:p>
+        </p:txBody>
+      </p:sp>
+      <p:sp>
+        <p:nvSpPr>
+          <p:cNvPr id="3" name="TextBox 2"/>
+          <p:cNvSpPr txBox="1"/>
+          <p:nvPr/>
+        </p:nvSpPr>
+        <p:spPr>
+          <a:xfrm>
+            <a:off x="640080" y="365760"/>
+            <a:ext cx="10972800" cy="365760"/>
+          </a:xfrm>
+          <a:prstGeom prst="rect">
+            <a:avLst/>
+          </a:prstGeom>
+          <a:noFill/>
+        </p:spPr>
+        <p:txBody>
+          <a:bodyPr wrap="none">
+            <a:spAutoFit/>
+          </a:bodyPr>
+          <a:lstStyle/>
+          <a:p>
+            <a:r>
+              <a:rPr sz="1100" b="1">
+                <a:solidFill>
+                  <a:srgbClr val="C8A24B"/>
+                </a:solidFill>
+              </a:rPr>
+              <a:t>ECONOMICS</a:t>
+            </a:r>
+          </a:p>
+        </p:txBody>
+      </p:sp>
+      <p:sp>
+        <p:nvSpPr>
+          <p:cNvPr id="4" name="Rectangle 3"/>
+          <p:cNvSpPr/>
+          <p:nvPr/>
+        </p:nvSpPr>
+        <p:spPr>
+          <a:xfrm>
+            <a:off x="640080" y="731520"/>
+            <a:ext cx="10881360" cy="777240"/>
+          </a:xfrm>
+          <a:prstGeom prst="rect">
+            <a:avLst/>
+          </a:prstGeom>
+          <a:solidFill>
+            <a:srgbClr val="1F5D43"/>
+          </a:solidFill>
+          <a:ln>
+            <a:noFill/>
+          </a:ln>
+          <a:effectLst/>
+        </p:spPr>
+        <p:style>
+          <a:lnRef idx="1">
+            <a:schemeClr val="accent1"/>
+          </a:lnRef>
+          <a:fillRef idx="3">
+            <a:schemeClr val="accent1"/>
+          </a:fillRef>
+          <a:effectRef idx="2">
+            <a:schemeClr val="accent1"/>
+          </a:effectRef>
+          <a:fontRef idx="minor">
+            <a:schemeClr val="lt1"/>
+          </a:fontRef>
+        </p:style>
+        <p:txBody>
+          <a:bodyPr rtlCol="0" anchor="ctr" wrap="square"/>
+          <a:lstStyle/>
+          <a:p>
+            <a:pPr algn="ctr"/>
+            <a:r>
+              <a:rPr sz="2100" b="1">
+                <a:solidFill>
+                  <a:srgbClr val="FFFFFF"/>
+                </a:solidFill>
+              </a:rPr>
+              <a:t>   What the bank earns on one invoice</a:t>
+            </a:r>
+          </a:p>
+        </p:txBody>
+      </p:sp>
+      <p:graphicFrame>
+        <p:nvGraphicFramePr>
+          <p:cNvPr id="5" name="Table 4"/>
+          <p:cNvGraphicFramePr>
+            <a:graphicFrameLocks noGrp="1"/>
+          </p:cNvGraphicFramePr>
+          <p:nvPr/>
+        </p:nvGraphicFramePr>
+        <p:xfrm>
+          <a:off x="685800" y="1828800"/>
+          <a:ext cx="10835640" cy="2926080"/>
+        </p:xfrm>
+        <a:graphic>
+          <a:graphicData uri="http://schemas.openxmlformats.org/drawingml/2006/table">
+            <a:tbl>
+              <a:tblPr firstRow="1" bandRow="1">
+                <a:tableStyleId>{5C22544A-7EE6-4342-B048-85BDC9FD1C3A}</a:tableStyleId>
+              </a:tblPr>
+              <a:tblGrid>
+                <a:gridCol w="2708910"/>
+                <a:gridCol w="2708910"/>
+                <a:gridCol w="2708910"/>
+                <a:gridCol w="2708910"/>
+              </a:tblGrid>
+              <a:tr h="365760">
+                <a:tc>
+                  <a:txBody>
+                    <a:bodyPr/>
+                    <a:lstStyle/>
+                    <a:p>
+                      <a:r>
+                        <a:rPr sz="1100" b="1">
+                          <a:solidFill>
+                            <a:srgbClr val="FFFFFF"/>
+                          </a:solidFill>
+                        </a:rPr>
+                        <a:t>Cash flow · $10,000 invoice · 85% · 60d · 5%</a:t>
+                      </a:r>
+                    </a:p>
+                  </a:txBody>
+                  <a:tcPr>
+                    <a:solidFill>
+                      <a:srgbClr val="1F5D43"/>
+                    </a:solidFill>
+                  </a:tcPr>
+                </a:tc>
+                <a:tc>
+                  <a:txBody>
+                    <a:bodyPr/>
+                    <a:lstStyle/>
+                    <a:p>
+                      <a:r>
+                        <a:rPr sz="1100" b="1">
+                          <a:solidFill>
+                            <a:srgbClr val="FFFFFF"/>
+                          </a:solidFill>
+                        </a:rPr>
+                        <a:t>Amount</a:t>
+                      </a:r>
+                    </a:p>
+                  </a:txBody>
+                  <a:tcPr>
+                    <a:solidFill>
+                      <a:srgbClr val="1F5D43"/>
+                    </a:solidFill>
+                  </a:tcPr>
+                </a:tc>
+                <a:tc>
+                  <a:txBody>
+                    <a:bodyPr/>
+                    <a:lstStyle/>
+                    <a:p>
+                      <a:r>
+                        <a:rPr sz="1100" b="1">
+                          <a:solidFill>
+                            <a:srgbClr val="FFFFFF"/>
+                          </a:solidFill>
+                        </a:rPr>
+                        <a:t>Direction</a:t>
+                      </a:r>
+                    </a:p>
+                  </a:txBody>
+                  <a:tcPr>
+                    <a:solidFill>
+                      <a:srgbClr val="1F5D43"/>
+                    </a:solidFill>
+                  </a:tcPr>
+                </a:tc>
+                <a:tc>
+                  <a:txBody>
+                    <a:bodyPr/>
+                    <a:lstStyle/>
+                    <a:p>
+                      <a:r>
+                        <a:rPr sz="1100" b="1">
+                          <a:solidFill>
+                            <a:srgbClr val="FFFFFF"/>
+                          </a:solidFill>
+                        </a:rPr>
+                        <a:t>Day</a:t>
+                      </a:r>
+                    </a:p>
+                  </a:txBody>
+                  <a:tcPr>
+                    <a:solidFill>
+                      <a:srgbClr val="1F5D43"/>
+                    </a:solidFill>
+                  </a:tcPr>
+                </a:tc>
+              </a:tr>
+              <a:tr h="365760">
+                <a:tc>
+                  <a:txBody>
+                    <a:bodyPr/>
+                    <a:lstStyle/>
+                    <a:p>
+                      <a:r>
+                        <a:rPr sz="1050">
+                          <a:solidFill>
+                            <a:srgbClr val="14231B"/>
+                          </a:solidFill>
+                        </a:rPr>
+                        <a:t>Advance to seller (85%)</a:t>
+                      </a:r>
+                    </a:p>
+                  </a:txBody>
+                  <a:tcPr>
+                    <a:solidFill>
+                      <a:srgbClr val="FFFFFF"/>
+                    </a:solidFill>
+                  </a:tcPr>
+                </a:tc>
+                <a:tc>
+                  <a:txBody>
+                    <a:bodyPr/>
+                    <a:lstStyle/>
+                    <a:p>
+                      <a:r>
+                        <a:rPr sz="1050">
+                          <a:solidFill>
+                            <a:srgbClr val="14231B"/>
+                          </a:solidFill>
+                        </a:rPr>
+                        <a:t>$8,500</a:t>
+                      </a:r>
+                    </a:p>
+                  </a:txBody>
+                  <a:tcPr>
+                    <a:solidFill>
+                      <a:srgbClr val="FFFFFF"/>
+                    </a:solidFill>
+                  </a:tcPr>
+                </a:tc>
+                <a:tc>
+                  <a:txBody>
+                    <a:bodyPr/>
+                    <a:lstStyle/>
+                    <a:p>
+                      <a:r>
+                        <a:rPr sz="1050">
+                          <a:solidFill>
+                            <a:srgbClr val="14231B"/>
+                          </a:solidFill>
+                        </a:rPr>
+                        <a:t>Platform → seller</a:t>
+                      </a:r>
+                    </a:p>
+                  </a:txBody>
+                  <a:tcPr>
+                    <a:solidFill>
+                      <a:srgbClr val="FFFFFF"/>
+                    </a:solidFill>
+                  </a:tcPr>
+                </a:tc>
+                <a:tc>
+                  <a:txBody>
+                    <a:bodyPr/>
+                    <a:lstStyle/>
+                    <a:p>
+                      <a:r>
+                        <a:rPr sz="1050">
+                          <a:solidFill>
+                            <a:srgbClr val="14231B"/>
+                          </a:solidFill>
+                        </a:rPr>
+                        <a:t>Day 1</a:t>
+                      </a:r>
+                    </a:p>
+                  </a:txBody>
+                  <a:tcPr>
+                    <a:solidFill>
+                      <a:srgbClr val="FFFFFF"/>
+                    </a:solidFill>
+                  </a:tcPr>
+                </a:tc>
+              </a:tr>
+              <a:tr h="365760">
+                <a:tc>
+                  <a:txBody>
+                    <a:bodyPr/>
+                    <a:lstStyle/>
+                    <a:p>
+                      <a:r>
+                        <a:rPr sz="1050">
+                          <a:solidFill>
+                            <a:srgbClr val="14231B"/>
+                          </a:solidFill>
+                        </a:rPr>
+                        <a:t>Payer (debtor) pays in full</a:t>
+                      </a:r>
+                    </a:p>
+                  </a:txBody>
+                  <a:tcPr>
+                    <a:solidFill>
+                      <a:srgbClr val="EEEDE5"/>
+                    </a:solidFill>
+                  </a:tcPr>
+                </a:tc>
+                <a:tc>
+                  <a:txBody>
+                    <a:bodyPr/>
+                    <a:lstStyle/>
+                    <a:p>
+                      <a:r>
+                        <a:rPr sz="1050">
+                          <a:solidFill>
+                            <a:srgbClr val="14231B"/>
+                          </a:solidFill>
+                        </a:rPr>
+                        <a:t>$10,000</a:t>
+                      </a:r>
+                    </a:p>
+                  </a:txBody>
+                  <a:tcPr>
+                    <a:solidFill>
+                      <a:srgbClr val="EEEDE5"/>
+                    </a:solidFill>
+                  </a:tcPr>
+                </a:tc>
+                <a:tc>
+                  <a:txBody>
+                    <a:bodyPr/>
+                    <a:lstStyle/>
+                    <a:p>
+                      <a:r>
+                        <a:rPr sz="1050">
+                          <a:solidFill>
+                            <a:srgbClr val="14231B"/>
+                          </a:solidFill>
+                        </a:rPr>
+                        <a:t>Payer → collection</a:t>
+                      </a:r>
+                    </a:p>
+                  </a:txBody>
+                  <a:tcPr>
+                    <a:solidFill>
+                      <a:srgbClr val="EEEDE5"/>
+                    </a:solidFill>
+                  </a:tcPr>
+                </a:tc>
+                <a:tc>
+                  <a:txBody>
+                    <a:bodyPr/>
+                    <a:lstStyle/>
+                    <a:p>
+                      <a:r>
+                        <a:rPr sz="1050">
+                          <a:solidFill>
+                            <a:srgbClr val="14231B"/>
+                          </a:solidFill>
+                        </a:rPr>
+                        <a:t>Day 60</a:t>
+                      </a:r>
+                    </a:p>
+                  </a:txBody>
+                  <a:tcPr>
+                    <a:solidFill>
+                      <a:srgbClr val="EEEDE5"/>
+                    </a:solidFill>
+                  </a:tcPr>
+                </a:tc>
+              </a:tr>
+              <a:tr h="365760">
+                <a:tc>
+                  <a:txBody>
+                    <a:bodyPr/>
+                    <a:lstStyle/>
+                    <a:p>
+                      <a:r>
+                        <a:rPr sz="1050">
+                          <a:solidFill>
+                            <a:srgbClr val="14231B"/>
+                          </a:solidFill>
+                        </a:rPr>
+                        <a:t>Net balance released to seller</a:t>
+                      </a:r>
+                    </a:p>
+                  </a:txBody>
+                  <a:tcPr>
+                    <a:solidFill>
+                      <a:srgbClr val="FFFFFF"/>
+                    </a:solidFill>
+                  </a:tcPr>
+                </a:tc>
+                <a:tc>
+                  <a:txBody>
+                    <a:bodyPr/>
+                    <a:lstStyle/>
+                    <a:p>
+                      <a:r>
+                        <a:rPr sz="1050">
+                          <a:solidFill>
+                            <a:srgbClr val="14231B"/>
+                          </a:solidFill>
+                        </a:rPr>
+                        <a:t>$1,500</a:t>
+                      </a:r>
+                    </a:p>
+                  </a:txBody>
+                  <a:tcPr>
+                    <a:solidFill>
+                      <a:srgbClr val="FFFFFF"/>
+                    </a:solidFill>
+                  </a:tcPr>
+                </a:tc>
+                <a:tc>
+                  <a:txBody>
+                    <a:bodyPr/>
+                    <a:lstStyle/>
+                    <a:p>
+                      <a:r>
+                        <a:rPr sz="1050">
+                          <a:solidFill>
+                            <a:srgbClr val="14231B"/>
+                          </a:solidFill>
+                        </a:rPr>
+                        <a:t>Platform → seller</a:t>
+                      </a:r>
+                    </a:p>
+                  </a:txBody>
+                  <a:tcPr>
+                    <a:solidFill>
+                      <a:srgbClr val="FFFFFF"/>
+                    </a:solidFill>
+                  </a:tcPr>
+                </a:tc>
+                <a:tc>
+                  <a:txBody>
+                    <a:bodyPr/>
+                    <a:lstStyle/>
+                    <a:p>
+                      <a:r>
+                        <a:rPr sz="1050">
+                          <a:solidFill>
+                            <a:srgbClr val="14231B"/>
+                          </a:solidFill>
+                        </a:rPr>
+                        <a:t>Day 60</a:t>
+                      </a:r>
+                    </a:p>
+                  </a:txBody>
+                  <a:tcPr>
+                    <a:solidFill>
+                      <a:srgbClr val="FFFFFF"/>
+                    </a:solidFill>
+                  </a:tcPr>
+                </a:tc>
+              </a:tr>
+              <a:tr h="365760">
+                <a:tc>
+                  <a:txBody>
+                    <a:bodyPr/>
+                    <a:lstStyle/>
+                    <a:p>
+                      <a:r>
+                        <a:rPr sz="1050">
+                          <a:solidFill>
+                            <a:srgbClr val="14231B"/>
+                          </a:solidFill>
+                        </a:rPr>
+                        <a:t>Discount income (gross)</a:t>
+                      </a:r>
+                    </a:p>
+                  </a:txBody>
+                  <a:tcPr>
+                    <a:solidFill>
+                      <a:srgbClr val="EEEDE5"/>
+                    </a:solidFill>
+                  </a:tcPr>
+                </a:tc>
+                <a:tc>
+                  <a:txBody>
+                    <a:bodyPr/>
+                    <a:lstStyle/>
+                    <a:p>
+                      <a:r>
+                        <a:rPr sz="1050">
+                          <a:solidFill>
+                            <a:srgbClr val="14231B"/>
+                          </a:solidFill>
+                        </a:rPr>
+                        <a:t>$500</a:t>
+                      </a:r>
+                    </a:p>
+                  </a:txBody>
+                  <a:tcPr>
+                    <a:solidFill>
+                      <a:srgbClr val="EEEDE5"/>
+                    </a:solidFill>
+                  </a:tcPr>
+                </a:tc>
+                <a:tc>
+                  <a:txBody>
+                    <a:bodyPr/>
+                    <a:lstStyle/>
+                    <a:p>
+                      <a:r>
+                        <a:rPr sz="1050">
+                          <a:solidFill>
+                            <a:srgbClr val="14231B"/>
+                          </a:solidFill>
+                        </a:rPr>
+                        <a:t>Capital keeps</a:t>
+                      </a:r>
+                    </a:p>
+                  </a:txBody>
+                  <a:tcPr>
+                    <a:solidFill>
+                      <a:srgbClr val="EEEDE5"/>
+                    </a:solidFill>
+                  </a:tcPr>
+                </a:tc>
+                <a:tc>
+                  <a:txBody>
+                    <a:bodyPr/>
+                    <a:lstStyle/>
+                    <a:p>
+                      <a:r>
+                        <a:rPr sz="1050">
+                          <a:solidFill>
+                            <a:srgbClr val="14231B"/>
+                          </a:solidFill>
+                        </a:rPr>
+                        <a:t>Day 60</a:t>
+                      </a:r>
+                    </a:p>
+                  </a:txBody>
+                  <a:tcPr>
+                    <a:solidFill>
+                      <a:srgbClr val="EEEDE5"/>
+                    </a:solidFill>
+                  </a:tcPr>
+                </a:tc>
+              </a:tr>
+              <a:tr h="365760">
+                <a:tc>
+                  <a:txBody>
+                    <a:bodyPr/>
+                    <a:lstStyle/>
+                    <a:p>
+                      <a:r>
+                        <a:rPr sz="1050">
+                          <a:solidFill>
+                            <a:srgbClr val="14231B"/>
+                          </a:solidFill>
+                        </a:rPr>
+                        <a:t>Platform fee (volume-based)</a:t>
+                      </a:r>
+                    </a:p>
+                  </a:txBody>
+                  <a:tcPr>
+                    <a:solidFill>
+                      <a:srgbClr val="FFFFFF"/>
+                    </a:solidFill>
+                  </a:tcPr>
+                </a:tc>
+                <a:tc>
+                  <a:txBody>
+                    <a:bodyPr/>
+                    <a:lstStyle/>
+                    <a:p>
+                      <a:r>
+                        <a:rPr sz="1050">
+                          <a:solidFill>
+                            <a:srgbClr val="14231B"/>
+                          </a:solidFill>
+                        </a:rPr>
+                        <a:t>≈ $13</a:t>
+                      </a:r>
+                    </a:p>
+                  </a:txBody>
+                  <a:tcPr>
+                    <a:solidFill>
+                      <a:srgbClr val="FFFFFF"/>
+                    </a:solidFill>
+                  </a:tcPr>
+                </a:tc>
+                <a:tc>
+                  <a:txBody>
+                    <a:bodyPr/>
+                    <a:lstStyle/>
+                    <a:p>
+                      <a:r>
+                        <a:rPr sz="1050">
+                          <a:solidFill>
+                            <a:srgbClr val="14231B"/>
+                          </a:solidFill>
+                        </a:rPr>
+                        <a:t>Bank → Consistente</a:t>
+                      </a:r>
+                    </a:p>
+                  </a:txBody>
+                  <a:tcPr>
+                    <a:solidFill>
+                      <a:srgbClr val="FFFFFF"/>
+                    </a:solidFill>
+                  </a:tcPr>
+                </a:tc>
+                <a:tc>
+                  <a:txBody>
+                    <a:bodyPr/>
+                    <a:lstStyle/>
+                    <a:p>
+                      <a:r>
+                        <a:rPr sz="1050">
+                          <a:solidFill>
+                            <a:srgbClr val="14231B"/>
+                          </a:solidFill>
+                        </a:rPr>
+                        <a:t>Day 60</a:t>
+                      </a:r>
+                    </a:p>
+                  </a:txBody>
+                  <a:tcPr>
+                    <a:solidFill>
+                      <a:srgbClr val="FFFFFF"/>
+                    </a:solidFill>
+                  </a:tcPr>
+                </a:tc>
+              </a:tr>
+              <a:tr h="365760">
+                <a:tc>
+                  <a:txBody>
+                    <a:bodyPr/>
+                    <a:lstStyle/>
+                    <a:p>
+                      <a:r>
+                        <a:rPr sz="1050">
+                          <a:solidFill>
+                            <a:srgbClr val="14231B"/>
+                          </a:solidFill>
+                        </a:rPr>
+                        <a:t>Net income on the invoice</a:t>
+                      </a:r>
+                    </a:p>
+                  </a:txBody>
+                  <a:tcPr>
+                    <a:solidFill>
+                      <a:srgbClr val="EEEDE5"/>
+                    </a:solidFill>
+                  </a:tcPr>
+                </a:tc>
+                <a:tc>
+                  <a:txBody>
+                    <a:bodyPr/>
+                    <a:lstStyle/>
+                    <a:p>
+                      <a:r>
+                        <a:rPr sz="1050">
+                          <a:solidFill>
+                            <a:srgbClr val="14231B"/>
+                          </a:solidFill>
+                        </a:rPr>
+                        <a:t>≈ $487</a:t>
+                      </a:r>
+                    </a:p>
+                  </a:txBody>
+                  <a:tcPr>
+                    <a:solidFill>
+                      <a:srgbClr val="EEEDE5"/>
+                    </a:solidFill>
+                  </a:tcPr>
+                </a:tc>
+                <a:tc>
+                  <a:txBody>
+                    <a:bodyPr/>
+                    <a:lstStyle/>
+                    <a:p>
+                      <a:r>
+                        <a:rPr sz="1050">
+                          <a:solidFill>
+                            <a:srgbClr val="14231B"/>
+                          </a:solidFill>
+                        </a:rPr>
+                        <a:t>Capital keeps</a:t>
+                      </a:r>
+                    </a:p>
+                  </a:txBody>
+                  <a:tcPr>
+                    <a:solidFill>
+                      <a:srgbClr val="EEEDE5"/>
+                    </a:solidFill>
+                  </a:tcPr>
+                </a:tc>
+                <a:tc>
+                  <a:txBody>
+                    <a:bodyPr/>
+                    <a:lstStyle/>
+                    <a:p>
+                      <a:r>
+                        <a:rPr sz="1050">
+                          <a:solidFill>
+                            <a:srgbClr val="14231B"/>
+                          </a:solidFill>
+                        </a:rPr>
+                        <a:t>Day 60</a:t>
+                      </a:r>
+                    </a:p>
+                  </a:txBody>
+                  <a:tcPr>
+                    <a:solidFill>
+                      <a:srgbClr val="EEEDE5"/>
+                    </a:solidFill>
+                  </a:tcPr>
+                </a:tc>
+              </a:tr>
+              <a:tr h="365760">
+                <a:tc>
+                  <a:txBody>
+                    <a:bodyPr/>
+                    <a:lstStyle/>
+                    <a:p>
+                      <a:r>
+                        <a:rPr sz="1050">
+                          <a:solidFill>
+                            <a:srgbClr val="14231B"/>
+                          </a:solidFill>
+                        </a:rPr>
+                        <a:t>Annualised return on capital</a:t>
+                      </a:r>
+                    </a:p>
+                  </a:txBody>
+                  <a:tcPr>
+                    <a:solidFill>
+                      <a:srgbClr val="FFFFFF"/>
+                    </a:solidFill>
+                  </a:tcPr>
+                </a:tc>
+                <a:tc>
+                  <a:txBody>
+                    <a:bodyPr/>
+                    <a:lstStyle/>
+                    <a:p>
+                      <a:r>
+                        <a:rPr sz="1050">
+                          <a:solidFill>
+                            <a:srgbClr val="14231B"/>
+                          </a:solidFill>
+                        </a:rPr>
+                        <a:t>≈ 30% p.a.</a:t>
+                      </a:r>
+                    </a:p>
+                  </a:txBody>
+                  <a:tcPr>
+                    <a:solidFill>
+                      <a:srgbClr val="FFFFFF"/>
+                    </a:solidFill>
+                  </a:tcPr>
+                </a:tc>
+                <a:tc>
+                  <a:txBody>
+                    <a:bodyPr/>
+                    <a:lstStyle/>
+                    <a:p>
+                      <a:r>
+                        <a:rPr sz="1050">
+                          <a:solidFill>
+                            <a:srgbClr val="14231B"/>
+                          </a:solidFill>
+                        </a:rPr>
+                        <a:t>—</a:t>
+                      </a:r>
+                    </a:p>
+                  </a:txBody>
+                  <a:tcPr>
+                    <a:solidFill>
+                      <a:srgbClr val="FFFFFF"/>
+                    </a:solidFill>
+                  </a:tcPr>
+                </a:tc>
+                <a:tc>
+                  <a:txBody>
+                    <a:bodyPr/>
+                    <a:lstStyle/>
+                    <a:p>
+                      <a:r>
+                        <a:rPr sz="1050">
+                          <a:solidFill>
+                            <a:srgbClr val="14231B"/>
+                          </a:solidFill>
+                        </a:rPr>
+                        <a:t>—</a:t>
+                      </a:r>
+                    </a:p>
+                  </a:txBody>
+                  <a:tcPr>
+                    <a:solidFill>
+                      <a:srgbClr val="FFFFFF"/>
+                    </a:solidFill>
+                  </a:tcPr>
+                </a:tc>
+              </a:tr>
+            </a:tbl>
+          </a:graphicData>
+        </a:graphic>
+      </p:graphicFrame>
+      <p:sp>
+        <p:nvSpPr>
+          <p:cNvPr id="6" name="TextBox 5"/>
+          <p:cNvSpPr txBox="1"/>
+          <p:nvPr/>
+        </p:nvSpPr>
+        <p:spPr>
+          <a:xfrm>
+            <a:off x="685800" y="6035040"/>
+            <a:ext cx="10881360" cy="731520"/>
+          </a:xfrm>
+          <a:prstGeom prst="rect">
+            <a:avLst/>
+          </a:prstGeom>
+          <a:noFill/>
+        </p:spPr>
+        <p:txBody>
+          <a:bodyPr wrap="square">
+            <a:spAutoFit/>
+          </a:bodyPr>
+          <a:lstStyle/>
+          <a:p>
+            <a:r>
+              <a:rPr sz="1000" i="1">
+                <a:solidFill>
+                  <a:srgbClr val="415046"/>
+                </a:solidFill>
+              </a:rPr>
+              <a:t>Illustrative, per the standard SoliqOnline-verified structure. ~30% annualised on deployed capital compares with 22–28% on unsecured SME lending — at lower risk: the invoice is government-verified, the payer has confirmed the obligation, and the bank holds a registered CBU priority claim. Bank stays profitable to a ~4% default rate.</a:t>
+            </a:r>
+          </a:p>
+        </p:txBody>
+      </p:sp>
+    </p:spTree>
+  </p:cSld>
+  <p:clrMapOvr>
+    <a:masterClrMapping/>
+  </p:clrMapOvr>
+</p:sld>
+</file>
+
+<file path=ppt/slides/slide13.xml><?xml version="1.0" encoding="utf-8"?>
+<p:sld xmlns:a="http://schemas.openxmlformats.org/drawingml/2006/main" xmlns:p="http://schemas.openxmlformats.org/presentationml/2006/main" xmlns:r="http://schemas.openxmlformats.org/officeDocument/2006/relationships">
+  <p:cSld>
+    <p:spTree>
+      <p:nvGrpSpPr>
+        <p:cNvPr id="1" name=""/>
+        <p:cNvGrpSpPr/>
+        <p:nvPr/>
+      </p:nvGrpSpPr>
+      <p:grpSpPr/>
+      <p:sp>
+        <p:nvSpPr>
+          <p:cNvPr id="2" name="Rectangle 1"/>
+          <p:cNvSpPr/>
+          <p:nvPr/>
+        </p:nvSpPr>
+        <p:spPr>
+          <a:xfrm>
+            <a:off x="0" y="0"/>
+            <a:ext cx="12191695" cy="6858000"/>
+          </a:xfrm>
+          <a:prstGeom prst="rect">
+            <a:avLst/>
+          </a:prstGeom>
+          <a:solidFill>
+            <a:srgbClr val="F7F6F1"/>
+          </a:solidFill>
+          <a:ln>
+            <a:noFill/>
+          </a:ln>
+          <a:effectLst/>
+        </p:spPr>
+        <p:style>
+          <a:lnRef idx="1">
+            <a:schemeClr val="accent1"/>
+          </a:lnRef>
+          <a:fillRef idx="3">
+            <a:schemeClr val="accent1"/>
+          </a:fillRef>
+          <a:effectRef idx="2">
+            <a:schemeClr val="accent1"/>
+          </a:effectRef>
+          <a:fontRef idx="minor">
+            <a:schemeClr val="lt1"/>
+          </a:fontRef>
+        </p:style>
+        <p:txBody>
+          <a:bodyPr rtlCol="0" anchor="ctr"/>
+          <a:lstStyle/>
+          <a:p>
+            <a:pPr algn="ctr"/>
+          </a:p>
+        </p:txBody>
+      </p:sp>
+      <p:sp>
+        <p:nvSpPr>
+          <p:cNvPr id="3" name="TextBox 2"/>
+          <p:cNvSpPr txBox="1"/>
+          <p:nvPr/>
+        </p:nvSpPr>
+        <p:spPr>
+          <a:xfrm>
+            <a:off x="640080" y="365760"/>
+            <a:ext cx="10972800" cy="365760"/>
+          </a:xfrm>
+          <a:prstGeom prst="rect">
+            <a:avLst/>
+          </a:prstGeom>
+          <a:noFill/>
+        </p:spPr>
+        <p:txBody>
+          <a:bodyPr wrap="none">
+            <a:spAutoFit/>
+          </a:bodyPr>
+          <a:lstStyle/>
+          <a:p>
+            <a:r>
+              <a:rPr sz="1100" b="1">
+                <a:solidFill>
+                  <a:srgbClr val="C8A24B"/>
+                </a:solidFill>
+              </a:rPr>
+              <a:t>PILLAR 1 · COMMERCIAL MODEL</a:t>
+            </a:r>
+          </a:p>
+        </p:txBody>
+      </p:sp>
+      <p:sp>
+        <p:nvSpPr>
+          <p:cNvPr id="4" name="Rectangle 3"/>
+          <p:cNvSpPr/>
+          <p:nvPr/>
+        </p:nvSpPr>
+        <p:spPr>
+          <a:xfrm>
+            <a:off x="640080" y="731520"/>
+            <a:ext cx="10881360" cy="777240"/>
+          </a:xfrm>
+          <a:prstGeom prst="rect">
+            <a:avLst/>
+          </a:prstGeom>
+          <a:solidFill>
+            <a:srgbClr val="1F5D43"/>
+          </a:solidFill>
+          <a:ln>
+            <a:noFill/>
+          </a:ln>
+          <a:effectLst/>
+        </p:spPr>
+        <p:style>
+          <a:lnRef idx="1">
+            <a:schemeClr val="accent1"/>
+          </a:lnRef>
+          <a:fillRef idx="3">
+            <a:schemeClr val="accent1"/>
+          </a:fillRef>
+          <a:effectRef idx="2">
+            <a:schemeClr val="accent1"/>
+          </a:effectRef>
+          <a:fontRef idx="minor">
+            <a:schemeClr val="lt1"/>
+          </a:fontRef>
+        </p:style>
+        <p:txBody>
+          <a:bodyPr rtlCol="0" anchor="ctr" wrap="square"/>
+          <a:lstStyle/>
+          <a:p>
+            <a:pPr algn="ctr"/>
+            <a:r>
+              <a:rPr sz="2100" b="1">
+                <a:solidFill>
+                  <a:srgbClr val="FFFFFF"/>
+                </a:solidFill>
+              </a:rPr>
+              <a:t>   Volume-only pricing — aligned with the bank</a:t>
+            </a:r>
+          </a:p>
+        </p:txBody>
+      </p:sp>
+      <p:graphicFrame>
+        <p:nvGraphicFramePr>
+          <p:cNvPr id="5" name="Table 4"/>
+          <p:cNvGraphicFramePr>
+            <a:graphicFrameLocks noGrp="1"/>
+          </p:cNvGraphicFramePr>
+          <p:nvPr/>
+        </p:nvGraphicFramePr>
+        <p:xfrm>
+          <a:off x="685800" y="1828800"/>
+          <a:ext cx="10835640" cy="1828800"/>
+        </p:xfrm>
+        <a:graphic>
+          <a:graphicData uri="http://schemas.openxmlformats.org/drawingml/2006/table">
+            <a:tbl>
+              <a:tblPr firstRow="1" bandRow="1">
+                <a:tableStyleId>{5C22544A-7EE6-4342-B048-85BDC9FD1C3A}</a:tableStyleId>
+              </a:tblPr>
+              <a:tblGrid>
+                <a:gridCol w="5417820"/>
+                <a:gridCol w="5417820"/>
+              </a:tblGrid>
+              <a:tr h="365760">
+                <a:tc>
+                  <a:txBody>
+                    <a:bodyPr/>
+                    <a:lstStyle/>
+                    <a:p>
+                      <a:r>
+                        <a:rPr sz="1100" b="1">
+                          <a:solidFill>
+                            <a:srgbClr val="FFFFFF"/>
+                          </a:solidFill>
+                        </a:rPr>
+                        <a:t>Monthly financed volume</a:t>
+                      </a:r>
+                    </a:p>
+                  </a:txBody>
+                  <a:tcPr>
+                    <a:solidFill>
+                      <a:srgbClr val="1F5D43"/>
+                    </a:solidFill>
+                  </a:tcPr>
+                </a:tc>
+                <a:tc>
+                  <a:txBody>
+                    <a:bodyPr/>
+                    <a:lstStyle/>
+                    <a:p>
+                      <a:r>
+                        <a:rPr sz="1100" b="1">
+                          <a:solidFill>
+                            <a:srgbClr val="FFFFFF"/>
+                          </a:solidFill>
+                        </a:rPr>
+                        <a:t>Platform fee (bps of financed volume)</a:t>
+                      </a:r>
+                    </a:p>
+                  </a:txBody>
+                  <a:tcPr>
+                    <a:solidFill>
+                      <a:srgbClr val="1F5D43"/>
+                    </a:solidFill>
+                  </a:tcPr>
+                </a:tc>
+              </a:tr>
+              <a:tr h="365760">
+                <a:tc>
+                  <a:txBody>
+                    <a:bodyPr/>
+                    <a:lstStyle/>
+                    <a:p>
+                      <a:r>
+                        <a:rPr sz="1050">
+                          <a:solidFill>
+                            <a:srgbClr val="14231B"/>
+                          </a:solidFill>
+                        </a:rPr>
+                        <a:t>Up to UZS 50 bn</a:t>
+                      </a:r>
+                    </a:p>
+                  </a:txBody>
+                  <a:tcPr>
+                    <a:solidFill>
+                      <a:srgbClr val="FFFFFF"/>
+                    </a:solidFill>
+                  </a:tcPr>
+                </a:tc>
+                <a:tc>
+                  <a:txBody>
+                    <a:bodyPr/>
+                    <a:lstStyle/>
+                    <a:p>
+                      <a:r>
+                        <a:rPr sz="1050">
+                          <a:solidFill>
+                            <a:srgbClr val="14231B"/>
+                          </a:solidFill>
+                        </a:rPr>
+                        <a:t>120 bps</a:t>
+                      </a:r>
+                    </a:p>
+                  </a:txBody>
+                  <a:tcPr>
+                    <a:solidFill>
+                      <a:srgbClr val="FFFFFF"/>
+                    </a:solidFill>
+                  </a:tcPr>
+                </a:tc>
+              </a:tr>
+              <a:tr h="365760">
+                <a:tc>
+                  <a:txBody>
+                    <a:bodyPr/>
+                    <a:lstStyle/>
+                    <a:p>
+                      <a:r>
+                        <a:rPr sz="1050">
+                          <a:solidFill>
+                            <a:srgbClr val="14231B"/>
+                          </a:solidFill>
+                        </a:rPr>
+                        <a:t>UZS 50–200 bn</a:t>
+                      </a:r>
+                    </a:p>
+                  </a:txBody>
+                  <a:tcPr>
+                    <a:solidFill>
+                      <a:srgbClr val="EEEDE5"/>
+                    </a:solidFill>
+                  </a:tcPr>
+                </a:tc>
+                <a:tc>
+                  <a:txBody>
+                    <a:bodyPr/>
+                    <a:lstStyle/>
+                    <a:p>
+                      <a:r>
+                        <a:rPr sz="1050">
+                          <a:solidFill>
+                            <a:srgbClr val="14231B"/>
+                          </a:solidFill>
+                        </a:rPr>
+                        <a:t>90 bps</a:t>
+                      </a:r>
+                    </a:p>
+                  </a:txBody>
+                  <a:tcPr>
+                    <a:solidFill>
+                      <a:srgbClr val="EEEDE5"/>
+                    </a:solidFill>
+                  </a:tcPr>
+                </a:tc>
+              </a:tr>
+              <a:tr h="365760">
+                <a:tc>
+                  <a:txBody>
+                    <a:bodyPr/>
+                    <a:lstStyle/>
+                    <a:p>
+                      <a:r>
+                        <a:rPr sz="1050">
+                          <a:solidFill>
+                            <a:srgbClr val="14231B"/>
+                          </a:solidFill>
+                        </a:rPr>
+                        <a:t>UZS 200–500 bn</a:t>
+                      </a:r>
+                    </a:p>
+                  </a:txBody>
+                  <a:tcPr>
+                    <a:solidFill>
+                      <a:srgbClr val="FFFFFF"/>
+                    </a:solidFill>
+                  </a:tcPr>
+                </a:tc>
+                <a:tc>
+                  <a:txBody>
+                    <a:bodyPr/>
+                    <a:lstStyle/>
+                    <a:p>
+                      <a:r>
+                        <a:rPr sz="1050">
+                          <a:solidFill>
+                            <a:srgbClr val="14231B"/>
+                          </a:solidFill>
+                        </a:rPr>
+                        <a:t>70 bps</a:t>
+                      </a:r>
+                    </a:p>
+                  </a:txBody>
+                  <a:tcPr>
+                    <a:solidFill>
+                      <a:srgbClr val="FFFFFF"/>
+                    </a:solidFill>
+                  </a:tcPr>
+                </a:tc>
+              </a:tr>
+              <a:tr h="365760">
+                <a:tc>
+                  <a:txBody>
+                    <a:bodyPr/>
+                    <a:lstStyle/>
+                    <a:p>
+                      <a:r>
+                        <a:rPr sz="1050">
+                          <a:solidFill>
+                            <a:srgbClr val="14231B"/>
+                          </a:solidFill>
+                        </a:rPr>
+                        <a:t>Over UZS 500 bn</a:t>
+                      </a:r>
+                    </a:p>
+                  </a:txBody>
+                  <a:tcPr>
+                    <a:solidFill>
+                      <a:srgbClr val="EEEDE5"/>
+                    </a:solidFill>
+                  </a:tcPr>
+                </a:tc>
+                <a:tc>
+                  <a:txBody>
+                    <a:bodyPr/>
+                    <a:lstStyle/>
+                    <a:p>
+                      <a:r>
+                        <a:rPr sz="1050">
+                          <a:solidFill>
+                            <a:srgbClr val="14231B"/>
+                          </a:solidFill>
+                        </a:rPr>
+                        <a:t>55 bps</a:t>
+                      </a:r>
+                    </a:p>
+                  </a:txBody>
+                  <a:tcPr>
+                    <a:solidFill>
+                      <a:srgbClr val="EEEDE5"/>
+                    </a:solidFill>
+                  </a:tcPr>
+                </a:tc>
+              </a:tr>
+            </a:tbl>
+          </a:graphicData>
+        </a:graphic>
+      </p:graphicFrame>
+      <p:sp>
+        <p:nvSpPr>
+          <p:cNvPr id="6" name="TextBox 5"/>
+          <p:cNvSpPr txBox="1"/>
+          <p:nvPr/>
+        </p:nvSpPr>
+        <p:spPr>
+          <a:xfrm>
+            <a:off x="685800" y="6035040"/>
+            <a:ext cx="10881360" cy="731520"/>
+          </a:xfrm>
+          <a:prstGeom prst="rect">
+            <a:avLst/>
+          </a:prstGeom>
+          <a:noFill/>
+        </p:spPr>
+        <p:txBody>
+          <a:bodyPr wrap="square">
+            <a:spAutoFit/>
+          </a:bodyPr>
+          <a:lstStyle/>
+          <a:p>
+            <a:r>
+              <a:rPr sz="1000" i="1">
+                <a:solidFill>
+                  <a:srgbClr val="415046"/>
+                </a:solidFill>
+              </a:rPr>
+              <a:t>Illustrative. No SaaS licence, no per-seat, no setup fee — Consistente is paid only when the bank finances an invoice. Options on the table: a revenue-share alternative (a small % of the bank's discount income instead of bps), 12-month bank exclusivity in Uzbekistan, and a Year-3 deferred-equity option structured as new shares (non-dilutive, no board/veto rights). International SPV module: ~60 bps p.a. on invested AUM + a performance share above a hurdle. Final figures to be set with Universalbank.</a:t>
+            </a:r>
+          </a:p>
+        </p:txBody>
+      </p:sp>
+    </p:spTree>
+  </p:cSld>
+  <p:clrMapOvr>
+    <a:masterClrMapping/>
+  </p:clrMapOvr>
+</p:sld>
+</file>
+
+<file path=ppt/slides/slide14.xml><?xml version="1.0" encoding="utf-8"?>
+<p:sld xmlns:a="http://schemas.openxmlformats.org/drawingml/2006/main" xmlns:p="http://schemas.openxmlformats.org/presentationml/2006/main" xmlns:r="http://schemas.openxmlformats.org/officeDocument/2006/relationships">
+  <p:cSld>
+    <p:spTree>
+      <p:nvGrpSpPr>
+        <p:cNvPr id="1" name=""/>
+        <p:cNvGrpSpPr/>
+        <p:nvPr/>
+      </p:nvGrpSpPr>
+      <p:grpSpPr/>
+      <p:sp>
+        <p:nvSpPr>
+          <p:cNvPr id="2" name="Rectangle 1"/>
+          <p:cNvSpPr/>
+          <p:nvPr/>
+        </p:nvSpPr>
+        <p:spPr>
+          <a:xfrm>
+            <a:off x="0" y="0"/>
+            <a:ext cx="12191695" cy="6858000"/>
+          </a:xfrm>
+          <a:prstGeom prst="rect">
+            <a:avLst/>
+          </a:prstGeom>
+          <a:solidFill>
+            <a:srgbClr val="F7F6F1"/>
+          </a:solidFill>
+          <a:ln>
+            <a:noFill/>
+          </a:ln>
+          <a:effectLst/>
+        </p:spPr>
+        <p:style>
+          <a:lnRef idx="1">
+            <a:schemeClr val="accent1"/>
+          </a:lnRef>
+          <a:fillRef idx="3">
+            <a:schemeClr val="accent1"/>
+          </a:fillRef>
+          <a:effectRef idx="2">
+            <a:schemeClr val="accent1"/>
+          </a:effectRef>
+          <a:fontRef idx="minor">
+            <a:schemeClr val="lt1"/>
+          </a:fontRef>
+        </p:style>
+        <p:txBody>
+          <a:bodyPr rtlCol="0" anchor="ctr"/>
+          <a:lstStyle/>
+          <a:p>
+            <a:pPr algn="ctr"/>
+          </a:p>
+        </p:txBody>
+      </p:sp>
+      <p:sp>
+        <p:nvSpPr>
+          <p:cNvPr id="3" name="TextBox 2"/>
+          <p:cNvSpPr txBox="1"/>
+          <p:nvPr/>
+        </p:nvSpPr>
+        <p:spPr>
+          <a:xfrm>
+            <a:off x="640080" y="365760"/>
+            <a:ext cx="10972800" cy="365760"/>
+          </a:xfrm>
+          <a:prstGeom prst="rect">
+            <a:avLst/>
+          </a:prstGeom>
+          <a:noFill/>
+        </p:spPr>
+        <p:txBody>
+          <a:bodyPr wrap="none">
+            <a:spAutoFit/>
+          </a:bodyPr>
+          <a:lstStyle/>
+          <a:p>
+            <a:r>
+              <a:rPr sz="1100" b="1">
+                <a:solidFill>
+                  <a:srgbClr val="C8A24B"/>
+                </a:solidFill>
+              </a:rPr>
               <a:t>PILLAR 2 · INTERNATIONAL CAPITAL</a:t>
             </a:r>
           </a:p>
@@ -3492,7 +5366,553 @@
 </p:sld>
 </file>
 
-<file path=ppt/slides/slide11.xml><?xml version="1.0" encoding="utf-8"?>
+<file path=ppt/slides/slide15.xml><?xml version="1.0" encoding="utf-8"?>
+<p:sld xmlns:a="http://schemas.openxmlformats.org/drawingml/2006/main" xmlns:p="http://schemas.openxmlformats.org/presentationml/2006/main" xmlns:r="http://schemas.openxmlformats.org/officeDocument/2006/relationships">
+  <p:cSld>
+    <p:spTree>
+      <p:nvGrpSpPr>
+        <p:cNvPr id="1" name=""/>
+        <p:cNvGrpSpPr/>
+        <p:nvPr/>
+      </p:nvGrpSpPr>
+      <p:grpSpPr/>
+      <p:sp>
+        <p:nvSpPr>
+          <p:cNvPr id="2" name="Rectangle 1"/>
+          <p:cNvSpPr/>
+          <p:nvPr/>
+        </p:nvSpPr>
+        <p:spPr>
+          <a:xfrm>
+            <a:off x="0" y="0"/>
+            <a:ext cx="12191695" cy="6858000"/>
+          </a:xfrm>
+          <a:prstGeom prst="rect">
+            <a:avLst/>
+          </a:prstGeom>
+          <a:solidFill>
+            <a:srgbClr val="F7F6F1"/>
+          </a:solidFill>
+          <a:ln>
+            <a:noFill/>
+          </a:ln>
+          <a:effectLst/>
+        </p:spPr>
+        <p:style>
+          <a:lnRef idx="1">
+            <a:schemeClr val="accent1"/>
+          </a:lnRef>
+          <a:fillRef idx="3">
+            <a:schemeClr val="accent1"/>
+          </a:fillRef>
+          <a:effectRef idx="2">
+            <a:schemeClr val="accent1"/>
+          </a:effectRef>
+          <a:fontRef idx="minor">
+            <a:schemeClr val="lt1"/>
+          </a:fontRef>
+        </p:style>
+        <p:txBody>
+          <a:bodyPr rtlCol="0" anchor="ctr"/>
+          <a:lstStyle/>
+          <a:p>
+            <a:pPr algn="ctr"/>
+          </a:p>
+        </p:txBody>
+      </p:sp>
+      <p:sp>
+        <p:nvSpPr>
+          <p:cNvPr id="3" name="TextBox 2"/>
+          <p:cNvSpPr txBox="1"/>
+          <p:nvPr/>
+        </p:nvSpPr>
+        <p:spPr>
+          <a:xfrm>
+            <a:off x="640080" y="365760"/>
+            <a:ext cx="10972800" cy="365760"/>
+          </a:xfrm>
+          <a:prstGeom prst="rect">
+            <a:avLst/>
+          </a:prstGeom>
+          <a:noFill/>
+        </p:spPr>
+        <p:txBody>
+          <a:bodyPr wrap="none">
+            <a:spAutoFit/>
+          </a:bodyPr>
+          <a:lstStyle/>
+          <a:p>
+            <a:r>
+              <a:rPr sz="1100" b="1">
+                <a:solidFill>
+                  <a:srgbClr val="C8A24B"/>
+                </a:solidFill>
+              </a:rPr>
+              <a:t>JOURNEY · INVESTOR</a:t>
+            </a:r>
+          </a:p>
+        </p:txBody>
+      </p:sp>
+      <p:sp>
+        <p:nvSpPr>
+          <p:cNvPr id="4" name="Rectangle 3"/>
+          <p:cNvSpPr/>
+          <p:nvPr/>
+        </p:nvSpPr>
+        <p:spPr>
+          <a:xfrm>
+            <a:off x="640080" y="731520"/>
+            <a:ext cx="10881360" cy="777240"/>
+          </a:xfrm>
+          <a:prstGeom prst="rect">
+            <a:avLst/>
+          </a:prstGeom>
+          <a:solidFill>
+            <a:srgbClr val="1F5D43"/>
+          </a:solidFill>
+          <a:ln>
+            <a:noFill/>
+          </a:ln>
+          <a:effectLst/>
+        </p:spPr>
+        <p:style>
+          <a:lnRef idx="1">
+            <a:schemeClr val="accent1"/>
+          </a:lnRef>
+          <a:fillRef idx="3">
+            <a:schemeClr val="accent1"/>
+          </a:fillRef>
+          <a:effectRef idx="2">
+            <a:schemeClr val="accent1"/>
+          </a:effectRef>
+          <a:fontRef idx="minor">
+            <a:schemeClr val="lt1"/>
+          </a:fontRef>
+        </p:style>
+        <p:txBody>
+          <a:bodyPr rtlCol="0" anchor="ctr" wrap="square"/>
+          <a:lstStyle/>
+          <a:p>
+            <a:pPr algn="ctr"/>
+            <a:r>
+              <a:rPr sz="2100" b="1">
+                <a:solidFill>
+                  <a:srgbClr val="FFFFFF"/>
+                </a:solidFill>
+              </a:rPr>
+              <a:t>   The investor's journey — onboarding to distribution</a:t>
+            </a:r>
+          </a:p>
+        </p:txBody>
+      </p:sp>
+      <p:pic>
+        <p:nvPicPr>
+          <p:cNvPr id="5" name="Picture 4" descr="en-17-investor-journey.png"/>
+          <p:cNvPicPr>
+            <a:picLocks noChangeAspect="1"/>
+          </p:cNvPicPr>
+          <p:nvPr/>
+        </p:nvPicPr>
+        <p:blipFill>
+          <a:blip r:embed="rId2"/>
+          <a:stretch>
+            <a:fillRect/>
+          </a:stretch>
+        </p:blipFill>
+        <p:spPr>
+          <a:xfrm>
+            <a:off x="548640" y="3846946"/>
+            <a:ext cx="6583680" cy="444268"/>
+          </a:xfrm>
+          <a:prstGeom prst="rect">
+            <a:avLst/>
+          </a:prstGeom>
+        </p:spPr>
+      </p:pic>
+      <p:sp>
+        <p:nvSpPr>
+          <p:cNvPr id="6" name="TextBox 5"/>
+          <p:cNvSpPr txBox="1"/>
+          <p:nvPr/>
+        </p:nvSpPr>
+        <p:spPr>
+          <a:xfrm>
+            <a:off x="548640" y="6355080"/>
+            <a:ext cx="6583680" cy="365760"/>
+          </a:xfrm>
+          <a:prstGeom prst="rect">
+            <a:avLst/>
+          </a:prstGeom>
+          <a:noFill/>
+        </p:spPr>
+        <p:txBody>
+          <a:bodyPr wrap="none">
+            <a:spAutoFit/>
+          </a:bodyPr>
+          <a:lstStyle/>
+          <a:p>
+            <a:pPr algn="ctr"/>
+            <a:r>
+              <a:rPr sz="1000" i="1">
+                <a:solidFill>
+                  <a:srgbClr val="415046"/>
+                </a:solidFill>
+              </a:rPr>
+              <a:t>Investor: onboard → commit capital → hold with AI reporting → get paid</a:t>
+            </a:r>
+          </a:p>
+        </p:txBody>
+      </p:sp>
+      <p:sp>
+        <p:nvSpPr>
+          <p:cNvPr id="7" name="TextBox 6"/>
+          <p:cNvSpPr txBox="1"/>
+          <p:nvPr/>
+        </p:nvSpPr>
+        <p:spPr>
+          <a:xfrm>
+            <a:off x="7406640" y="1828800"/>
+            <a:ext cx="4480560" cy="4572000"/>
+          </a:xfrm>
+          <a:prstGeom prst="rect">
+            <a:avLst/>
+          </a:prstGeom>
+          <a:noFill/>
+        </p:spPr>
+        <p:txBody>
+          <a:bodyPr wrap="square">
+            <a:spAutoFit/>
+          </a:bodyPr>
+          <a:lstStyle/>
+          <a:p>
+            <a:pPr>
+              <a:spcAft>
+                <a:spcPts val="900"/>
+              </a:spcAft>
+            </a:pPr>
+            <a:r>
+              <a:rPr sz="1300">
+                <a:solidFill>
+                  <a:srgbClr val="14231B"/>
+                </a:solidFill>
+              </a:rPr>
+              <a:t>•  Retail, institutional and Gulf investors onboard once (KYC / accreditation), then fund via the marketplace or the SPV.</a:t>
+            </a:r>
+          </a:p>
+          <a:p>
+            <a:pPr>
+              <a:spcAft>
+                <a:spcPts val="900"/>
+              </a:spcAft>
+            </a:pPr>
+            <a:r>
+              <a:rPr sz="1300">
+                <a:solidFill>
+                  <a:srgbClr val="14231B"/>
+                </a:solidFill>
+              </a:rPr>
+              <a:t>•  They hold positions with on-demand AI portfolio reporting; at maturity, principal + return are distributed automatically.</a:t>
+            </a:r>
+          </a:p>
+          <a:p>
+            <a:pPr>
+              <a:spcAft>
+                <a:spcPts val="900"/>
+              </a:spcAft>
+            </a:pPr>
+            <a:r>
+              <a:rPr sz="1300">
+                <a:solidFill>
+                  <a:srgbClr val="14231B"/>
+                </a:solidFill>
+              </a:rPr>
+              <a:t>•  This is Module B — it plugs onto the same origination engine later, without changing anything a seller or the bank does.</a:t>
+            </a:r>
+          </a:p>
+        </p:txBody>
+      </p:sp>
+    </p:spTree>
+  </p:cSld>
+  <p:clrMapOvr>
+    <a:masterClrMapping/>
+  </p:clrMapOvr>
+</p:sld>
+</file>
+
+<file path=ppt/slides/slide16.xml><?xml version="1.0" encoding="utf-8"?>
+<p:sld xmlns:a="http://schemas.openxmlformats.org/drawingml/2006/main" xmlns:p="http://schemas.openxmlformats.org/presentationml/2006/main" xmlns:r="http://schemas.openxmlformats.org/officeDocument/2006/relationships">
+  <p:cSld>
+    <p:spTree>
+      <p:nvGrpSpPr>
+        <p:cNvPr id="1" name=""/>
+        <p:cNvGrpSpPr/>
+        <p:nvPr/>
+      </p:nvGrpSpPr>
+      <p:grpSpPr/>
+      <p:sp>
+        <p:nvSpPr>
+          <p:cNvPr id="2" name="Rectangle 1"/>
+          <p:cNvSpPr/>
+          <p:nvPr/>
+        </p:nvSpPr>
+        <p:spPr>
+          <a:xfrm>
+            <a:off x="0" y="0"/>
+            <a:ext cx="12191695" cy="6858000"/>
+          </a:xfrm>
+          <a:prstGeom prst="rect">
+            <a:avLst/>
+          </a:prstGeom>
+          <a:solidFill>
+            <a:srgbClr val="F7F6F1"/>
+          </a:solidFill>
+          <a:ln>
+            <a:noFill/>
+          </a:ln>
+          <a:effectLst/>
+        </p:spPr>
+        <p:style>
+          <a:lnRef idx="1">
+            <a:schemeClr val="accent1"/>
+          </a:lnRef>
+          <a:fillRef idx="3">
+            <a:schemeClr val="accent1"/>
+          </a:fillRef>
+          <a:effectRef idx="2">
+            <a:schemeClr val="accent1"/>
+          </a:effectRef>
+          <a:fontRef idx="minor">
+            <a:schemeClr val="lt1"/>
+          </a:fontRef>
+        </p:style>
+        <p:txBody>
+          <a:bodyPr rtlCol="0" anchor="ctr"/>
+          <a:lstStyle/>
+          <a:p>
+            <a:pPr algn="ctr"/>
+          </a:p>
+        </p:txBody>
+      </p:sp>
+      <p:sp>
+        <p:nvSpPr>
+          <p:cNvPr id="3" name="TextBox 2"/>
+          <p:cNvSpPr txBox="1"/>
+          <p:nvPr/>
+        </p:nvSpPr>
+        <p:spPr>
+          <a:xfrm>
+            <a:off x="640080" y="365760"/>
+            <a:ext cx="10972800" cy="365760"/>
+          </a:xfrm>
+          <a:prstGeom prst="rect">
+            <a:avLst/>
+          </a:prstGeom>
+          <a:noFill/>
+        </p:spPr>
+        <p:txBody>
+          <a:bodyPr wrap="none">
+            <a:spAutoFit/>
+          </a:bodyPr>
+          <a:lstStyle/>
+          <a:p>
+            <a:r>
+              <a:rPr sz="1100" b="1">
+                <a:solidFill>
+                  <a:srgbClr val="C8A24B"/>
+                </a:solidFill>
+              </a:rPr>
+              <a:t>DELIVERY · DECOMPOSABILITY</a:t>
+            </a:r>
+          </a:p>
+        </p:txBody>
+      </p:sp>
+      <p:sp>
+        <p:nvSpPr>
+          <p:cNvPr id="4" name="Rectangle 3"/>
+          <p:cNvSpPr/>
+          <p:nvPr/>
+        </p:nvSpPr>
+        <p:spPr>
+          <a:xfrm>
+            <a:off x="640080" y="731520"/>
+            <a:ext cx="10881360" cy="777240"/>
+          </a:xfrm>
+          <a:prstGeom prst="rect">
+            <a:avLst/>
+          </a:prstGeom>
+          <a:solidFill>
+            <a:srgbClr val="1F5D43"/>
+          </a:solidFill>
+          <a:ln>
+            <a:noFill/>
+          </a:ln>
+          <a:effectLst/>
+        </p:spPr>
+        <p:style>
+          <a:lnRef idx="1">
+            <a:schemeClr val="accent1"/>
+          </a:lnRef>
+          <a:fillRef idx="3">
+            <a:schemeClr val="accent1"/>
+          </a:fillRef>
+          <a:effectRef idx="2">
+            <a:schemeClr val="accent1"/>
+          </a:effectRef>
+          <a:fontRef idx="minor">
+            <a:schemeClr val="lt1"/>
+          </a:fontRef>
+        </p:style>
+        <p:txBody>
+          <a:bodyPr rtlCol="0" anchor="ctr" wrap="square"/>
+          <a:lstStyle/>
+          <a:p>
+            <a:pPr algn="ctr"/>
+            <a:r>
+              <a:rPr sz="2100" b="1">
+                <a:solidFill>
+                  <a:srgbClr val="FFFFFF"/>
+                </a:solidFill>
+              </a:rPr>
+              <a:t>   Two modules — buy one, or both, in sequence</a:t>
+            </a:r>
+          </a:p>
+        </p:txBody>
+      </p:sp>
+      <p:pic>
+        <p:nvPicPr>
+          <p:cNvPr id="5" name="Picture 4" descr="en-18-decomposition.png"/>
+          <p:cNvPicPr>
+            <a:picLocks noChangeAspect="1"/>
+          </p:cNvPicPr>
+          <p:nvPr/>
+        </p:nvPicPr>
+        <p:blipFill>
+          <a:blip r:embed="rId2"/>
+          <a:stretch>
+            <a:fillRect/>
+          </a:stretch>
+        </p:blipFill>
+        <p:spPr>
+          <a:xfrm>
+            <a:off x="548640" y="3679319"/>
+            <a:ext cx="6583680" cy="779522"/>
+          </a:xfrm>
+          <a:prstGeom prst="rect">
+            <a:avLst/>
+          </a:prstGeom>
+        </p:spPr>
+      </p:pic>
+      <p:sp>
+        <p:nvSpPr>
+          <p:cNvPr id="6" name="TextBox 5"/>
+          <p:cNvSpPr txBox="1"/>
+          <p:nvPr/>
+        </p:nvSpPr>
+        <p:spPr>
+          <a:xfrm>
+            <a:off x="548640" y="6355080"/>
+            <a:ext cx="6583680" cy="365760"/>
+          </a:xfrm>
+          <a:prstGeom prst="rect">
+            <a:avLst/>
+          </a:prstGeom>
+          <a:noFill/>
+        </p:spPr>
+        <p:txBody>
+          <a:bodyPr wrap="none">
+            <a:spAutoFit/>
+          </a:bodyPr>
+          <a:lstStyle/>
+          <a:p>
+            <a:pPr algn="ctr"/>
+            <a:r>
+              <a:rPr sz="1000" i="1">
+                <a:solidFill>
+                  <a:srgbClr val="415046"/>
+                </a:solidFill>
+              </a:rPr>
+              <a:t>Origination (Module A) and Investors/SPV (Module B) are independently deployable</a:t>
+            </a:r>
+          </a:p>
+        </p:txBody>
+      </p:sp>
+      <p:sp>
+        <p:nvSpPr>
+          <p:cNvPr id="7" name="TextBox 6"/>
+          <p:cNvSpPr txBox="1"/>
+          <p:nvPr/>
+        </p:nvSpPr>
+        <p:spPr>
+          <a:xfrm>
+            <a:off x="7406640" y="1828800"/>
+            <a:ext cx="4480560" cy="4572000"/>
+          </a:xfrm>
+          <a:prstGeom prst="rect">
+            <a:avLst/>
+          </a:prstGeom>
+          <a:noFill/>
+        </p:spPr>
+        <p:txBody>
+          <a:bodyPr wrap="square">
+            <a:spAutoFit/>
+          </a:bodyPr>
+          <a:lstStyle/>
+          <a:p>
+            <a:pPr>
+              <a:spcAft>
+                <a:spcPts val="900"/>
+              </a:spcAft>
+            </a:pPr>
+            <a:r>
+              <a:rPr sz="1300">
+                <a:solidFill>
+                  <a:srgbClr val="14231B"/>
+                </a:solidFill>
+              </a:rPr>
+              <a:t>•  Module A — Origination can be Universalbank's whole first phase: bank-funded factoring, live in weeks, immediately satisfying the Decree-106 mandate.</a:t>
+            </a:r>
+          </a:p>
+          <a:p>
+            <a:pPr>
+              <a:spcAft>
+                <a:spcPts val="900"/>
+              </a:spcAft>
+            </a:pPr>
+            <a:r>
+              <a:rPr sz="1300">
+                <a:solidFill>
+                  <a:srgbClr val="14231B"/>
+                </a:solidFill>
+              </a:rPr>
+              <a:t>•  Module B — Investors &amp; SPV adds the marketplace and DIFC/international capital later, over the same engine, with no rework.</a:t>
+            </a:r>
+          </a:p>
+          <a:p>
+            <a:pPr>
+              <a:spcAft>
+                <a:spcPts val="900"/>
+              </a:spcAft>
+            </a:pPr>
+            <a:r>
+              <a:rPr sz="1300">
+                <a:solidFill>
+                  <a:srgbClr val="14231B"/>
+                </a:solidFill>
+              </a:rPr>
+              <a:t>•  The capital layer is the seam: swap or add funding sources without touching origination — de-risking the programme and the investment.</a:t>
+            </a:r>
+          </a:p>
+        </p:txBody>
+      </p:sp>
+    </p:spTree>
+  </p:cSld>
+  <p:clrMapOvr>
+    <a:masterClrMapping/>
+  </p:clrMapOvr>
+</p:sld>
+</file>
+
+<file path=ppt/slides/slide17.xml><?xml version="1.0" encoding="utf-8"?>
 <p:sld xmlns:a="http://schemas.openxmlformats.org/drawingml/2006/main" xmlns:p="http://schemas.openxmlformats.org/presentationml/2006/main" xmlns:r="http://schemas.openxmlformats.org/officeDocument/2006/relationships">
   <p:cSld>
     <p:spTree>
@@ -4557,7 +6977,7 @@
 </p:sld>
 </file>
 
-<file path=ppt/slides/slide12.xml><?xml version="1.0" encoding="utf-8"?>
+<file path=ppt/slides/slide18.xml><?xml version="1.0" encoding="utf-8"?>
 <p:sld xmlns:a="http://schemas.openxmlformats.org/drawingml/2006/main" xmlns:p="http://schemas.openxmlformats.org/presentationml/2006/main" xmlns:r="http://schemas.openxmlformats.org/officeDocument/2006/relationships">
   <p:cSld>
     <p:spTree>
@@ -4787,7 +7207,7 @@
 </p:sld>
 </file>
 
-<file path=ppt/slides/slide13.xml><?xml version="1.0" encoding="utf-8"?>
+<file path=ppt/slides/slide19.xml><?xml version="1.0" encoding="utf-8"?>
 <p:sld xmlns:a="http://schemas.openxmlformats.org/drawingml/2006/main" xmlns:p="http://schemas.openxmlformats.org/presentationml/2006/main" xmlns:r="http://schemas.openxmlformats.org/officeDocument/2006/relationships">
   <p:cSld>
     <p:spTree>
@@ -5048,997 +7468,6 @@
                 </a:solidFill>
               </a:rPr>
               <a:t>•  Grok (x.ai) is reached over an OpenAI-compatible interface — the model id is configuration, avoiding vendor lock-in.</a:t>
-            </a:r>
-          </a:p>
-        </p:txBody>
-      </p:sp>
-    </p:spTree>
-  </p:cSld>
-  <p:clrMapOvr>
-    <a:masterClrMapping/>
-  </p:clrMapOvr>
-</p:sld>
-</file>
-
-<file path=ppt/slides/slide14.xml><?xml version="1.0" encoding="utf-8"?>
-<p:sld xmlns:a="http://schemas.openxmlformats.org/drawingml/2006/main" xmlns:p="http://schemas.openxmlformats.org/presentationml/2006/main" xmlns:r="http://schemas.openxmlformats.org/officeDocument/2006/relationships">
-  <p:cSld>
-    <p:spTree>
-      <p:nvGrpSpPr>
-        <p:cNvPr id="1" name=""/>
-        <p:cNvGrpSpPr/>
-        <p:nvPr/>
-      </p:nvGrpSpPr>
-      <p:grpSpPr/>
-      <p:sp>
-        <p:nvSpPr>
-          <p:cNvPr id="2" name="Rectangle 1"/>
-          <p:cNvSpPr/>
-          <p:nvPr/>
-        </p:nvSpPr>
-        <p:spPr>
-          <a:xfrm>
-            <a:off x="0" y="0"/>
-            <a:ext cx="12191695" cy="6858000"/>
-          </a:xfrm>
-          <a:prstGeom prst="rect">
-            <a:avLst/>
-          </a:prstGeom>
-          <a:solidFill>
-            <a:srgbClr val="F7F6F1"/>
-          </a:solidFill>
-          <a:ln>
-            <a:noFill/>
-          </a:ln>
-          <a:effectLst/>
-        </p:spPr>
-        <p:style>
-          <a:lnRef idx="1">
-            <a:schemeClr val="accent1"/>
-          </a:lnRef>
-          <a:fillRef idx="3">
-            <a:schemeClr val="accent1"/>
-          </a:fillRef>
-          <a:effectRef idx="2">
-            <a:schemeClr val="accent1"/>
-          </a:effectRef>
-          <a:fontRef idx="minor">
-            <a:schemeClr val="lt1"/>
-          </a:fontRef>
-        </p:style>
-        <p:txBody>
-          <a:bodyPr rtlCol="0" anchor="ctr"/>
-          <a:lstStyle/>
-          <a:p>
-            <a:pPr algn="ctr"/>
-          </a:p>
-        </p:txBody>
-      </p:sp>
-      <p:sp>
-        <p:nvSpPr>
-          <p:cNvPr id="3" name="TextBox 2"/>
-          <p:cNvSpPr txBox="1"/>
-          <p:nvPr/>
-        </p:nvSpPr>
-        <p:spPr>
-          <a:xfrm>
-            <a:off x="640080" y="365760"/>
-            <a:ext cx="10972800" cy="365760"/>
-          </a:xfrm>
-          <a:prstGeom prst="rect">
-            <a:avLst/>
-          </a:prstGeom>
-          <a:noFill/>
-        </p:spPr>
-        <p:txBody>
-          <a:bodyPr wrap="none">
-            <a:spAutoFit/>
-          </a:bodyPr>
-          <a:lstStyle/>
-          <a:p>
-            <a:r>
-              <a:rPr sz="1100" b="1">
-                <a:solidFill>
-                  <a:srgbClr val="C8A24B"/>
-                </a:solidFill>
-              </a:rPr>
-              <a:t>PROOF · WORKING TODAY</a:t>
-            </a:r>
-          </a:p>
-        </p:txBody>
-      </p:sp>
-      <p:sp>
-        <p:nvSpPr>
-          <p:cNvPr id="4" name="Rectangle 3"/>
-          <p:cNvSpPr/>
-          <p:nvPr/>
-        </p:nvSpPr>
-        <p:spPr>
-          <a:xfrm>
-            <a:off x="640080" y="731520"/>
-            <a:ext cx="10881360" cy="777240"/>
-          </a:xfrm>
-          <a:prstGeom prst="rect">
-            <a:avLst/>
-          </a:prstGeom>
-          <a:solidFill>
-            <a:srgbClr val="1F5D43"/>
-          </a:solidFill>
-          <a:ln>
-            <a:noFill/>
-          </a:ln>
-          <a:effectLst/>
-        </p:spPr>
-        <p:style>
-          <a:lnRef idx="1">
-            <a:schemeClr val="accent1"/>
-          </a:lnRef>
-          <a:fillRef idx="3">
-            <a:schemeClr val="accent1"/>
-          </a:fillRef>
-          <a:effectRef idx="2">
-            <a:schemeClr val="accent1"/>
-          </a:effectRef>
-          <a:fontRef idx="minor">
-            <a:schemeClr val="lt1"/>
-          </a:fontRef>
-        </p:style>
-        <p:txBody>
-          <a:bodyPr rtlCol="0" anchor="ctr" wrap="square"/>
-          <a:lstStyle/>
-          <a:p>
-            <a:pPr algn="ctr"/>
-            <a:r>
-              <a:rPr sz="2100" b="1">
-                <a:solidFill>
-                  <a:srgbClr val="FFFFFF"/>
-                </a:solidFill>
-              </a:rPr>
-              <a:t>   The AI is not a slide — it's shipped</a:t>
-            </a:r>
-          </a:p>
-        </p:txBody>
-      </p:sp>
-      <p:pic>
-        <p:nvPicPr>
-          <p:cNvPr id="5" name="Picture 4" descr="en-13-ai-triage.png"/>
-          <p:cNvPicPr>
-            <a:picLocks noChangeAspect="1"/>
-          </p:cNvPicPr>
-          <p:nvPr/>
-        </p:nvPicPr>
-        <p:blipFill>
-          <a:blip r:embed="rId2"/>
-          <a:stretch>
-            <a:fillRect/>
-          </a:stretch>
-        </p:blipFill>
-        <p:spPr>
-          <a:xfrm>
-            <a:off x="548640" y="2011680"/>
-            <a:ext cx="6583680" cy="4114800"/>
-          </a:xfrm>
-          <a:prstGeom prst="rect">
-            <a:avLst/>
-          </a:prstGeom>
-        </p:spPr>
-      </p:pic>
-      <p:sp>
-        <p:nvSpPr>
-          <p:cNvPr id="6" name="TextBox 5"/>
-          <p:cNvSpPr txBox="1"/>
-          <p:nvPr/>
-        </p:nvSpPr>
-        <p:spPr>
-          <a:xfrm>
-            <a:off x="548640" y="6355080"/>
-            <a:ext cx="6583680" cy="365760"/>
-          </a:xfrm>
-          <a:prstGeom prst="rect">
-            <a:avLst/>
-          </a:prstGeom>
-          <a:noFill/>
-        </p:spPr>
-        <p:txBody>
-          <a:bodyPr wrap="none">
-            <a:spAutoFit/>
-          </a:bodyPr>
-          <a:lstStyle/>
-          <a:p>
-            <a:pPr algn="ctr"/>
-            <a:r>
-              <a:rPr sz="1000" i="1">
-                <a:solidFill>
-                  <a:srgbClr val="415046"/>
-                </a:solidFill>
-              </a:rPr>
-              <a:t>Live chat-based invoice triage in the Factorio app</a:t>
-            </a:r>
-          </a:p>
-        </p:txBody>
-      </p:sp>
-      <p:sp>
-        <p:nvSpPr>
-          <p:cNvPr id="7" name="TextBox 6"/>
-          <p:cNvSpPr txBox="1"/>
-          <p:nvPr/>
-        </p:nvSpPr>
-        <p:spPr>
-          <a:xfrm>
-            <a:off x="7406640" y="1828800"/>
-            <a:ext cx="4480560" cy="4572000"/>
-          </a:xfrm>
-          <a:prstGeom prst="rect">
-            <a:avLst/>
-          </a:prstGeom>
-          <a:noFill/>
-        </p:spPr>
-        <p:txBody>
-          <a:bodyPr wrap="square">
-            <a:spAutoFit/>
-          </a:bodyPr>
-          <a:lstStyle/>
-          <a:p>
-            <a:pPr>
-              <a:spcAft>
-                <a:spcPts val="900"/>
-              </a:spcAft>
-            </a:pPr>
-            <a:r>
-              <a:rPr sz="1300">
-                <a:solidFill>
-                  <a:srgbClr val="14231B"/>
-                </a:solidFill>
-              </a:rPr>
-              <a:t>•  A seller describes an invoice in a sentence; the assistant returns an indicative risk band, advance rate and next-document list.</a:t>
-            </a:r>
-          </a:p>
-          <a:p>
-            <a:pPr>
-              <a:spcAft>
-                <a:spcPts val="900"/>
-              </a:spcAft>
-            </a:pPr>
-            <a:r>
-              <a:rPr sz="1300">
-                <a:solidFill>
-                  <a:srgbClr val="14231B"/>
-                </a:solidFill>
-              </a:rPr>
-              <a:t>•  Built on Grok (x.ai), trilingual, with graceful fallback and full audit logging — the same pattern extends to scoring and reporting.</a:t>
-            </a:r>
-          </a:p>
-        </p:txBody>
-      </p:sp>
-    </p:spTree>
-  </p:cSld>
-  <p:clrMapOvr>
-    <a:masterClrMapping/>
-  </p:clrMapOvr>
-</p:sld>
-</file>
-
-<file path=ppt/slides/slide15.xml><?xml version="1.0" encoding="utf-8"?>
-<p:sld xmlns:a="http://schemas.openxmlformats.org/drawingml/2006/main" xmlns:p="http://schemas.openxmlformats.org/presentationml/2006/main" xmlns:r="http://schemas.openxmlformats.org/officeDocument/2006/relationships">
-  <p:cSld>
-    <p:spTree>
-      <p:nvGrpSpPr>
-        <p:cNvPr id="1" name=""/>
-        <p:cNvGrpSpPr/>
-        <p:nvPr/>
-      </p:nvGrpSpPr>
-      <p:grpSpPr/>
-      <p:sp>
-        <p:nvSpPr>
-          <p:cNvPr id="2" name="Rectangle 1"/>
-          <p:cNvSpPr/>
-          <p:nvPr/>
-        </p:nvSpPr>
-        <p:spPr>
-          <a:xfrm>
-            <a:off x="0" y="0"/>
-            <a:ext cx="12191695" cy="6858000"/>
-          </a:xfrm>
-          <a:prstGeom prst="rect">
-            <a:avLst/>
-          </a:prstGeom>
-          <a:solidFill>
-            <a:srgbClr val="F7F6F1"/>
-          </a:solidFill>
-          <a:ln>
-            <a:noFill/>
-          </a:ln>
-          <a:effectLst/>
-        </p:spPr>
-        <p:style>
-          <a:lnRef idx="1">
-            <a:schemeClr val="accent1"/>
-          </a:lnRef>
-          <a:fillRef idx="3">
-            <a:schemeClr val="accent1"/>
-          </a:fillRef>
-          <a:effectRef idx="2">
-            <a:schemeClr val="accent1"/>
-          </a:effectRef>
-          <a:fontRef idx="minor">
-            <a:schemeClr val="lt1"/>
-          </a:fontRef>
-        </p:style>
-        <p:txBody>
-          <a:bodyPr rtlCol="0" anchor="ctr"/>
-          <a:lstStyle/>
-          <a:p>
-            <a:pPr algn="ctr"/>
-          </a:p>
-        </p:txBody>
-      </p:sp>
-      <p:sp>
-        <p:nvSpPr>
-          <p:cNvPr id="3" name="TextBox 2"/>
-          <p:cNvSpPr txBox="1"/>
-          <p:nvPr/>
-        </p:nvSpPr>
-        <p:spPr>
-          <a:xfrm>
-            <a:off x="640080" y="365760"/>
-            <a:ext cx="10972800" cy="365760"/>
-          </a:xfrm>
-          <a:prstGeom prst="rect">
-            <a:avLst/>
-          </a:prstGeom>
-          <a:noFill/>
-        </p:spPr>
-        <p:txBody>
-          <a:bodyPr wrap="none">
-            <a:spAutoFit/>
-          </a:bodyPr>
-          <a:lstStyle/>
-          <a:p>
-            <a:r>
-              <a:rPr sz="1100" b="1">
-                <a:solidFill>
-                  <a:srgbClr val="C8A24B"/>
-                </a:solidFill>
-              </a:rPr>
-              <a:t>DELIVERY</a:t>
-            </a:r>
-          </a:p>
-        </p:txBody>
-      </p:sp>
-      <p:sp>
-        <p:nvSpPr>
-          <p:cNvPr id="4" name="Rectangle 3"/>
-          <p:cNvSpPr/>
-          <p:nvPr/>
-        </p:nvSpPr>
-        <p:spPr>
-          <a:xfrm>
-            <a:off x="640080" y="731520"/>
-            <a:ext cx="10881360" cy="777240"/>
-          </a:xfrm>
-          <a:prstGeom prst="rect">
-            <a:avLst/>
-          </a:prstGeom>
-          <a:solidFill>
-            <a:srgbClr val="1F5D43"/>
-          </a:solidFill>
-          <a:ln>
-            <a:noFill/>
-          </a:ln>
-          <a:effectLst/>
-        </p:spPr>
-        <p:style>
-          <a:lnRef idx="1">
-            <a:schemeClr val="accent1"/>
-          </a:lnRef>
-          <a:fillRef idx="3">
-            <a:schemeClr val="accent1"/>
-          </a:fillRef>
-          <a:effectRef idx="2">
-            <a:schemeClr val="accent1"/>
-          </a:effectRef>
-          <a:fontRef idx="minor">
-            <a:schemeClr val="lt1"/>
-          </a:fontRef>
-        </p:style>
-        <p:txBody>
-          <a:bodyPr rtlCol="0" anchor="ctr" wrap="square"/>
-          <a:lstStyle/>
-          <a:p>
-            <a:pPr algn="ctr"/>
-            <a:r>
-              <a:rPr sz="2100" b="1">
-                <a:solidFill>
-                  <a:srgbClr val="FFFFFF"/>
-                </a:solidFill>
-              </a:rPr>
-              <a:t>   From prototype to regional platform</a:t>
-            </a:r>
-          </a:p>
-        </p:txBody>
-      </p:sp>
-      <p:pic>
-        <p:nvPicPr>
-          <p:cNvPr id="5" name="Picture 4" descr="d5-roadmap.png"/>
-          <p:cNvPicPr>
-            <a:picLocks noChangeAspect="1"/>
-          </p:cNvPicPr>
-          <p:nvPr/>
-        </p:nvPicPr>
-        <p:blipFill>
-          <a:blip r:embed="rId2"/>
-          <a:stretch>
-            <a:fillRect/>
-          </a:stretch>
-        </p:blipFill>
-        <p:spPr>
-          <a:xfrm>
-            <a:off x="548640" y="3740590"/>
-            <a:ext cx="6583680" cy="656980"/>
-          </a:xfrm>
-          <a:prstGeom prst="rect">
-            <a:avLst/>
-          </a:prstGeom>
-        </p:spPr>
-      </p:pic>
-      <p:sp>
-        <p:nvSpPr>
-          <p:cNvPr id="6" name="TextBox 5"/>
-          <p:cNvSpPr txBox="1"/>
-          <p:nvPr/>
-        </p:nvSpPr>
-        <p:spPr>
-          <a:xfrm>
-            <a:off x="548640" y="6355080"/>
-            <a:ext cx="6583680" cy="365760"/>
-          </a:xfrm>
-          <a:prstGeom prst="rect">
-            <a:avLst/>
-          </a:prstGeom>
-          <a:noFill/>
-        </p:spPr>
-        <p:txBody>
-          <a:bodyPr wrap="none">
-            <a:spAutoFit/>
-          </a:bodyPr>
-          <a:lstStyle/>
-          <a:p>
-            <a:pPr algn="ctr"/>
-            <a:r>
-              <a:rPr sz="1000" i="1">
-                <a:solidFill>
-                  <a:srgbClr val="415046"/>
-                </a:solidFill>
-              </a:rPr>
-              <a:t>Phased rollout — each phase funds the next</a:t>
-            </a:r>
-          </a:p>
-        </p:txBody>
-      </p:sp>
-      <p:sp>
-        <p:nvSpPr>
-          <p:cNvPr id="7" name="TextBox 6"/>
-          <p:cNvSpPr txBox="1"/>
-          <p:nvPr/>
-        </p:nvSpPr>
-        <p:spPr>
-          <a:xfrm>
-            <a:off x="7406640" y="1828800"/>
-            <a:ext cx="4480560" cy="4572000"/>
-          </a:xfrm>
-          <a:prstGeom prst="rect">
-            <a:avLst/>
-          </a:prstGeom>
-          <a:noFill/>
-        </p:spPr>
-        <p:txBody>
-          <a:bodyPr wrap="square">
-            <a:spAutoFit/>
-          </a:bodyPr>
-          <a:lstStyle/>
-          <a:p>
-            <a:pPr>
-              <a:spcAft>
-                <a:spcPts val="900"/>
-              </a:spcAft>
-            </a:pPr>
-            <a:r>
-              <a:rPr sz="1300">
-                <a:solidFill>
-                  <a:srgbClr val="14231B"/>
-                </a:solidFill>
-              </a:rPr>
-              <a:t>•  Phase 0 (now): AI triage + reporting prototype live.</a:t>
-            </a:r>
-          </a:p>
-          <a:p>
-            <a:pPr>
-              <a:spcAft>
-                <a:spcPts val="900"/>
-              </a:spcAft>
-            </a:pPr>
-            <a:r>
-              <a:rPr sz="1300">
-                <a:solidFill>
-                  <a:srgbClr val="14231B"/>
-                </a:solidFill>
-              </a:rPr>
-              <a:t>•  Phases 1–2 (M1–6): platform GA, SoliqOnline integration, open-banking scoring, volume pricing.</a:t>
-            </a:r>
-          </a:p>
-          <a:p>
-            <a:pPr>
-              <a:spcAft>
-                <a:spcPts val="900"/>
-              </a:spcAft>
-            </a:pPr>
-            <a:r>
-              <a:rPr sz="1300">
-                <a:solidFill>
-                  <a:srgbClr val="14231B"/>
-                </a:solidFill>
-              </a:rPr>
-              <a:t>•  Phases 3–4 (M6+): DIFC SPV and first international capital, then the Wakala → Sukuk sequence and regional scale.</a:t>
-            </a:r>
-          </a:p>
-        </p:txBody>
-      </p:sp>
-    </p:spTree>
-  </p:cSld>
-  <p:clrMapOvr>
-    <a:masterClrMapping/>
-  </p:clrMapOvr>
-</p:sld>
-</file>
-
-<file path=ppt/slides/slide16.xml><?xml version="1.0" encoding="utf-8"?>
-<p:sld xmlns:a="http://schemas.openxmlformats.org/drawingml/2006/main" xmlns:p="http://schemas.openxmlformats.org/presentationml/2006/main" xmlns:r="http://schemas.openxmlformats.org/officeDocument/2006/relationships">
-  <p:cSld>
-    <p:spTree>
-      <p:nvGrpSpPr>
-        <p:cNvPr id="1" name=""/>
-        <p:cNvGrpSpPr/>
-        <p:nvPr/>
-      </p:nvGrpSpPr>
-      <p:grpSpPr/>
-      <p:sp>
-        <p:nvSpPr>
-          <p:cNvPr id="2" name="Rectangle 1"/>
-          <p:cNvSpPr/>
-          <p:nvPr/>
-        </p:nvSpPr>
-        <p:spPr>
-          <a:xfrm>
-            <a:off x="0" y="0"/>
-            <a:ext cx="12191695" cy="6858000"/>
-          </a:xfrm>
-          <a:prstGeom prst="rect">
-            <a:avLst/>
-          </a:prstGeom>
-          <a:solidFill>
-            <a:srgbClr val="F7F6F1"/>
-          </a:solidFill>
-          <a:ln>
-            <a:noFill/>
-          </a:ln>
-          <a:effectLst/>
-        </p:spPr>
-        <p:style>
-          <a:lnRef idx="1">
-            <a:schemeClr val="accent1"/>
-          </a:lnRef>
-          <a:fillRef idx="3">
-            <a:schemeClr val="accent1"/>
-          </a:fillRef>
-          <a:effectRef idx="2">
-            <a:schemeClr val="accent1"/>
-          </a:effectRef>
-          <a:fontRef idx="minor">
-            <a:schemeClr val="lt1"/>
-          </a:fontRef>
-        </p:style>
-        <p:txBody>
-          <a:bodyPr rtlCol="0" anchor="ctr"/>
-          <a:lstStyle/>
-          <a:p>
-            <a:pPr algn="ctr"/>
-          </a:p>
-        </p:txBody>
-      </p:sp>
-      <p:sp>
-        <p:nvSpPr>
-          <p:cNvPr id="3" name="TextBox 2"/>
-          <p:cNvSpPr txBox="1"/>
-          <p:nvPr/>
-        </p:nvSpPr>
-        <p:spPr>
-          <a:xfrm>
-            <a:off x="640080" y="365760"/>
-            <a:ext cx="10972800" cy="365760"/>
-          </a:xfrm>
-          <a:prstGeom prst="rect">
-            <a:avLst/>
-          </a:prstGeom>
-          <a:noFill/>
-        </p:spPr>
-        <p:txBody>
-          <a:bodyPr wrap="none">
-            <a:spAutoFit/>
-          </a:bodyPr>
-          <a:lstStyle/>
-          <a:p>
-            <a:r>
-              <a:rPr sz="1100" b="1">
-                <a:solidFill>
-                  <a:srgbClr val="C8A24B"/>
-                </a:solidFill>
-              </a:rPr>
-              <a:t>WHY CONSISTENTE</a:t>
-            </a:r>
-          </a:p>
-        </p:txBody>
-      </p:sp>
-      <p:sp>
-        <p:nvSpPr>
-          <p:cNvPr id="4" name="Rectangle 3"/>
-          <p:cNvSpPr/>
-          <p:nvPr/>
-        </p:nvSpPr>
-        <p:spPr>
-          <a:xfrm>
-            <a:off x="640080" y="731520"/>
-            <a:ext cx="10881360" cy="777240"/>
-          </a:xfrm>
-          <a:prstGeom prst="rect">
-            <a:avLst/>
-          </a:prstGeom>
-          <a:solidFill>
-            <a:srgbClr val="1F5D43"/>
-          </a:solidFill>
-          <a:ln>
-            <a:noFill/>
-          </a:ln>
-          <a:effectLst/>
-        </p:spPr>
-        <p:style>
-          <a:lnRef idx="1">
-            <a:schemeClr val="accent1"/>
-          </a:lnRef>
-          <a:fillRef idx="3">
-            <a:schemeClr val="accent1"/>
-          </a:fillRef>
-          <a:effectRef idx="2">
-            <a:schemeClr val="accent1"/>
-          </a:effectRef>
-          <a:fontRef idx="minor">
-            <a:schemeClr val="lt1"/>
-          </a:fontRef>
-        </p:style>
-        <p:txBody>
-          <a:bodyPr rtlCol="0" anchor="ctr" wrap="square"/>
-          <a:lstStyle/>
-          <a:p>
-            <a:pPr algn="ctr"/>
-            <a:r>
-              <a:rPr sz="2100" b="1">
-                <a:solidFill>
-                  <a:srgbClr val="FFFFFF"/>
-                </a:solidFill>
-              </a:rPr>
-              <a:t>   Production AI, delivered consistently</a:t>
-            </a:r>
-          </a:p>
-        </p:txBody>
-      </p:sp>
-      <p:sp>
-        <p:nvSpPr>
-          <p:cNvPr id="5" name="TextBox 4"/>
-          <p:cNvSpPr txBox="1"/>
-          <p:nvPr/>
-        </p:nvSpPr>
-        <p:spPr>
-          <a:xfrm>
-            <a:off x="685800" y="1828800"/>
-            <a:ext cx="10881360" cy="4572000"/>
-          </a:xfrm>
-          <a:prstGeom prst="rect">
-            <a:avLst/>
-          </a:prstGeom>
-          <a:noFill/>
-        </p:spPr>
-        <p:txBody>
-          <a:bodyPr wrap="square">
-            <a:spAutoFit/>
-          </a:bodyPr>
-          <a:lstStyle/>
-          <a:p>
-            <a:pPr>
-              <a:spcAft>
-                <a:spcPts val="900"/>
-              </a:spcAft>
-            </a:pPr>
-            <a:r>
-              <a:rPr sz="1500">
-                <a:solidFill>
-                  <a:srgbClr val="14231B"/>
-                </a:solidFill>
-              </a:rPr>
-              <a:t>•  Consistente Ltd (Tallinn, EU) builds production-grade AI for enterprises — with reproducible pipelines, versioned models and inspectable prompts, not black boxes.</a:t>
-            </a:r>
-          </a:p>
-          <a:p>
-            <a:pPr>
-              <a:spcAft>
-                <a:spcPts val="900"/>
-              </a:spcAft>
-            </a:pPr>
-            <a:r>
-              <a:rPr sz="1500">
-                <a:solidFill>
-                  <a:srgbClr val="14231B"/>
-                </a:solidFill>
-              </a:rPr>
-              <a:t>•  Precedents across financial services and regulated sectors: LSEG, DBRS Morningstar, ARM, Microsoft.</a:t>
-            </a:r>
-          </a:p>
-          <a:p>
-            <a:pPr>
-              <a:spcAft>
-                <a:spcPts val="900"/>
-              </a:spcAft>
-            </a:pPr>
-            <a:r>
-              <a:rPr sz="1500">
-                <a:solidFill>
-                  <a:srgbClr val="14231B"/>
-                </a:solidFill>
-              </a:rPr>
-              <a:t>•  Core capabilities map directly onto this project: document intelligence, applied forecasting/scoring, and agentic workflows with human review.</a:t>
-            </a:r>
-          </a:p>
-          <a:p>
-            <a:pPr>
-              <a:spcAft>
-                <a:spcPts val="900"/>
-              </a:spcAft>
-            </a:pPr>
-            <a:r>
-              <a:rPr sz="1500">
-                <a:solidFill>
-                  <a:srgbClr val="14231B"/>
-                </a:solidFill>
-              </a:rPr>
-              <a:t>•  EU-based, audit-first — the right profile for a bank building AI a regulator will scrutinise.</a:t>
-            </a:r>
-          </a:p>
-        </p:txBody>
-      </p:sp>
-    </p:spTree>
-  </p:cSld>
-  <p:clrMapOvr>
-    <a:masterClrMapping/>
-  </p:clrMapOvr>
-</p:sld>
-</file>
-
-<file path=ppt/slides/slide17.xml><?xml version="1.0" encoding="utf-8"?>
-<p:sld xmlns:a="http://schemas.openxmlformats.org/drawingml/2006/main" xmlns:p="http://schemas.openxmlformats.org/presentationml/2006/main" xmlns:r="http://schemas.openxmlformats.org/officeDocument/2006/relationships">
-  <p:cSld>
-    <p:spTree>
-      <p:nvGrpSpPr>
-        <p:cNvPr id="1" name=""/>
-        <p:cNvGrpSpPr/>
-        <p:nvPr/>
-      </p:nvGrpSpPr>
-      <p:grpSpPr/>
-      <p:sp>
-        <p:nvSpPr>
-          <p:cNvPr id="2" name="Rectangle 1"/>
-          <p:cNvSpPr/>
-          <p:nvPr/>
-        </p:nvSpPr>
-        <p:spPr>
-          <a:xfrm>
-            <a:off x="0" y="0"/>
-            <a:ext cx="12191695" cy="6858000"/>
-          </a:xfrm>
-          <a:prstGeom prst="rect">
-            <a:avLst/>
-          </a:prstGeom>
-          <a:solidFill>
-            <a:srgbClr val="F7F6F1"/>
-          </a:solidFill>
-          <a:ln>
-            <a:noFill/>
-          </a:ln>
-          <a:effectLst/>
-        </p:spPr>
-        <p:style>
-          <a:lnRef idx="1">
-            <a:schemeClr val="accent1"/>
-          </a:lnRef>
-          <a:fillRef idx="3">
-            <a:schemeClr val="accent1"/>
-          </a:fillRef>
-          <a:effectRef idx="2">
-            <a:schemeClr val="accent1"/>
-          </a:effectRef>
-          <a:fontRef idx="minor">
-            <a:schemeClr val="lt1"/>
-          </a:fontRef>
-        </p:style>
-        <p:txBody>
-          <a:bodyPr rtlCol="0" anchor="ctr"/>
-          <a:lstStyle/>
-          <a:p>
-            <a:pPr algn="ctr"/>
-          </a:p>
-        </p:txBody>
-      </p:sp>
-      <p:sp>
-        <p:nvSpPr>
-          <p:cNvPr id="3" name="TextBox 2"/>
-          <p:cNvSpPr txBox="1"/>
-          <p:nvPr/>
-        </p:nvSpPr>
-        <p:spPr>
-          <a:xfrm>
-            <a:off x="640080" y="365760"/>
-            <a:ext cx="10972800" cy="365760"/>
-          </a:xfrm>
-          <a:prstGeom prst="rect">
-            <a:avLst/>
-          </a:prstGeom>
-          <a:noFill/>
-        </p:spPr>
-        <p:txBody>
-          <a:bodyPr wrap="none">
-            <a:spAutoFit/>
-          </a:bodyPr>
-          <a:lstStyle/>
-          <a:p>
-            <a:r>
-              <a:rPr sz="1100" b="1">
-                <a:solidFill>
-                  <a:srgbClr val="C8A24B"/>
-                </a:solidFill>
-              </a:rPr>
-              <a:t>NEXT STEPS</a:t>
-            </a:r>
-          </a:p>
-        </p:txBody>
-      </p:sp>
-      <p:sp>
-        <p:nvSpPr>
-          <p:cNvPr id="4" name="Rectangle 3"/>
-          <p:cNvSpPr/>
-          <p:nvPr/>
-        </p:nvSpPr>
-        <p:spPr>
-          <a:xfrm>
-            <a:off x="640080" y="731520"/>
-            <a:ext cx="10881360" cy="777240"/>
-          </a:xfrm>
-          <a:prstGeom prst="rect">
-            <a:avLst/>
-          </a:prstGeom>
-          <a:solidFill>
-            <a:srgbClr val="1F5D43"/>
-          </a:solidFill>
-          <a:ln>
-            <a:noFill/>
-          </a:ln>
-          <a:effectLst/>
-        </p:spPr>
-        <p:style>
-          <a:lnRef idx="1">
-            <a:schemeClr val="accent1"/>
-          </a:lnRef>
-          <a:fillRef idx="3">
-            <a:schemeClr val="accent1"/>
-          </a:fillRef>
-          <a:effectRef idx="2">
-            <a:schemeClr val="accent1"/>
-          </a:effectRef>
-          <a:fontRef idx="minor">
-            <a:schemeClr val="lt1"/>
-          </a:fontRef>
-        </p:style>
-        <p:txBody>
-          <a:bodyPr rtlCol="0" anchor="ctr" wrap="square"/>
-          <a:lstStyle/>
-          <a:p>
-            <a:pPr algn="ctr"/>
-            <a:r>
-              <a:rPr sz="2100" b="1">
-                <a:solidFill>
-                  <a:srgbClr val="FFFFFF"/>
-                </a:solidFill>
-              </a:rPr>
-              <a:t>   What we propose to do first</a:t>
-            </a:r>
-          </a:p>
-        </p:txBody>
-      </p:sp>
-      <p:sp>
-        <p:nvSpPr>
-          <p:cNvPr id="5" name="TextBox 4"/>
-          <p:cNvSpPr txBox="1"/>
-          <p:nvPr/>
-        </p:nvSpPr>
-        <p:spPr>
-          <a:xfrm>
-            <a:off x="685800" y="1828800"/>
-            <a:ext cx="10881360" cy="4572000"/>
-          </a:xfrm>
-          <a:prstGeom prst="rect">
-            <a:avLst/>
-          </a:prstGeom>
-          <a:noFill/>
-        </p:spPr>
-        <p:txBody>
-          <a:bodyPr wrap="square">
-            <a:spAutoFit/>
-          </a:bodyPr>
-          <a:lstStyle/>
-          <a:p>
-            <a:pPr>
-              <a:spcAft>
-                <a:spcPts val="900"/>
-              </a:spcAft>
-            </a:pPr>
-            <a:r>
-              <a:rPr sz="1500">
-                <a:solidFill>
-                  <a:srgbClr val="14231B"/>
-                </a:solidFill>
-              </a:rPr>
-              <a:t>•  1. Agree the white-label scope and the volume-based commercial terms.</a:t>
-            </a:r>
-          </a:p>
-          <a:p>
-            <a:pPr>
-              <a:spcAft>
-                <a:spcPts val="900"/>
-              </a:spcAft>
-            </a:pPr>
-            <a:r>
-              <a:rPr sz="1500">
-                <a:solidFill>
-                  <a:srgbClr val="14231B"/>
-                </a:solidFill>
-              </a:rPr>
-              <a:t>•  2. Stand up a pilot on live SoliqOnline data; ship the platform GA with the AI triage and scoring engine.</a:t>
-            </a:r>
-          </a:p>
-          <a:p>
-            <a:pPr>
-              <a:spcAft>
-                <a:spcPts val="900"/>
-              </a:spcAft>
-            </a:pPr>
-            <a:r>
-              <a:rPr sz="1500">
-                <a:solidFill>
-                  <a:srgbClr val="14231B"/>
-                </a:solidFill>
-              </a:rPr>
-              <a:t>•  3. In parallel, begin DIFC SPV and fatwa preparation so international capital can follow the operating book.</a:t>
-            </a:r>
-          </a:p>
-          <a:p>
-            <a:pPr>
-              <a:spcAft>
-                <a:spcPts val="900"/>
-              </a:spcAft>
-            </a:pPr>
-            <a:r>
-              <a:rPr sz="1500">
-                <a:solidFill>
-                  <a:srgbClr val="14231B"/>
-                </a:solidFill>
-              </a:rPr>
-              <a:t>•  Contact: Consistente Ltd · info@consistente.tech · consistente.tech</a:t>
             </a:r>
           </a:p>
         </p:txBody>
@@ -6223,7 +7652,7 @@
                   <a:srgbClr val="14231B"/>
                 </a:solidFill>
               </a:rPr>
-              <a:t>•  1 · A better platform. Rebuild the OzPlanet-style bank factoring experience with an AI core, open-banking-style credit scoring, and a cleaner trilingual UX — priced on financed volume only, with no SaaS licence.</a:t>
+              <a:t>•  The gap. Every Uzbek bank rents its factoring product from OzPlanet or FinMakon — Universalbank included (OzPlanet cooperation agreement, Sept 2024). None owns the product, the customer relationship or the data.</a:t>
             </a:r>
           </a:p>
           <a:p>
@@ -6238,7 +7667,7 @@
                   <a:srgbClr val="14231B"/>
                 </a:solidFill>
               </a:rPr>
-              <a:t>•  2 · International capital. Add an SPV module so global — and specifically Gulf — investors can fund Uzbek receivables, turning a domestic product into a cross-border one.</a:t>
+              <a:t>•  1 · Own the platform. A white-label, AI-native platform Universalbank runs under its own brand — the bank owns the product, customers and data — priced on financed volume only.</a:t>
             </a:r>
           </a:p>
           <a:p>
@@ -6253,7 +7682,7 @@
                   <a:srgbClr val="14231B"/>
                 </a:solidFill>
               </a:rPr>
-              <a:t>•  3 · UAE entry. Stand up a DIFC SPV and a phased Shariah programme (Murabaha → Wakala → Sukuk) to reach Dubai / DIFC Islamic capital.</a:t>
+              <a:t>•  2 · International capital. An SPV module lets global — and specifically Gulf — investors fund Uzbek receivables. OzPlanet and FinMakon take no foreign or retail money, so this is a clean, uncontested differentiator.</a:t>
             </a:r>
           </a:p>
           <a:p>
@@ -6268,7 +7697,1013 @@
                   <a:srgbClr val="14231B"/>
                 </a:solidFill>
               </a:rPr>
-              <a:t>•  A working AI prototype ships today — chat-based loan triage and chat-based investor reporting are already live in the app.</a:t>
+              <a:t>•  3 · UAE entry. A DIFC SPV and a phased Shariah programme (Murabaha → Wakala → Sukuk) to reach Dubai / DIFC Islamic capital.</a:t>
+            </a:r>
+          </a:p>
+          <a:p>
+            <a:pPr>
+              <a:spcAft>
+                <a:spcPts val="900"/>
+              </a:spcAft>
+            </a:pPr>
+            <a:r>
+              <a:rPr sz="1500">
+                <a:solidFill>
+                  <a:srgbClr val="14231B"/>
+                </a:solidFill>
+              </a:rPr>
+              <a:t>•  Decomposable &amp; live today. Deploy origination first, add the investor / SPV layer later — and the chat-based loan triage and investor reporting are already running in the app.</a:t>
+            </a:r>
+          </a:p>
+        </p:txBody>
+      </p:sp>
+    </p:spTree>
+  </p:cSld>
+  <p:clrMapOvr>
+    <a:masterClrMapping/>
+  </p:clrMapOvr>
+</p:sld>
+</file>
+
+<file path=ppt/slides/slide20.xml><?xml version="1.0" encoding="utf-8"?>
+<p:sld xmlns:a="http://schemas.openxmlformats.org/drawingml/2006/main" xmlns:p="http://schemas.openxmlformats.org/presentationml/2006/main" xmlns:r="http://schemas.openxmlformats.org/officeDocument/2006/relationships">
+  <p:cSld>
+    <p:spTree>
+      <p:nvGrpSpPr>
+        <p:cNvPr id="1" name=""/>
+        <p:cNvGrpSpPr/>
+        <p:nvPr/>
+      </p:nvGrpSpPr>
+      <p:grpSpPr/>
+      <p:sp>
+        <p:nvSpPr>
+          <p:cNvPr id="2" name="Rectangle 1"/>
+          <p:cNvSpPr/>
+          <p:nvPr/>
+        </p:nvSpPr>
+        <p:spPr>
+          <a:xfrm>
+            <a:off x="0" y="0"/>
+            <a:ext cx="12191695" cy="6858000"/>
+          </a:xfrm>
+          <a:prstGeom prst="rect">
+            <a:avLst/>
+          </a:prstGeom>
+          <a:solidFill>
+            <a:srgbClr val="F7F6F1"/>
+          </a:solidFill>
+          <a:ln>
+            <a:noFill/>
+          </a:ln>
+          <a:effectLst/>
+        </p:spPr>
+        <p:style>
+          <a:lnRef idx="1">
+            <a:schemeClr val="accent1"/>
+          </a:lnRef>
+          <a:fillRef idx="3">
+            <a:schemeClr val="accent1"/>
+          </a:fillRef>
+          <a:effectRef idx="2">
+            <a:schemeClr val="accent1"/>
+          </a:effectRef>
+          <a:fontRef idx="minor">
+            <a:schemeClr val="lt1"/>
+          </a:fontRef>
+        </p:style>
+        <p:txBody>
+          <a:bodyPr rtlCol="0" anchor="ctr"/>
+          <a:lstStyle/>
+          <a:p>
+            <a:pPr algn="ctr"/>
+          </a:p>
+        </p:txBody>
+      </p:sp>
+      <p:sp>
+        <p:nvSpPr>
+          <p:cNvPr id="3" name="TextBox 2"/>
+          <p:cNvSpPr txBox="1"/>
+          <p:nvPr/>
+        </p:nvSpPr>
+        <p:spPr>
+          <a:xfrm>
+            <a:off x="640080" y="365760"/>
+            <a:ext cx="10972800" cy="365760"/>
+          </a:xfrm>
+          <a:prstGeom prst="rect">
+            <a:avLst/>
+          </a:prstGeom>
+          <a:noFill/>
+        </p:spPr>
+        <p:txBody>
+          <a:bodyPr wrap="none">
+            <a:spAutoFit/>
+          </a:bodyPr>
+          <a:lstStyle/>
+          <a:p>
+            <a:r>
+              <a:rPr sz="1100" b="1">
+                <a:solidFill>
+                  <a:srgbClr val="C8A24B"/>
+                </a:solidFill>
+              </a:rPr>
+              <a:t>PROOF · WORKING TODAY</a:t>
+            </a:r>
+          </a:p>
+        </p:txBody>
+      </p:sp>
+      <p:sp>
+        <p:nvSpPr>
+          <p:cNvPr id="4" name="Rectangle 3"/>
+          <p:cNvSpPr/>
+          <p:nvPr/>
+        </p:nvSpPr>
+        <p:spPr>
+          <a:xfrm>
+            <a:off x="640080" y="731520"/>
+            <a:ext cx="10881360" cy="777240"/>
+          </a:xfrm>
+          <a:prstGeom prst="rect">
+            <a:avLst/>
+          </a:prstGeom>
+          <a:solidFill>
+            <a:srgbClr val="1F5D43"/>
+          </a:solidFill>
+          <a:ln>
+            <a:noFill/>
+          </a:ln>
+          <a:effectLst/>
+        </p:spPr>
+        <p:style>
+          <a:lnRef idx="1">
+            <a:schemeClr val="accent1"/>
+          </a:lnRef>
+          <a:fillRef idx="3">
+            <a:schemeClr val="accent1"/>
+          </a:fillRef>
+          <a:effectRef idx="2">
+            <a:schemeClr val="accent1"/>
+          </a:effectRef>
+          <a:fontRef idx="minor">
+            <a:schemeClr val="lt1"/>
+          </a:fontRef>
+        </p:style>
+        <p:txBody>
+          <a:bodyPr rtlCol="0" anchor="ctr" wrap="square"/>
+          <a:lstStyle/>
+          <a:p>
+            <a:pPr algn="ctr"/>
+            <a:r>
+              <a:rPr sz="2100" b="1">
+                <a:solidFill>
+                  <a:srgbClr val="FFFFFF"/>
+                </a:solidFill>
+              </a:rPr>
+              <a:t>   The AI is not a slide — it's shipped</a:t>
+            </a:r>
+          </a:p>
+        </p:txBody>
+      </p:sp>
+      <p:pic>
+        <p:nvPicPr>
+          <p:cNvPr id="5" name="Picture 4" descr="en-13-ai-triage.png"/>
+          <p:cNvPicPr>
+            <a:picLocks noChangeAspect="1"/>
+          </p:cNvPicPr>
+          <p:nvPr/>
+        </p:nvPicPr>
+        <p:blipFill>
+          <a:blip r:embed="rId2"/>
+          <a:stretch>
+            <a:fillRect/>
+          </a:stretch>
+        </p:blipFill>
+        <p:spPr>
+          <a:xfrm>
+            <a:off x="548640" y="2011680"/>
+            <a:ext cx="6583680" cy="4114800"/>
+          </a:xfrm>
+          <a:prstGeom prst="rect">
+            <a:avLst/>
+          </a:prstGeom>
+        </p:spPr>
+      </p:pic>
+      <p:sp>
+        <p:nvSpPr>
+          <p:cNvPr id="6" name="TextBox 5"/>
+          <p:cNvSpPr txBox="1"/>
+          <p:nvPr/>
+        </p:nvSpPr>
+        <p:spPr>
+          <a:xfrm>
+            <a:off x="548640" y="6355080"/>
+            <a:ext cx="6583680" cy="365760"/>
+          </a:xfrm>
+          <a:prstGeom prst="rect">
+            <a:avLst/>
+          </a:prstGeom>
+          <a:noFill/>
+        </p:spPr>
+        <p:txBody>
+          <a:bodyPr wrap="none">
+            <a:spAutoFit/>
+          </a:bodyPr>
+          <a:lstStyle/>
+          <a:p>
+            <a:pPr algn="ctr"/>
+            <a:r>
+              <a:rPr sz="1000" i="1">
+                <a:solidFill>
+                  <a:srgbClr val="415046"/>
+                </a:solidFill>
+              </a:rPr>
+              <a:t>Live chat-based invoice triage in the Factorio app</a:t>
+            </a:r>
+          </a:p>
+        </p:txBody>
+      </p:sp>
+      <p:sp>
+        <p:nvSpPr>
+          <p:cNvPr id="7" name="TextBox 6"/>
+          <p:cNvSpPr txBox="1"/>
+          <p:nvPr/>
+        </p:nvSpPr>
+        <p:spPr>
+          <a:xfrm>
+            <a:off x="7406640" y="1828800"/>
+            <a:ext cx="4480560" cy="4572000"/>
+          </a:xfrm>
+          <a:prstGeom prst="rect">
+            <a:avLst/>
+          </a:prstGeom>
+          <a:noFill/>
+        </p:spPr>
+        <p:txBody>
+          <a:bodyPr wrap="square">
+            <a:spAutoFit/>
+          </a:bodyPr>
+          <a:lstStyle/>
+          <a:p>
+            <a:pPr>
+              <a:spcAft>
+                <a:spcPts val="900"/>
+              </a:spcAft>
+            </a:pPr>
+            <a:r>
+              <a:rPr sz="1300">
+                <a:solidFill>
+                  <a:srgbClr val="14231B"/>
+                </a:solidFill>
+              </a:rPr>
+              <a:t>•  A seller describes an invoice in a sentence; the assistant returns an indicative risk band, advance rate and next-document list.</a:t>
+            </a:r>
+          </a:p>
+          <a:p>
+            <a:pPr>
+              <a:spcAft>
+                <a:spcPts val="900"/>
+              </a:spcAft>
+            </a:pPr>
+            <a:r>
+              <a:rPr sz="1300">
+                <a:solidFill>
+                  <a:srgbClr val="14231B"/>
+                </a:solidFill>
+              </a:rPr>
+              <a:t>•  Built on Grok (x.ai), trilingual, with graceful fallback and full audit logging — the same pattern extends to scoring and reporting.</a:t>
+            </a:r>
+          </a:p>
+        </p:txBody>
+      </p:sp>
+    </p:spTree>
+  </p:cSld>
+  <p:clrMapOvr>
+    <a:masterClrMapping/>
+  </p:clrMapOvr>
+</p:sld>
+</file>
+
+<file path=ppt/slides/slide21.xml><?xml version="1.0" encoding="utf-8"?>
+<p:sld xmlns:a="http://schemas.openxmlformats.org/drawingml/2006/main" xmlns:p="http://schemas.openxmlformats.org/presentationml/2006/main" xmlns:r="http://schemas.openxmlformats.org/officeDocument/2006/relationships">
+  <p:cSld>
+    <p:spTree>
+      <p:nvGrpSpPr>
+        <p:cNvPr id="1" name=""/>
+        <p:cNvGrpSpPr/>
+        <p:nvPr/>
+      </p:nvGrpSpPr>
+      <p:grpSpPr/>
+      <p:sp>
+        <p:nvSpPr>
+          <p:cNvPr id="2" name="Rectangle 1"/>
+          <p:cNvSpPr/>
+          <p:nvPr/>
+        </p:nvSpPr>
+        <p:spPr>
+          <a:xfrm>
+            <a:off x="0" y="0"/>
+            <a:ext cx="12191695" cy="6858000"/>
+          </a:xfrm>
+          <a:prstGeom prst="rect">
+            <a:avLst/>
+          </a:prstGeom>
+          <a:solidFill>
+            <a:srgbClr val="F7F6F1"/>
+          </a:solidFill>
+          <a:ln>
+            <a:noFill/>
+          </a:ln>
+          <a:effectLst/>
+        </p:spPr>
+        <p:style>
+          <a:lnRef idx="1">
+            <a:schemeClr val="accent1"/>
+          </a:lnRef>
+          <a:fillRef idx="3">
+            <a:schemeClr val="accent1"/>
+          </a:fillRef>
+          <a:effectRef idx="2">
+            <a:schemeClr val="accent1"/>
+          </a:effectRef>
+          <a:fontRef idx="minor">
+            <a:schemeClr val="lt1"/>
+          </a:fontRef>
+        </p:style>
+        <p:txBody>
+          <a:bodyPr rtlCol="0" anchor="ctr"/>
+          <a:lstStyle/>
+          <a:p>
+            <a:pPr algn="ctr"/>
+          </a:p>
+        </p:txBody>
+      </p:sp>
+      <p:sp>
+        <p:nvSpPr>
+          <p:cNvPr id="3" name="TextBox 2"/>
+          <p:cNvSpPr txBox="1"/>
+          <p:nvPr/>
+        </p:nvSpPr>
+        <p:spPr>
+          <a:xfrm>
+            <a:off x="640080" y="365760"/>
+            <a:ext cx="10972800" cy="365760"/>
+          </a:xfrm>
+          <a:prstGeom prst="rect">
+            <a:avLst/>
+          </a:prstGeom>
+          <a:noFill/>
+        </p:spPr>
+        <p:txBody>
+          <a:bodyPr wrap="none">
+            <a:spAutoFit/>
+          </a:bodyPr>
+          <a:lstStyle/>
+          <a:p>
+            <a:r>
+              <a:rPr sz="1100" b="1">
+                <a:solidFill>
+                  <a:srgbClr val="C8A24B"/>
+                </a:solidFill>
+              </a:rPr>
+              <a:t>DELIVERY</a:t>
+            </a:r>
+          </a:p>
+        </p:txBody>
+      </p:sp>
+      <p:sp>
+        <p:nvSpPr>
+          <p:cNvPr id="4" name="Rectangle 3"/>
+          <p:cNvSpPr/>
+          <p:nvPr/>
+        </p:nvSpPr>
+        <p:spPr>
+          <a:xfrm>
+            <a:off x="640080" y="731520"/>
+            <a:ext cx="10881360" cy="777240"/>
+          </a:xfrm>
+          <a:prstGeom prst="rect">
+            <a:avLst/>
+          </a:prstGeom>
+          <a:solidFill>
+            <a:srgbClr val="1F5D43"/>
+          </a:solidFill>
+          <a:ln>
+            <a:noFill/>
+          </a:ln>
+          <a:effectLst/>
+        </p:spPr>
+        <p:style>
+          <a:lnRef idx="1">
+            <a:schemeClr val="accent1"/>
+          </a:lnRef>
+          <a:fillRef idx="3">
+            <a:schemeClr val="accent1"/>
+          </a:fillRef>
+          <a:effectRef idx="2">
+            <a:schemeClr val="accent1"/>
+          </a:effectRef>
+          <a:fontRef idx="minor">
+            <a:schemeClr val="lt1"/>
+          </a:fontRef>
+        </p:style>
+        <p:txBody>
+          <a:bodyPr rtlCol="0" anchor="ctr" wrap="square"/>
+          <a:lstStyle/>
+          <a:p>
+            <a:pPr algn="ctr"/>
+            <a:r>
+              <a:rPr sz="2100" b="1">
+                <a:solidFill>
+                  <a:srgbClr val="FFFFFF"/>
+                </a:solidFill>
+              </a:rPr>
+              <a:t>   From prototype to regional platform</a:t>
+            </a:r>
+          </a:p>
+        </p:txBody>
+      </p:sp>
+      <p:pic>
+        <p:nvPicPr>
+          <p:cNvPr id="5" name="Picture 4" descr="d5-roadmap.png"/>
+          <p:cNvPicPr>
+            <a:picLocks noChangeAspect="1"/>
+          </p:cNvPicPr>
+          <p:nvPr/>
+        </p:nvPicPr>
+        <p:blipFill>
+          <a:blip r:embed="rId2"/>
+          <a:stretch>
+            <a:fillRect/>
+          </a:stretch>
+        </p:blipFill>
+        <p:spPr>
+          <a:xfrm>
+            <a:off x="548640" y="3740590"/>
+            <a:ext cx="6583680" cy="656980"/>
+          </a:xfrm>
+          <a:prstGeom prst="rect">
+            <a:avLst/>
+          </a:prstGeom>
+        </p:spPr>
+      </p:pic>
+      <p:sp>
+        <p:nvSpPr>
+          <p:cNvPr id="6" name="TextBox 5"/>
+          <p:cNvSpPr txBox="1"/>
+          <p:nvPr/>
+        </p:nvSpPr>
+        <p:spPr>
+          <a:xfrm>
+            <a:off x="548640" y="6355080"/>
+            <a:ext cx="6583680" cy="365760"/>
+          </a:xfrm>
+          <a:prstGeom prst="rect">
+            <a:avLst/>
+          </a:prstGeom>
+          <a:noFill/>
+        </p:spPr>
+        <p:txBody>
+          <a:bodyPr wrap="none">
+            <a:spAutoFit/>
+          </a:bodyPr>
+          <a:lstStyle/>
+          <a:p>
+            <a:pPr algn="ctr"/>
+            <a:r>
+              <a:rPr sz="1000" i="1">
+                <a:solidFill>
+                  <a:srgbClr val="415046"/>
+                </a:solidFill>
+              </a:rPr>
+              <a:t>Phased rollout — each phase funds the next</a:t>
+            </a:r>
+          </a:p>
+        </p:txBody>
+      </p:sp>
+      <p:sp>
+        <p:nvSpPr>
+          <p:cNvPr id="7" name="TextBox 6"/>
+          <p:cNvSpPr txBox="1"/>
+          <p:nvPr/>
+        </p:nvSpPr>
+        <p:spPr>
+          <a:xfrm>
+            <a:off x="7406640" y="1828800"/>
+            <a:ext cx="4480560" cy="4572000"/>
+          </a:xfrm>
+          <a:prstGeom prst="rect">
+            <a:avLst/>
+          </a:prstGeom>
+          <a:noFill/>
+        </p:spPr>
+        <p:txBody>
+          <a:bodyPr wrap="square">
+            <a:spAutoFit/>
+          </a:bodyPr>
+          <a:lstStyle/>
+          <a:p>
+            <a:pPr>
+              <a:spcAft>
+                <a:spcPts val="900"/>
+              </a:spcAft>
+            </a:pPr>
+            <a:r>
+              <a:rPr sz="1300">
+                <a:solidFill>
+                  <a:srgbClr val="14231B"/>
+                </a:solidFill>
+              </a:rPr>
+              <a:t>•  Phase 0 (now): AI triage + reporting prototype live.</a:t>
+            </a:r>
+          </a:p>
+          <a:p>
+            <a:pPr>
+              <a:spcAft>
+                <a:spcPts val="900"/>
+              </a:spcAft>
+            </a:pPr>
+            <a:r>
+              <a:rPr sz="1300">
+                <a:solidFill>
+                  <a:srgbClr val="14231B"/>
+                </a:solidFill>
+              </a:rPr>
+              <a:t>•  Phases 1–2 (M1–6): platform GA, SoliqOnline integration, open-banking scoring, volume pricing.</a:t>
+            </a:r>
+          </a:p>
+          <a:p>
+            <a:pPr>
+              <a:spcAft>
+                <a:spcPts val="900"/>
+              </a:spcAft>
+            </a:pPr>
+            <a:r>
+              <a:rPr sz="1300">
+                <a:solidFill>
+                  <a:srgbClr val="14231B"/>
+                </a:solidFill>
+              </a:rPr>
+              <a:t>•  Phases 3–4 (M6+): DIFC SPV and first international capital, then the Wakala → Sukuk sequence and regional scale.</a:t>
+            </a:r>
+          </a:p>
+        </p:txBody>
+      </p:sp>
+    </p:spTree>
+  </p:cSld>
+  <p:clrMapOvr>
+    <a:masterClrMapping/>
+  </p:clrMapOvr>
+</p:sld>
+</file>
+
+<file path=ppt/slides/slide22.xml><?xml version="1.0" encoding="utf-8"?>
+<p:sld xmlns:a="http://schemas.openxmlformats.org/drawingml/2006/main" xmlns:p="http://schemas.openxmlformats.org/presentationml/2006/main" xmlns:r="http://schemas.openxmlformats.org/officeDocument/2006/relationships">
+  <p:cSld>
+    <p:spTree>
+      <p:nvGrpSpPr>
+        <p:cNvPr id="1" name=""/>
+        <p:cNvGrpSpPr/>
+        <p:nvPr/>
+      </p:nvGrpSpPr>
+      <p:grpSpPr/>
+      <p:sp>
+        <p:nvSpPr>
+          <p:cNvPr id="2" name="Rectangle 1"/>
+          <p:cNvSpPr/>
+          <p:nvPr/>
+        </p:nvSpPr>
+        <p:spPr>
+          <a:xfrm>
+            <a:off x="0" y="0"/>
+            <a:ext cx="12191695" cy="6858000"/>
+          </a:xfrm>
+          <a:prstGeom prst="rect">
+            <a:avLst/>
+          </a:prstGeom>
+          <a:solidFill>
+            <a:srgbClr val="F7F6F1"/>
+          </a:solidFill>
+          <a:ln>
+            <a:noFill/>
+          </a:ln>
+          <a:effectLst/>
+        </p:spPr>
+        <p:style>
+          <a:lnRef idx="1">
+            <a:schemeClr val="accent1"/>
+          </a:lnRef>
+          <a:fillRef idx="3">
+            <a:schemeClr val="accent1"/>
+          </a:fillRef>
+          <a:effectRef idx="2">
+            <a:schemeClr val="accent1"/>
+          </a:effectRef>
+          <a:fontRef idx="minor">
+            <a:schemeClr val="lt1"/>
+          </a:fontRef>
+        </p:style>
+        <p:txBody>
+          <a:bodyPr rtlCol="0" anchor="ctr"/>
+          <a:lstStyle/>
+          <a:p>
+            <a:pPr algn="ctr"/>
+          </a:p>
+        </p:txBody>
+      </p:sp>
+      <p:sp>
+        <p:nvSpPr>
+          <p:cNvPr id="3" name="TextBox 2"/>
+          <p:cNvSpPr txBox="1"/>
+          <p:nvPr/>
+        </p:nvSpPr>
+        <p:spPr>
+          <a:xfrm>
+            <a:off x="640080" y="365760"/>
+            <a:ext cx="10972800" cy="365760"/>
+          </a:xfrm>
+          <a:prstGeom prst="rect">
+            <a:avLst/>
+          </a:prstGeom>
+          <a:noFill/>
+        </p:spPr>
+        <p:txBody>
+          <a:bodyPr wrap="none">
+            <a:spAutoFit/>
+          </a:bodyPr>
+          <a:lstStyle/>
+          <a:p>
+            <a:r>
+              <a:rPr sz="1100" b="1">
+                <a:solidFill>
+                  <a:srgbClr val="C8A24B"/>
+                </a:solidFill>
+              </a:rPr>
+              <a:t>WHY CONSISTENTE</a:t>
+            </a:r>
+          </a:p>
+        </p:txBody>
+      </p:sp>
+      <p:sp>
+        <p:nvSpPr>
+          <p:cNvPr id="4" name="Rectangle 3"/>
+          <p:cNvSpPr/>
+          <p:nvPr/>
+        </p:nvSpPr>
+        <p:spPr>
+          <a:xfrm>
+            <a:off x="640080" y="731520"/>
+            <a:ext cx="10881360" cy="777240"/>
+          </a:xfrm>
+          <a:prstGeom prst="rect">
+            <a:avLst/>
+          </a:prstGeom>
+          <a:solidFill>
+            <a:srgbClr val="1F5D43"/>
+          </a:solidFill>
+          <a:ln>
+            <a:noFill/>
+          </a:ln>
+          <a:effectLst/>
+        </p:spPr>
+        <p:style>
+          <a:lnRef idx="1">
+            <a:schemeClr val="accent1"/>
+          </a:lnRef>
+          <a:fillRef idx="3">
+            <a:schemeClr val="accent1"/>
+          </a:fillRef>
+          <a:effectRef idx="2">
+            <a:schemeClr val="accent1"/>
+          </a:effectRef>
+          <a:fontRef idx="minor">
+            <a:schemeClr val="lt1"/>
+          </a:fontRef>
+        </p:style>
+        <p:txBody>
+          <a:bodyPr rtlCol="0" anchor="ctr" wrap="square"/>
+          <a:lstStyle/>
+          <a:p>
+            <a:pPr algn="ctr"/>
+            <a:r>
+              <a:rPr sz="2100" b="1">
+                <a:solidFill>
+                  <a:srgbClr val="FFFFFF"/>
+                </a:solidFill>
+              </a:rPr>
+              <a:t>   Production AI, delivered consistently</a:t>
+            </a:r>
+          </a:p>
+        </p:txBody>
+      </p:sp>
+      <p:sp>
+        <p:nvSpPr>
+          <p:cNvPr id="5" name="TextBox 4"/>
+          <p:cNvSpPr txBox="1"/>
+          <p:nvPr/>
+        </p:nvSpPr>
+        <p:spPr>
+          <a:xfrm>
+            <a:off x="685800" y="1828800"/>
+            <a:ext cx="10881360" cy="4572000"/>
+          </a:xfrm>
+          <a:prstGeom prst="rect">
+            <a:avLst/>
+          </a:prstGeom>
+          <a:noFill/>
+        </p:spPr>
+        <p:txBody>
+          <a:bodyPr wrap="square">
+            <a:spAutoFit/>
+          </a:bodyPr>
+          <a:lstStyle/>
+          <a:p>
+            <a:pPr>
+              <a:spcAft>
+                <a:spcPts val="900"/>
+              </a:spcAft>
+            </a:pPr>
+            <a:r>
+              <a:rPr sz="1500">
+                <a:solidFill>
+                  <a:srgbClr val="14231B"/>
+                </a:solidFill>
+              </a:rPr>
+              <a:t>•  Consistente Ltd (Tallinn, EU) builds production-grade AI for enterprises — with reproducible pipelines, versioned models and inspectable prompts, not black boxes.</a:t>
+            </a:r>
+          </a:p>
+          <a:p>
+            <a:pPr>
+              <a:spcAft>
+                <a:spcPts val="900"/>
+              </a:spcAft>
+            </a:pPr>
+            <a:r>
+              <a:rPr sz="1500">
+                <a:solidFill>
+                  <a:srgbClr val="14231B"/>
+                </a:solidFill>
+              </a:rPr>
+              <a:t>•  Precedents across financial services and regulated sectors: LSEG, DBRS Morningstar, ARM, Microsoft.</a:t>
+            </a:r>
+          </a:p>
+          <a:p>
+            <a:pPr>
+              <a:spcAft>
+                <a:spcPts val="900"/>
+              </a:spcAft>
+            </a:pPr>
+            <a:r>
+              <a:rPr sz="1500">
+                <a:solidFill>
+                  <a:srgbClr val="14231B"/>
+                </a:solidFill>
+              </a:rPr>
+              <a:t>•  Core capabilities map directly onto this project: document intelligence, applied forecasting/scoring, and agentic workflows with human review.</a:t>
+            </a:r>
+          </a:p>
+          <a:p>
+            <a:pPr>
+              <a:spcAft>
+                <a:spcPts val="900"/>
+              </a:spcAft>
+            </a:pPr>
+            <a:r>
+              <a:rPr sz="1500">
+                <a:solidFill>
+                  <a:srgbClr val="14231B"/>
+                </a:solidFill>
+              </a:rPr>
+              <a:t>•  EU-based, audit-first — the right profile for a bank building AI a regulator will scrutinise.</a:t>
+            </a:r>
+          </a:p>
+        </p:txBody>
+      </p:sp>
+    </p:spTree>
+  </p:cSld>
+  <p:clrMapOvr>
+    <a:masterClrMapping/>
+  </p:clrMapOvr>
+</p:sld>
+</file>
+
+<file path=ppt/slides/slide23.xml><?xml version="1.0" encoding="utf-8"?>
+<p:sld xmlns:a="http://schemas.openxmlformats.org/drawingml/2006/main" xmlns:p="http://schemas.openxmlformats.org/presentationml/2006/main" xmlns:r="http://schemas.openxmlformats.org/officeDocument/2006/relationships">
+  <p:cSld>
+    <p:spTree>
+      <p:nvGrpSpPr>
+        <p:cNvPr id="1" name=""/>
+        <p:cNvGrpSpPr/>
+        <p:nvPr/>
+      </p:nvGrpSpPr>
+      <p:grpSpPr/>
+      <p:sp>
+        <p:nvSpPr>
+          <p:cNvPr id="2" name="Rectangle 1"/>
+          <p:cNvSpPr/>
+          <p:nvPr/>
+        </p:nvSpPr>
+        <p:spPr>
+          <a:xfrm>
+            <a:off x="0" y="0"/>
+            <a:ext cx="12191695" cy="6858000"/>
+          </a:xfrm>
+          <a:prstGeom prst="rect">
+            <a:avLst/>
+          </a:prstGeom>
+          <a:solidFill>
+            <a:srgbClr val="F7F6F1"/>
+          </a:solidFill>
+          <a:ln>
+            <a:noFill/>
+          </a:ln>
+          <a:effectLst/>
+        </p:spPr>
+        <p:style>
+          <a:lnRef idx="1">
+            <a:schemeClr val="accent1"/>
+          </a:lnRef>
+          <a:fillRef idx="3">
+            <a:schemeClr val="accent1"/>
+          </a:fillRef>
+          <a:effectRef idx="2">
+            <a:schemeClr val="accent1"/>
+          </a:effectRef>
+          <a:fontRef idx="minor">
+            <a:schemeClr val="lt1"/>
+          </a:fontRef>
+        </p:style>
+        <p:txBody>
+          <a:bodyPr rtlCol="0" anchor="ctr"/>
+          <a:lstStyle/>
+          <a:p>
+            <a:pPr algn="ctr"/>
+          </a:p>
+        </p:txBody>
+      </p:sp>
+      <p:sp>
+        <p:nvSpPr>
+          <p:cNvPr id="3" name="TextBox 2"/>
+          <p:cNvSpPr txBox="1"/>
+          <p:nvPr/>
+        </p:nvSpPr>
+        <p:spPr>
+          <a:xfrm>
+            <a:off x="640080" y="365760"/>
+            <a:ext cx="10972800" cy="365760"/>
+          </a:xfrm>
+          <a:prstGeom prst="rect">
+            <a:avLst/>
+          </a:prstGeom>
+          <a:noFill/>
+        </p:spPr>
+        <p:txBody>
+          <a:bodyPr wrap="none">
+            <a:spAutoFit/>
+          </a:bodyPr>
+          <a:lstStyle/>
+          <a:p>
+            <a:r>
+              <a:rPr sz="1100" b="1">
+                <a:solidFill>
+                  <a:srgbClr val="C8A24B"/>
+                </a:solidFill>
+              </a:rPr>
+              <a:t>NEXT STEPS</a:t>
+            </a:r>
+          </a:p>
+        </p:txBody>
+      </p:sp>
+      <p:sp>
+        <p:nvSpPr>
+          <p:cNvPr id="4" name="Rectangle 3"/>
+          <p:cNvSpPr/>
+          <p:nvPr/>
+        </p:nvSpPr>
+        <p:spPr>
+          <a:xfrm>
+            <a:off x="640080" y="731520"/>
+            <a:ext cx="10881360" cy="777240"/>
+          </a:xfrm>
+          <a:prstGeom prst="rect">
+            <a:avLst/>
+          </a:prstGeom>
+          <a:solidFill>
+            <a:srgbClr val="1F5D43"/>
+          </a:solidFill>
+          <a:ln>
+            <a:noFill/>
+          </a:ln>
+          <a:effectLst/>
+        </p:spPr>
+        <p:style>
+          <a:lnRef idx="1">
+            <a:schemeClr val="accent1"/>
+          </a:lnRef>
+          <a:fillRef idx="3">
+            <a:schemeClr val="accent1"/>
+          </a:fillRef>
+          <a:effectRef idx="2">
+            <a:schemeClr val="accent1"/>
+          </a:effectRef>
+          <a:fontRef idx="minor">
+            <a:schemeClr val="lt1"/>
+          </a:fontRef>
+        </p:style>
+        <p:txBody>
+          <a:bodyPr rtlCol="0" anchor="ctr" wrap="square"/>
+          <a:lstStyle/>
+          <a:p>
+            <a:pPr algn="ctr"/>
+            <a:r>
+              <a:rPr sz="2100" b="1">
+                <a:solidFill>
+                  <a:srgbClr val="FFFFFF"/>
+                </a:solidFill>
+              </a:rPr>
+              <a:t>   What we propose to do first</a:t>
+            </a:r>
+          </a:p>
+        </p:txBody>
+      </p:sp>
+      <p:sp>
+        <p:nvSpPr>
+          <p:cNvPr id="5" name="TextBox 4"/>
+          <p:cNvSpPr txBox="1"/>
+          <p:nvPr/>
+        </p:nvSpPr>
+        <p:spPr>
+          <a:xfrm>
+            <a:off x="685800" y="1828800"/>
+            <a:ext cx="10881360" cy="4572000"/>
+          </a:xfrm>
+          <a:prstGeom prst="rect">
+            <a:avLst/>
+          </a:prstGeom>
+          <a:noFill/>
+        </p:spPr>
+        <p:txBody>
+          <a:bodyPr wrap="square">
+            <a:spAutoFit/>
+          </a:bodyPr>
+          <a:lstStyle/>
+          <a:p>
+            <a:pPr>
+              <a:spcAft>
+                <a:spcPts val="900"/>
+              </a:spcAft>
+            </a:pPr>
+            <a:r>
+              <a:rPr sz="1500">
+                <a:solidFill>
+                  <a:srgbClr val="14231B"/>
+                </a:solidFill>
+              </a:rPr>
+              <a:t>•  1. Agree the white-label scope and the volume-based commercial terms.</a:t>
+            </a:r>
+          </a:p>
+          <a:p>
+            <a:pPr>
+              <a:spcAft>
+                <a:spcPts val="900"/>
+              </a:spcAft>
+            </a:pPr>
+            <a:r>
+              <a:rPr sz="1500">
+                <a:solidFill>
+                  <a:srgbClr val="14231B"/>
+                </a:solidFill>
+              </a:rPr>
+              <a:t>•  2. Stand up a pilot on live SoliqOnline data; ship the platform GA with the AI triage and scoring engine.</a:t>
+            </a:r>
+          </a:p>
+          <a:p>
+            <a:pPr>
+              <a:spcAft>
+                <a:spcPts val="900"/>
+              </a:spcAft>
+            </a:pPr>
+            <a:r>
+              <a:rPr sz="1500">
+                <a:solidFill>
+                  <a:srgbClr val="14231B"/>
+                </a:solidFill>
+              </a:rPr>
+              <a:t>•  3. In parallel, begin DIFC SPV and fatwa preparation so international capital can follow the operating book.</a:t>
+            </a:r>
+          </a:p>
+          <a:p>
+            <a:pPr>
+              <a:spcAft>
+                <a:spcPts val="900"/>
+              </a:spcAft>
+            </a:pPr>
+            <a:r>
+              <a:rPr sz="1500">
+                <a:solidFill>
+                  <a:srgbClr val="14231B"/>
+                </a:solidFill>
+              </a:rPr>
+              <a:t>•  Contact: Consistente Ltd · info@consistente.tech · consistente.tech</a:t>
             </a:r>
           </a:p>
         </p:txBody>
@@ -6498,7 +8933,7 @@
                   <a:srgbClr val="14231B"/>
                 </a:solidFill>
               </a:rPr>
-              <a:t>•  The market is ~$2bn addressable and under 2.5% penetrated — early, and growing fast.</a:t>
+              <a:t>•  The market is scaling fast: the CBU reports ~10.6 trillion soums (~$835M) factored in Jan–Sep 2025, about half of it digital — against a ~$2bn addressable market that is still lightly penetrated.</a:t>
             </a:r>
           </a:p>
         </p:txBody>
@@ -6823,7 +9258,7 @@
                   <a:srgbClr val="C8A24B"/>
                 </a:solidFill>
               </a:rPr>
-              <a:t>THE INCUMBENT</a:t>
+              <a:t>THE INCUMBENTS</a:t>
             </a:r>
           </a:p>
         </p:txBody>
@@ -6875,7 +9310,7 @@
                   <a:srgbClr val="FFFFFF"/>
                 </a:solidFill>
               </a:rPr>
-              <a:t>   OzPlanet set the market — and left it beatable</a:t>
+              <a:t>   OzPlanet &amp; FinMakon own the market — as aggregators</a:t>
             </a:r>
           </a:p>
         </p:txBody>
@@ -6890,7 +9325,7 @@
         </p:nvGraphicFramePr>
         <p:xfrm>
           <a:off x="685800" y="1828800"/>
-          <a:ext cx="10835640" cy="2560320"/>
+          <a:ext cx="10835640" cy="2926080"/>
         </p:xfrm>
         <a:graphic>
           <a:graphicData uri="http://schemas.openxmlformats.org/drawingml/2006/table">
@@ -6899,9 +9334,10 @@
                 <a:tableStyleId>{5C22544A-7EE6-4342-B048-85BDC9FD1C3A}</a:tableStyleId>
               </a:tblPr>
               <a:tblGrid>
-                <a:gridCol w="3611880"/>
-                <a:gridCol w="3611880"/>
-                <a:gridCol w="3611880"/>
+                <a:gridCol w="2708910"/>
+                <a:gridCol w="2708910"/>
+                <a:gridCol w="2708910"/>
+                <a:gridCol w="2708910"/>
               </a:tblGrid>
               <a:tr h="365760">
                 <a:tc>
@@ -6936,7 +9372,7 @@
                             <a:srgbClr val="FFFFFF"/>
                           </a:solidFill>
                         </a:rPr>
-                        <a:t>OzPlanet (incumbent)</a:t>
+                        <a:t>OzPlanet</a:t>
                       </a:r>
                     </a:p>
                   </a:txBody>
@@ -6957,7 +9393,28 @@
                             <a:srgbClr val="FFFFFF"/>
                           </a:solidFill>
                         </a:rPr>
-                        <a:t>Factorio by Consistente</a:t>
+                        <a:t>FinMakon</a:t>
+                      </a:r>
+                    </a:p>
+                  </a:txBody>
+                  <a:tcPr>
+                    <a:solidFill>
+                      <a:srgbClr val="1F5D43"/>
+                    </a:solidFill>
+                  </a:tcPr>
+                </a:tc>
+                <a:tc>
+                  <a:txBody>
+                    <a:bodyPr/>
+                    <a:lstStyle/>
+                    <a:p>
+                      <a:r>
+                        <a:rPr sz="1100" b="1">
+                          <a:solidFill>
+                            <a:srgbClr val="FFFFFF"/>
+                          </a:solidFill>
+                        </a:rPr>
+                        <a:t>Factorio (Consistente)</a:t>
                       </a:r>
                     </a:p>
                   </a:txBody>
@@ -6980,7 +9437,7 @@
                             <a:srgbClr val="14231B"/>
                           </a:solidFill>
                         </a:rPr>
-                        <a:t>Commercial model</a:t>
+                        <a:t>Model</a:t>
                       </a:r>
                     </a:p>
                   </a:txBody>
@@ -7001,7 +9458,7 @@
                             <a:srgbClr val="14231B"/>
                           </a:solidFill>
                         </a:rPr>
-                        <a:t>Bank SaaS licence / subscription</a:t>
+                        <a:t>Aggregator; bank-set rates</a:t>
                       </a:r>
                     </a:p>
                   </a:txBody>
@@ -7022,7 +9479,28 @@
                             <a:srgbClr val="14231B"/>
                           </a:solidFill>
                         </a:rPr>
-                        <a:t>White-label, volume-only pricing — paid when the bank finances</a:t>
+                        <a:t>Aggregator (Didox-backed)</a:t>
+                      </a:r>
+                    </a:p>
+                  </a:txBody>
+                  <a:tcPr>
+                    <a:solidFill>
+                      <a:srgbClr val="FFFFFF"/>
+                    </a:solidFill>
+                  </a:tcPr>
+                </a:tc>
+                <a:tc>
+                  <a:txBody>
+                    <a:bodyPr/>
+                    <a:lstStyle/>
+                    <a:p>
+                      <a:r>
+                        <a:rPr sz="1050">
+                          <a:solidFill>
+                            <a:srgbClr val="14231B"/>
+                          </a:solidFill>
+                        </a:rPr>
+                        <a:t>White-label marketplace — bank owns it</a:t>
                       </a:r>
                     </a:p>
                   </a:txBody>
@@ -7045,7 +9523,7 @@
                             <a:srgbClr val="14231B"/>
                           </a:solidFill>
                         </a:rPr>
-                        <a:t>Credit scoring</a:t>
+                        <a:t>Digital share (Q3 2025)</a:t>
                       </a:r>
                     </a:p>
                   </a:txBody>
@@ -7066,7 +9544,7 @@
                             <a:srgbClr val="14231B"/>
                           </a:solidFill>
                         </a:rPr>
-                        <a:t>Bank's own manual / internal review</a:t>
+                        <a:t>56% of digital volume</a:t>
                       </a:r>
                     </a:p>
                   </a:txBody>
@@ -7087,7 +9565,28 @@
                             <a:srgbClr val="14231B"/>
                           </a:solidFill>
                         </a:rPr>
-                        <a:t>Open-banking-style automated score (SoliqOnline + bank txn + CRIF)</a:t>
+                        <a:t>44% of digital volume</a:t>
+                      </a:r>
+                    </a:p>
+                  </a:txBody>
+                  <a:tcPr>
+                    <a:solidFill>
+                      <a:srgbClr val="EEEDE5"/>
+                    </a:solidFill>
+                  </a:tcPr>
+                </a:tc>
+                <a:tc>
+                  <a:txBody>
+                    <a:bodyPr/>
+                    <a:lstStyle/>
+                    <a:p>
+                      <a:r>
+                        <a:rPr sz="1050">
+                          <a:solidFill>
+                            <a:srgbClr val="14231B"/>
+                          </a:solidFill>
+                        </a:rPr>
+                        <a:t>New entrant — builds share</a:t>
                       </a:r>
                     </a:p>
                   </a:txBody>
@@ -7110,7 +9609,7 @@
                             <a:srgbClr val="14231B"/>
                           </a:solidFill>
                         </a:rPr>
-                        <a:t>AI</a:t>
+                        <a:t>Funding sources</a:t>
                       </a:r>
                     </a:p>
                   </a:txBody>
@@ -7131,7 +9630,7 @@
                             <a:srgbClr val="14231B"/>
                           </a:solidFill>
                         </a:rPr>
-                        <a:t>—</a:t>
+                        <a:t>Banks / MFOs only</a:t>
                       </a:r>
                     </a:p>
                   </a:txBody>
@@ -7152,7 +9651,28 @@
                             <a:srgbClr val="14231B"/>
                           </a:solidFill>
                         </a:rPr>
-                        <a:t>Chat triage + chat reporting (Grok), document intelligence</a:t>
+                        <a:t>Banks / factoring cos</a:t>
+                      </a:r>
+                    </a:p>
+                  </a:txBody>
+                  <a:tcPr>
+                    <a:solidFill>
+                      <a:srgbClr val="FFFFFF"/>
+                    </a:solidFill>
+                  </a:tcPr>
+                </a:tc>
+                <a:tc>
+                  <a:txBody>
+                    <a:bodyPr/>
+                    <a:lstStyle/>
+                    <a:p>
+                      <a:r>
+                        <a:rPr sz="1050">
+                          <a:solidFill>
+                            <a:srgbClr val="14231B"/>
+                          </a:solidFill>
+                        </a:rPr>
+                        <a:t>Banks + investors + retail + SPV</a:t>
                       </a:r>
                     </a:p>
                   </a:txBody>
@@ -7175,7 +9695,7 @@
                             <a:srgbClr val="14231B"/>
                           </a:solidFill>
                         </a:rPr>
-                        <a:t>Onboarding UX</a:t>
+                        <a:t>Foreign / retail capital</a:t>
                       </a:r>
                     </a:p>
                   </a:txBody>
@@ -7196,7 +9716,7 @@
                             <a:srgbClr val="14231B"/>
                           </a:solidFill>
                         </a:rPr>
-                        <a:t>Bank-led, form-heavy</a:t>
+                        <a:t>No</a:t>
                       </a:r>
                     </a:p>
                   </a:txBody>
@@ -7217,7 +9737,28 @@
                             <a:srgbClr val="14231B"/>
                           </a:solidFill>
                         </a:rPr>
-                        <a:t>Self-serve, trilingual, minutes</a:t>
+                        <a:t>No</a:t>
+                      </a:r>
+                    </a:p>
+                  </a:txBody>
+                  <a:tcPr>
+                    <a:solidFill>
+                      <a:srgbClr val="EEEDE5"/>
+                    </a:solidFill>
+                  </a:tcPr>
+                </a:tc>
+                <a:tc>
+                  <a:txBody>
+                    <a:bodyPr/>
+                    <a:lstStyle/>
+                    <a:p>
+                      <a:r>
+                        <a:rPr sz="1050">
+                          <a:solidFill>
+                            <a:srgbClr val="14231B"/>
+                          </a:solidFill>
+                        </a:rPr>
+                        <a:t>Yes — SPV + marketplace</a:t>
                       </a:r>
                     </a:p>
                   </a:txBody>
@@ -7240,7 +9781,7 @@
                             <a:srgbClr val="14231B"/>
                           </a:solidFill>
                         </a:rPr>
-                        <a:t>International capital</a:t>
+                        <a:t>Bank owns product &amp; data</a:t>
                       </a:r>
                     </a:p>
                   </a:txBody>
@@ -7261,7 +9802,7 @@
                             <a:srgbClr val="14231B"/>
                           </a:solidFill>
                         </a:rPr>
-                        <a:t>Domestic banks only</a:t>
+                        <a:t>No — OzPlanet does</a:t>
                       </a:r>
                     </a:p>
                   </a:txBody>
@@ -7282,7 +9823,28 @@
                             <a:srgbClr val="14231B"/>
                           </a:solidFill>
                         </a:rPr>
-                        <a:t>DIFC SPV for global / Gulf investors</a:t>
+                        <a:t>No — FinMakon does</a:t>
+                      </a:r>
+                    </a:p>
+                  </a:txBody>
+                  <a:tcPr>
+                    <a:solidFill>
+                      <a:srgbClr val="FFFFFF"/>
+                    </a:solidFill>
+                  </a:tcPr>
+                </a:tc>
+                <a:tc>
+                  <a:txBody>
+                    <a:bodyPr/>
+                    <a:lstStyle/>
+                    <a:p>
+                      <a:r>
+                        <a:rPr sz="1050">
+                          <a:solidFill>
+                            <a:srgbClr val="14231B"/>
+                          </a:solidFill>
+                        </a:rPr>
+                        <a:t>Yes — fully the bank's</a:t>
                       </a:r>
                     </a:p>
                   </a:txBody>
@@ -7305,7 +9867,7 @@
                             <a:srgbClr val="14231B"/>
                           </a:solidFill>
                         </a:rPr>
-                        <a:t>Time to indicative decision</a:t>
+                        <a:t>AI core</a:t>
                       </a:r>
                     </a:p>
                   </a:txBody>
@@ -7326,7 +9888,7 @@
                             <a:srgbClr val="14231B"/>
                           </a:solidFill>
                         </a:rPr>
-                        <a:t>Days</a:t>
+                        <a:t>Rule-based; nascent</a:t>
                       </a:r>
                     </a:p>
                   </a:txBody>
@@ -7347,1100 +9909,7 @@
                             <a:srgbClr val="14231B"/>
                           </a:solidFill>
                         </a:rPr>
-                        <a:t>Seconds (indicative) · hours (final)</a:t>
-                      </a:r>
-                    </a:p>
-                  </a:txBody>
-                  <a:tcPr>
-                    <a:solidFill>
-                      <a:srgbClr val="EEEDE5"/>
-                    </a:solidFill>
-                  </a:tcPr>
-                </a:tc>
-              </a:tr>
-            </a:tbl>
-          </a:graphicData>
-        </a:graphic>
-      </p:graphicFrame>
-      <p:sp>
-        <p:nvSpPr>
-          <p:cNvPr id="6" name="TextBox 5"/>
-          <p:cNvSpPr txBox="1"/>
-          <p:nvPr/>
-        </p:nvSpPr>
-        <p:spPr>
-          <a:xfrm>
-            <a:off x="685800" y="6035040"/>
-            <a:ext cx="10881360" cy="731520"/>
-          </a:xfrm>
-          <a:prstGeom prst="rect">
-            <a:avLst/>
-          </a:prstGeom>
-          <a:noFill/>
-        </p:spPr>
-        <p:txBody>
-          <a:bodyPr wrap="square">
-            <a:spAutoFit/>
-          </a:bodyPr>
-          <a:lstStyle/>
-          <a:p>
-            <a:r>
-              <a:rPr sz="1000" i="1">
-                <a:solidFill>
-                  <a:srgbClr val="415046"/>
-                </a:solidFill>
-              </a:rPr>
-              <a:t>OzPlanet reportedly carries ~52% of factoring routed through e-platforms and serves ~50% of banks — proof the demand is real, and that a sharper product wins share.</a:t>
-            </a:r>
-          </a:p>
-        </p:txBody>
-      </p:sp>
-    </p:spTree>
-  </p:cSld>
-  <p:clrMapOvr>
-    <a:masterClrMapping/>
-  </p:clrMapOvr>
-</p:sld>
-</file>
-
-<file path=ppt/slides/slide6.xml><?xml version="1.0" encoding="utf-8"?>
-<p:sld xmlns:a="http://schemas.openxmlformats.org/drawingml/2006/main" xmlns:p="http://schemas.openxmlformats.org/presentationml/2006/main" xmlns:r="http://schemas.openxmlformats.org/officeDocument/2006/relationships">
-  <p:cSld>
-    <p:spTree>
-      <p:nvGrpSpPr>
-        <p:cNvPr id="1" name=""/>
-        <p:cNvGrpSpPr/>
-        <p:nvPr/>
-      </p:nvGrpSpPr>
-      <p:grpSpPr/>
-      <p:sp>
-        <p:nvSpPr>
-          <p:cNvPr id="2" name="Rectangle 1"/>
-          <p:cNvSpPr/>
-          <p:nvPr/>
-        </p:nvSpPr>
-        <p:spPr>
-          <a:xfrm>
-            <a:off x="0" y="0"/>
-            <a:ext cx="12191695" cy="6858000"/>
-          </a:xfrm>
-          <a:prstGeom prst="rect">
-            <a:avLst/>
-          </a:prstGeom>
-          <a:solidFill>
-            <a:srgbClr val="F7F6F1"/>
-          </a:solidFill>
-          <a:ln>
-            <a:noFill/>
-          </a:ln>
-          <a:effectLst/>
-        </p:spPr>
-        <p:style>
-          <a:lnRef idx="1">
-            <a:schemeClr val="accent1"/>
-          </a:lnRef>
-          <a:fillRef idx="3">
-            <a:schemeClr val="accent1"/>
-          </a:fillRef>
-          <a:effectRef idx="2">
-            <a:schemeClr val="accent1"/>
-          </a:effectRef>
-          <a:fontRef idx="minor">
-            <a:schemeClr val="lt1"/>
-          </a:fontRef>
-        </p:style>
-        <p:txBody>
-          <a:bodyPr rtlCol="0" anchor="ctr"/>
-          <a:lstStyle/>
-          <a:p>
-            <a:pPr algn="ctr"/>
-          </a:p>
-        </p:txBody>
-      </p:sp>
-      <p:sp>
-        <p:nvSpPr>
-          <p:cNvPr id="3" name="TextBox 2"/>
-          <p:cNvSpPr txBox="1"/>
-          <p:nvPr/>
-        </p:nvSpPr>
-        <p:spPr>
-          <a:xfrm>
-            <a:off x="640080" y="365760"/>
-            <a:ext cx="10972800" cy="365760"/>
-          </a:xfrm>
-          <a:prstGeom prst="rect">
-            <a:avLst/>
-          </a:prstGeom>
-          <a:noFill/>
-        </p:spPr>
-        <p:txBody>
-          <a:bodyPr wrap="none">
-            <a:spAutoFit/>
-          </a:bodyPr>
-          <a:lstStyle/>
-          <a:p>
-            <a:r>
-              <a:rPr sz="1100" b="1">
-                <a:solidFill>
-                  <a:srgbClr val="C8A24B"/>
-                </a:solidFill>
-              </a:rPr>
-              <a:t>PILLAR 1 · A BETTER PLATFORM</a:t>
-            </a:r>
-          </a:p>
-        </p:txBody>
-      </p:sp>
-      <p:sp>
-        <p:nvSpPr>
-          <p:cNvPr id="4" name="Rectangle 3"/>
-          <p:cNvSpPr/>
-          <p:nvPr/>
-        </p:nvSpPr>
-        <p:spPr>
-          <a:xfrm>
-            <a:off x="640080" y="731520"/>
-            <a:ext cx="10881360" cy="777240"/>
-          </a:xfrm>
-          <a:prstGeom prst="rect">
-            <a:avLst/>
-          </a:prstGeom>
-          <a:solidFill>
-            <a:srgbClr val="1F5D43"/>
-          </a:solidFill>
-          <a:ln>
-            <a:noFill/>
-          </a:ln>
-          <a:effectLst/>
-        </p:spPr>
-        <p:style>
-          <a:lnRef idx="1">
-            <a:schemeClr val="accent1"/>
-          </a:lnRef>
-          <a:fillRef idx="3">
-            <a:schemeClr val="accent1"/>
-          </a:fillRef>
-          <a:effectRef idx="2">
-            <a:schemeClr val="accent1"/>
-          </a:effectRef>
-          <a:fontRef idx="minor">
-            <a:schemeClr val="lt1"/>
-          </a:fontRef>
-        </p:style>
-        <p:txBody>
-          <a:bodyPr rtlCol="0" anchor="ctr" wrap="square"/>
-          <a:lstStyle/>
-          <a:p>
-            <a:pPr algn="ctr"/>
-            <a:r>
-              <a:rPr sz="2100" b="1">
-                <a:solidFill>
-                  <a:srgbClr val="FFFFFF"/>
-                </a:solidFill>
-              </a:rPr>
-              <a:t>   AI at the core, not bolted on</a:t>
-            </a:r>
-          </a:p>
-        </p:txBody>
-      </p:sp>
-      <p:sp>
-        <p:nvSpPr>
-          <p:cNvPr id="5" name="TextBox 4"/>
-          <p:cNvSpPr txBox="1"/>
-          <p:nvPr/>
-        </p:nvSpPr>
-        <p:spPr>
-          <a:xfrm>
-            <a:off x="685800" y="1828800"/>
-            <a:ext cx="10881360" cy="4572000"/>
-          </a:xfrm>
-          <a:prstGeom prst="rect">
-            <a:avLst/>
-          </a:prstGeom>
-          <a:noFill/>
-        </p:spPr>
-        <p:txBody>
-          <a:bodyPr wrap="square">
-            <a:spAutoFit/>
-          </a:bodyPr>
-          <a:lstStyle/>
-          <a:p>
-            <a:pPr>
-              <a:spcAft>
-                <a:spcPts val="900"/>
-              </a:spcAft>
-            </a:pPr>
-            <a:r>
-              <a:rPr sz="1500">
-                <a:solidFill>
-                  <a:srgbClr val="14231B"/>
-                </a:solidFill>
-              </a:rPr>
-              <a:t>•  The same end-to-end factoring workflow — submit, verify, fund, settle — but with AI woven through triage, scoring, documents and reporting.</a:t>
-            </a:r>
-          </a:p>
-          <a:p>
-            <a:pPr>
-              <a:spcAft>
-                <a:spcPts val="900"/>
-              </a:spcAft>
-            </a:pPr>
-            <a:r>
-              <a:rPr sz="1500">
-                <a:solidFill>
-                  <a:srgbClr val="14231B"/>
-                </a:solidFill>
-              </a:rPr>
-              <a:t>•  Built on a lean, server-rendered stack (FastHTML + PostgreSQL) — fast to change, cheap to run, easy to white-label under the bank's brand.</a:t>
-            </a:r>
-          </a:p>
-          <a:p>
-            <a:pPr>
-              <a:spcAft>
-                <a:spcPts val="900"/>
-              </a:spcAft>
-            </a:pPr>
-            <a:r>
-              <a:rPr sz="1500">
-                <a:solidFill>
-                  <a:srgbClr val="14231B"/>
-                </a:solidFill>
-              </a:rPr>
-              <a:t>•  Trilingual by design (English · Oʻzbekcha · Russian); the AI answers in the user's language.</a:t>
-            </a:r>
-          </a:p>
-          <a:p>
-            <a:pPr>
-              <a:spcAft>
-                <a:spcPts val="900"/>
-              </a:spcAft>
-            </a:pPr>
-            <a:r>
-              <a:rPr sz="1500">
-                <a:solidFill>
-                  <a:srgbClr val="14231B"/>
-                </a:solidFill>
-              </a:rPr>
-              <a:t>•  The next three slides detail the AI, the credit-scoring engine, and the commercial model.</a:t>
-            </a:r>
-          </a:p>
-        </p:txBody>
-      </p:sp>
-    </p:spTree>
-  </p:cSld>
-  <p:clrMapOvr>
-    <a:masterClrMapping/>
-  </p:clrMapOvr>
-</p:sld>
-</file>
-
-<file path=ppt/slides/slide7.xml><?xml version="1.0" encoding="utf-8"?>
-<p:sld xmlns:a="http://schemas.openxmlformats.org/drawingml/2006/main" xmlns:p="http://schemas.openxmlformats.org/presentationml/2006/main" xmlns:r="http://schemas.openxmlformats.org/officeDocument/2006/relationships">
-  <p:cSld>
-    <p:spTree>
-      <p:nvGrpSpPr>
-        <p:cNvPr id="1" name=""/>
-        <p:cNvGrpSpPr/>
-        <p:nvPr/>
-      </p:nvGrpSpPr>
-      <p:grpSpPr/>
-      <p:sp>
-        <p:nvSpPr>
-          <p:cNvPr id="2" name="Rectangle 1"/>
-          <p:cNvSpPr/>
-          <p:nvPr/>
-        </p:nvSpPr>
-        <p:spPr>
-          <a:xfrm>
-            <a:off x="0" y="0"/>
-            <a:ext cx="12191695" cy="6858000"/>
-          </a:xfrm>
-          <a:prstGeom prst="rect">
-            <a:avLst/>
-          </a:prstGeom>
-          <a:solidFill>
-            <a:srgbClr val="F7F6F1"/>
-          </a:solidFill>
-          <a:ln>
-            <a:noFill/>
-          </a:ln>
-          <a:effectLst/>
-        </p:spPr>
-        <p:style>
-          <a:lnRef idx="1">
-            <a:schemeClr val="accent1"/>
-          </a:lnRef>
-          <a:fillRef idx="3">
-            <a:schemeClr val="accent1"/>
-          </a:fillRef>
-          <a:effectRef idx="2">
-            <a:schemeClr val="accent1"/>
-          </a:effectRef>
-          <a:fontRef idx="minor">
-            <a:schemeClr val="lt1"/>
-          </a:fontRef>
-        </p:style>
-        <p:txBody>
-          <a:bodyPr rtlCol="0" anchor="ctr"/>
-          <a:lstStyle/>
-          <a:p>
-            <a:pPr algn="ctr"/>
-          </a:p>
-        </p:txBody>
-      </p:sp>
-      <p:sp>
-        <p:nvSpPr>
-          <p:cNvPr id="3" name="TextBox 2"/>
-          <p:cNvSpPr txBox="1"/>
-          <p:nvPr/>
-        </p:nvSpPr>
-        <p:spPr>
-          <a:xfrm>
-            <a:off x="640080" y="365760"/>
-            <a:ext cx="10972800" cy="365760"/>
-          </a:xfrm>
-          <a:prstGeom prst="rect">
-            <a:avLst/>
-          </a:prstGeom>
-          <a:noFill/>
-        </p:spPr>
-        <p:txBody>
-          <a:bodyPr wrap="none">
-            <a:spAutoFit/>
-          </a:bodyPr>
-          <a:lstStyle/>
-          <a:p>
-            <a:r>
-              <a:rPr sz="1100" b="1">
-                <a:solidFill>
-                  <a:srgbClr val="C8A24B"/>
-                </a:solidFill>
-              </a:rPr>
-              <a:t>PILLAR 1 · AI</a:t>
-            </a:r>
-          </a:p>
-        </p:txBody>
-      </p:sp>
-      <p:sp>
-        <p:nvSpPr>
-          <p:cNvPr id="4" name="Rectangle 3"/>
-          <p:cNvSpPr/>
-          <p:nvPr/>
-        </p:nvSpPr>
-        <p:spPr>
-          <a:xfrm>
-            <a:off x="640080" y="731520"/>
-            <a:ext cx="10881360" cy="777240"/>
-          </a:xfrm>
-          <a:prstGeom prst="rect">
-            <a:avLst/>
-          </a:prstGeom>
-          <a:solidFill>
-            <a:srgbClr val="1F5D43"/>
-          </a:solidFill>
-          <a:ln>
-            <a:noFill/>
-          </a:ln>
-          <a:effectLst/>
-        </p:spPr>
-        <p:style>
-          <a:lnRef idx="1">
-            <a:schemeClr val="accent1"/>
-          </a:lnRef>
-          <a:fillRef idx="3">
-            <a:schemeClr val="accent1"/>
-          </a:fillRef>
-          <a:effectRef idx="2">
-            <a:schemeClr val="accent1"/>
-          </a:effectRef>
-          <a:fontRef idx="minor">
-            <a:schemeClr val="lt1"/>
-          </a:fontRef>
-        </p:style>
-        <p:txBody>
-          <a:bodyPr rtlCol="0" anchor="ctr" wrap="square"/>
-          <a:lstStyle/>
-          <a:p>
-            <a:pPr algn="ctr"/>
-            <a:r>
-              <a:rPr sz="2100" b="1">
-                <a:solidFill>
-                  <a:srgbClr val="FFFFFF"/>
-                </a:solidFill>
-              </a:rPr>
-              <a:t>   Two conversational surfaces, one Grok core</a:t>
-            </a:r>
-          </a:p>
-        </p:txBody>
-      </p:sp>
-      <p:pic>
-        <p:nvPicPr>
-          <p:cNvPr id="5" name="Picture 4" descr="d2-ai-chat.png"/>
-          <p:cNvPicPr>
-            <a:picLocks noChangeAspect="1"/>
-          </p:cNvPicPr>
-          <p:nvPr/>
-        </p:nvPicPr>
-        <p:blipFill>
-          <a:blip r:embed="rId2"/>
-          <a:stretch>
-            <a:fillRect/>
-          </a:stretch>
-        </p:blipFill>
-        <p:spPr>
-          <a:xfrm>
-            <a:off x="548640" y="3366474"/>
-            <a:ext cx="6583680" cy="1405212"/>
-          </a:xfrm>
-          <a:prstGeom prst="rect">
-            <a:avLst/>
-          </a:prstGeom>
-        </p:spPr>
-      </p:pic>
-      <p:sp>
-        <p:nvSpPr>
-          <p:cNvPr id="6" name="TextBox 5"/>
-          <p:cNvSpPr txBox="1"/>
-          <p:nvPr/>
-        </p:nvSpPr>
-        <p:spPr>
-          <a:xfrm>
-            <a:off x="548640" y="6355080"/>
-            <a:ext cx="6583680" cy="365760"/>
-          </a:xfrm>
-          <a:prstGeom prst="rect">
-            <a:avLst/>
-          </a:prstGeom>
-          <a:noFill/>
-        </p:spPr>
-        <p:txBody>
-          <a:bodyPr wrap="none">
-            <a:spAutoFit/>
-          </a:bodyPr>
-          <a:lstStyle/>
-          <a:p>
-            <a:pPr algn="ctr"/>
-            <a:r>
-              <a:rPr sz="1000" i="1">
-                <a:solidFill>
-                  <a:srgbClr val="415046"/>
-                </a:solidFill>
-              </a:rPr>
-              <a:t>Chat-based loan triage and chat-based investor reporting</a:t>
-            </a:r>
-          </a:p>
-        </p:txBody>
-      </p:sp>
-      <p:sp>
-        <p:nvSpPr>
-          <p:cNvPr id="7" name="TextBox 6"/>
-          <p:cNvSpPr txBox="1"/>
-          <p:nvPr/>
-        </p:nvSpPr>
-        <p:spPr>
-          <a:xfrm>
-            <a:off x="7406640" y="1828800"/>
-            <a:ext cx="4480560" cy="4572000"/>
-          </a:xfrm>
-          <a:prstGeom prst="rect">
-            <a:avLst/>
-          </a:prstGeom>
-          <a:noFill/>
-        </p:spPr>
-        <p:txBody>
-          <a:bodyPr wrap="square">
-            <a:spAutoFit/>
-          </a:bodyPr>
-          <a:lstStyle/>
-          <a:p>
-            <a:pPr>
-              <a:spcAft>
-                <a:spcPts val="900"/>
-              </a:spcAft>
-            </a:pPr>
-            <a:r>
-              <a:rPr sz="1300">
-                <a:solidFill>
-                  <a:srgbClr val="14231B"/>
-                </a:solidFill>
-              </a:rPr>
-              <a:t>•  Triage turns a seller's plain-language description into an indicative grade, advance rate and document list — in seconds.</a:t>
-            </a:r>
-          </a:p>
-          <a:p>
-            <a:pPr>
-              <a:spcAft>
-                <a:spcPts val="900"/>
-              </a:spcAft>
-            </a:pPr>
-            <a:r>
-              <a:rPr sz="1300">
-                <a:solidFill>
-                  <a:srgbClr val="14231B"/>
-                </a:solidFill>
-              </a:rPr>
-              <a:t>•  Reporting answers an investor's questions grounded in their own live positions — no invented figures.</a:t>
-            </a:r>
-          </a:p>
-          <a:p>
-            <a:pPr>
-              <a:spcAft>
-                <a:spcPts val="900"/>
-              </a:spcAft>
-            </a:pPr>
-            <a:r>
-              <a:rPr sz="1300">
-                <a:solidFill>
-                  <a:srgbClr val="14231B"/>
-                </a:solidFill>
-              </a:rPr>
-              <a:t>•  Grok scores and explains; a human always approves. Every AI decision is logged and auditable.</a:t>
-            </a:r>
-          </a:p>
-        </p:txBody>
-      </p:sp>
-    </p:spTree>
-  </p:cSld>
-  <p:clrMapOvr>
-    <a:masterClrMapping/>
-  </p:clrMapOvr>
-</p:sld>
-</file>
-
-<file path=ppt/slides/slide8.xml><?xml version="1.0" encoding="utf-8"?>
-<p:sld xmlns:a="http://schemas.openxmlformats.org/drawingml/2006/main" xmlns:p="http://schemas.openxmlformats.org/presentationml/2006/main" xmlns:r="http://schemas.openxmlformats.org/officeDocument/2006/relationships">
-  <p:cSld>
-    <p:spTree>
-      <p:nvGrpSpPr>
-        <p:cNvPr id="1" name=""/>
-        <p:cNvGrpSpPr/>
-        <p:nvPr/>
-      </p:nvGrpSpPr>
-      <p:grpSpPr/>
-      <p:sp>
-        <p:nvSpPr>
-          <p:cNvPr id="2" name="Rectangle 1"/>
-          <p:cNvSpPr/>
-          <p:nvPr/>
-        </p:nvSpPr>
-        <p:spPr>
-          <a:xfrm>
-            <a:off x="0" y="0"/>
-            <a:ext cx="12191695" cy="6858000"/>
-          </a:xfrm>
-          <a:prstGeom prst="rect">
-            <a:avLst/>
-          </a:prstGeom>
-          <a:solidFill>
-            <a:srgbClr val="F7F6F1"/>
-          </a:solidFill>
-          <a:ln>
-            <a:noFill/>
-          </a:ln>
-          <a:effectLst/>
-        </p:spPr>
-        <p:style>
-          <a:lnRef idx="1">
-            <a:schemeClr val="accent1"/>
-          </a:lnRef>
-          <a:fillRef idx="3">
-            <a:schemeClr val="accent1"/>
-          </a:fillRef>
-          <a:effectRef idx="2">
-            <a:schemeClr val="accent1"/>
-          </a:effectRef>
-          <a:fontRef idx="minor">
-            <a:schemeClr val="lt1"/>
-          </a:fontRef>
-        </p:style>
-        <p:txBody>
-          <a:bodyPr rtlCol="0" anchor="ctr"/>
-          <a:lstStyle/>
-          <a:p>
-            <a:pPr algn="ctr"/>
-          </a:p>
-        </p:txBody>
-      </p:sp>
-      <p:sp>
-        <p:nvSpPr>
-          <p:cNvPr id="3" name="TextBox 2"/>
-          <p:cNvSpPr txBox="1"/>
-          <p:nvPr/>
-        </p:nvSpPr>
-        <p:spPr>
-          <a:xfrm>
-            <a:off x="640080" y="365760"/>
-            <a:ext cx="10972800" cy="365760"/>
-          </a:xfrm>
-          <a:prstGeom prst="rect">
-            <a:avLst/>
-          </a:prstGeom>
-          <a:noFill/>
-        </p:spPr>
-        <p:txBody>
-          <a:bodyPr wrap="none">
-            <a:spAutoFit/>
-          </a:bodyPr>
-          <a:lstStyle/>
-          <a:p>
-            <a:r>
-              <a:rPr sz="1100" b="1">
-                <a:solidFill>
-                  <a:srgbClr val="C8A24B"/>
-                </a:solidFill>
-              </a:rPr>
-              <a:t>PILLAR 1 · CREDIT SCORING</a:t>
-            </a:r>
-          </a:p>
-        </p:txBody>
-      </p:sp>
-      <p:sp>
-        <p:nvSpPr>
-          <p:cNvPr id="4" name="Rectangle 3"/>
-          <p:cNvSpPr/>
-          <p:nvPr/>
-        </p:nvSpPr>
-        <p:spPr>
-          <a:xfrm>
-            <a:off x="640080" y="731520"/>
-            <a:ext cx="10881360" cy="777240"/>
-          </a:xfrm>
-          <a:prstGeom prst="rect">
-            <a:avLst/>
-          </a:prstGeom>
-          <a:solidFill>
-            <a:srgbClr val="1F5D43"/>
-          </a:solidFill>
-          <a:ln>
-            <a:noFill/>
-          </a:ln>
-          <a:effectLst/>
-        </p:spPr>
-        <p:style>
-          <a:lnRef idx="1">
-            <a:schemeClr val="accent1"/>
-          </a:lnRef>
-          <a:fillRef idx="3">
-            <a:schemeClr val="accent1"/>
-          </a:fillRef>
-          <a:effectRef idx="2">
-            <a:schemeClr val="accent1"/>
-          </a:effectRef>
-          <a:fontRef idx="minor">
-            <a:schemeClr val="lt1"/>
-          </a:fontRef>
-        </p:style>
-        <p:txBody>
-          <a:bodyPr rtlCol="0" anchor="ctr" wrap="square"/>
-          <a:lstStyle/>
-          <a:p>
-            <a:pPr algn="ctr"/>
-            <a:r>
-              <a:rPr sz="2100" b="1">
-                <a:solidFill>
-                  <a:srgbClr val="FFFFFF"/>
-                </a:solidFill>
-              </a:rPr>
-              <a:t>   Open-banking-style scoring, Uzbek edition</a:t>
-            </a:r>
-          </a:p>
-        </p:txBody>
-      </p:sp>
-      <p:pic>
-        <p:nvPicPr>
-          <p:cNvPr id="5" name="Picture 4" descr="d3-scoring.png"/>
-          <p:cNvPicPr>
-            <a:picLocks noChangeAspect="1"/>
-          </p:cNvPicPr>
-          <p:nvPr/>
-        </p:nvPicPr>
-        <p:blipFill>
-          <a:blip r:embed="rId2"/>
-          <a:stretch>
-            <a:fillRect/>
-          </a:stretch>
-        </p:blipFill>
-        <p:spPr>
-          <a:xfrm>
-            <a:off x="548640" y="3192925"/>
-            <a:ext cx="6583680" cy="1752310"/>
-          </a:xfrm>
-          <a:prstGeom prst="rect">
-            <a:avLst/>
-          </a:prstGeom>
-        </p:spPr>
-      </p:pic>
-      <p:sp>
-        <p:nvSpPr>
-          <p:cNvPr id="6" name="TextBox 5"/>
-          <p:cNvSpPr txBox="1"/>
-          <p:nvPr/>
-        </p:nvSpPr>
-        <p:spPr>
-          <a:xfrm>
-            <a:off x="548640" y="6355080"/>
-            <a:ext cx="6583680" cy="365760"/>
-          </a:xfrm>
-          <a:prstGeom prst="rect">
-            <a:avLst/>
-          </a:prstGeom>
-          <a:noFill/>
-        </p:spPr>
-        <p:txBody>
-          <a:bodyPr wrap="none">
-            <a:spAutoFit/>
-          </a:bodyPr>
-          <a:lstStyle/>
-          <a:p>
-            <a:pPr algn="ctr"/>
-            <a:r>
-              <a:rPr sz="1000" i="1">
-                <a:solidFill>
-                  <a:srgbClr val="415046"/>
-                </a:solidFill>
-              </a:rPr>
-              <a:t>Plaid-style data fusion adapted to Uzbekistan's rails</a:t>
-            </a:r>
-          </a:p>
-        </p:txBody>
-      </p:sp>
-      <p:sp>
-        <p:nvSpPr>
-          <p:cNvPr id="7" name="TextBox 6"/>
-          <p:cNvSpPr txBox="1"/>
-          <p:nvPr/>
-        </p:nvSpPr>
-        <p:spPr>
-          <a:xfrm>
-            <a:off x="7406640" y="1828800"/>
-            <a:ext cx="4480560" cy="4572000"/>
-          </a:xfrm>
-          <a:prstGeom prst="rect">
-            <a:avLst/>
-          </a:prstGeom>
-          <a:noFill/>
-        </p:spPr>
-        <p:txBody>
-          <a:bodyPr wrap="square">
-            <a:spAutoFit/>
-          </a:bodyPr>
-          <a:lstStyle/>
-          <a:p>
-            <a:pPr>
-              <a:spcAft>
-                <a:spcPts val="900"/>
-              </a:spcAft>
-            </a:pPr>
-            <a:r>
-              <a:rPr sz="1300">
-                <a:solidFill>
-                  <a:srgbClr val="14231B"/>
-                </a:solidFill>
-              </a:rPr>
-              <a:t>•  The Plaid model is connect an account, read the cash flows, decide. In Uzbekistan the richest feed is SoliqOnline — verified invoices and tax-declared turnover — plus bank transaction data and the CRIF bureau.</a:t>
-            </a:r>
-          </a:p>
-          <a:p>
-            <a:pPr>
-              <a:spcAft>
-                <a:spcPts val="900"/>
-              </a:spcAft>
-            </a:pPr>
-            <a:r>
-              <a:rPr sz="1300">
-                <a:solidFill>
-                  <a:srgbClr val="14231B"/>
-                </a:solidFill>
-              </a:rPr>
-              <a:t>•  A model produces the grade, advance rate and price; Grok writes the plain-language rationale and adverse-action reasons.</a:t>
-            </a:r>
-          </a:p>
-          <a:p>
-            <a:pPr>
-              <a:spcAft>
-                <a:spcPts val="900"/>
-              </a:spcAft>
-            </a:pPr>
-            <a:r>
-              <a:rPr sz="1300">
-                <a:solidFill>
-                  <a:srgbClr val="14231B"/>
-                </a:solidFill>
-              </a:rPr>
-              <a:t>•  Every decision is versioned and reproducible — Consistente's core methodology, and what a regulator will ask for.</a:t>
-            </a:r>
-          </a:p>
-        </p:txBody>
-      </p:sp>
-    </p:spTree>
-  </p:cSld>
-  <p:clrMapOvr>
-    <a:masterClrMapping/>
-  </p:clrMapOvr>
-</p:sld>
-</file>
-
-<file path=ppt/slides/slide9.xml><?xml version="1.0" encoding="utf-8"?>
-<p:sld xmlns:a="http://schemas.openxmlformats.org/drawingml/2006/main" xmlns:p="http://schemas.openxmlformats.org/presentationml/2006/main" xmlns:r="http://schemas.openxmlformats.org/officeDocument/2006/relationships">
-  <p:cSld>
-    <p:spTree>
-      <p:nvGrpSpPr>
-        <p:cNvPr id="1" name=""/>
-        <p:cNvGrpSpPr/>
-        <p:nvPr/>
-      </p:nvGrpSpPr>
-      <p:grpSpPr/>
-      <p:sp>
-        <p:nvSpPr>
-          <p:cNvPr id="2" name="Rectangle 1"/>
-          <p:cNvSpPr/>
-          <p:nvPr/>
-        </p:nvSpPr>
-        <p:spPr>
-          <a:xfrm>
-            <a:off x="0" y="0"/>
-            <a:ext cx="12191695" cy="6858000"/>
-          </a:xfrm>
-          <a:prstGeom prst="rect">
-            <a:avLst/>
-          </a:prstGeom>
-          <a:solidFill>
-            <a:srgbClr val="F7F6F1"/>
-          </a:solidFill>
-          <a:ln>
-            <a:noFill/>
-          </a:ln>
-          <a:effectLst/>
-        </p:spPr>
-        <p:style>
-          <a:lnRef idx="1">
-            <a:schemeClr val="accent1"/>
-          </a:lnRef>
-          <a:fillRef idx="3">
-            <a:schemeClr val="accent1"/>
-          </a:fillRef>
-          <a:effectRef idx="2">
-            <a:schemeClr val="accent1"/>
-          </a:effectRef>
-          <a:fontRef idx="minor">
-            <a:schemeClr val="lt1"/>
-          </a:fontRef>
-        </p:style>
-        <p:txBody>
-          <a:bodyPr rtlCol="0" anchor="ctr"/>
-          <a:lstStyle/>
-          <a:p>
-            <a:pPr algn="ctr"/>
-          </a:p>
-        </p:txBody>
-      </p:sp>
-      <p:sp>
-        <p:nvSpPr>
-          <p:cNvPr id="3" name="TextBox 2"/>
-          <p:cNvSpPr txBox="1"/>
-          <p:nvPr/>
-        </p:nvSpPr>
-        <p:spPr>
-          <a:xfrm>
-            <a:off x="640080" y="365760"/>
-            <a:ext cx="10972800" cy="365760"/>
-          </a:xfrm>
-          <a:prstGeom prst="rect">
-            <a:avLst/>
-          </a:prstGeom>
-          <a:noFill/>
-        </p:spPr>
-        <p:txBody>
-          <a:bodyPr wrap="none">
-            <a:spAutoFit/>
-          </a:bodyPr>
-          <a:lstStyle/>
-          <a:p>
-            <a:r>
-              <a:rPr sz="1100" b="1">
-                <a:solidFill>
-                  <a:srgbClr val="C8A24B"/>
-                </a:solidFill>
-              </a:rPr>
-              <a:t>PILLAR 1 · COMMERCIAL MODEL</a:t>
-            </a:r>
-          </a:p>
-        </p:txBody>
-      </p:sp>
-      <p:sp>
-        <p:nvSpPr>
-          <p:cNvPr id="4" name="Rectangle 3"/>
-          <p:cNvSpPr/>
-          <p:nvPr/>
-        </p:nvSpPr>
-        <p:spPr>
-          <a:xfrm>
-            <a:off x="640080" y="731520"/>
-            <a:ext cx="10881360" cy="777240"/>
-          </a:xfrm>
-          <a:prstGeom prst="rect">
-            <a:avLst/>
-          </a:prstGeom>
-          <a:solidFill>
-            <a:srgbClr val="1F5D43"/>
-          </a:solidFill>
-          <a:ln>
-            <a:noFill/>
-          </a:ln>
-          <a:effectLst/>
-        </p:spPr>
-        <p:style>
-          <a:lnRef idx="1">
-            <a:schemeClr val="accent1"/>
-          </a:lnRef>
-          <a:fillRef idx="3">
-            <a:schemeClr val="accent1"/>
-          </a:fillRef>
-          <a:effectRef idx="2">
-            <a:schemeClr val="accent1"/>
-          </a:effectRef>
-          <a:fontRef idx="minor">
-            <a:schemeClr val="lt1"/>
-          </a:fontRef>
-        </p:style>
-        <p:txBody>
-          <a:bodyPr rtlCol="0" anchor="ctr" wrap="square"/>
-          <a:lstStyle/>
-          <a:p>
-            <a:pPr algn="ctr"/>
-            <a:r>
-              <a:rPr sz="2100" b="1">
-                <a:solidFill>
-                  <a:srgbClr val="FFFFFF"/>
-                </a:solidFill>
-              </a:rPr>
-              <a:t>   Volume-only pricing — aligned with the bank</a:t>
-            </a:r>
-          </a:p>
-        </p:txBody>
-      </p:sp>
-      <p:graphicFrame>
-        <p:nvGraphicFramePr>
-          <p:cNvPr id="5" name="Table 4"/>
-          <p:cNvGraphicFramePr>
-            <a:graphicFrameLocks noGrp="1"/>
-          </p:cNvGraphicFramePr>
-          <p:nvPr/>
-        </p:nvGraphicFramePr>
-        <p:xfrm>
-          <a:off x="685800" y="1828800"/>
-          <a:ext cx="10835640" cy="1828800"/>
-        </p:xfrm>
-        <a:graphic>
-          <a:graphicData uri="http://schemas.openxmlformats.org/drawingml/2006/table">
-            <a:tbl>
-              <a:tblPr firstRow="1" bandRow="1">
-                <a:tableStyleId>{5C22544A-7EE6-4342-B048-85BDC9FD1C3A}</a:tableStyleId>
-              </a:tblPr>
-              <a:tblGrid>
-                <a:gridCol w="5417820"/>
-                <a:gridCol w="5417820"/>
-              </a:tblGrid>
-              <a:tr h="365760">
-                <a:tc>
-                  <a:txBody>
-                    <a:bodyPr/>
-                    <a:lstStyle/>
-                    <a:p>
-                      <a:r>
-                        <a:rPr sz="1100" b="1">
-                          <a:solidFill>
-                            <a:srgbClr val="FFFFFF"/>
-                          </a:solidFill>
-                        </a:rPr>
-                        <a:t>Monthly financed volume</a:t>
-                      </a:r>
-                    </a:p>
-                  </a:txBody>
-                  <a:tcPr>
-                    <a:solidFill>
-                      <a:srgbClr val="1F5D43"/>
-                    </a:solidFill>
-                  </a:tcPr>
-                </a:tc>
-                <a:tc>
-                  <a:txBody>
-                    <a:bodyPr/>
-                    <a:lstStyle/>
-                    <a:p>
-                      <a:r>
-                        <a:rPr sz="1100" b="1">
-                          <a:solidFill>
-                            <a:srgbClr val="FFFFFF"/>
-                          </a:solidFill>
-                        </a:rPr>
-                        <a:t>Platform fee (bps of financed volume)</a:t>
-                      </a:r>
-                    </a:p>
-                  </a:txBody>
-                  <a:tcPr>
-                    <a:solidFill>
-                      <a:srgbClr val="1F5D43"/>
-                    </a:solidFill>
-                  </a:tcPr>
-                </a:tc>
-              </a:tr>
-              <a:tr h="365760">
-                <a:tc>
-                  <a:txBody>
-                    <a:bodyPr/>
-                    <a:lstStyle/>
-                    <a:p>
-                      <a:r>
-                        <a:rPr sz="1050">
-                          <a:solidFill>
-                            <a:srgbClr val="14231B"/>
-                          </a:solidFill>
-                        </a:rPr>
-                        <a:t>Up to UZS 50 bn</a:t>
-                      </a:r>
-                    </a:p>
-                  </a:txBody>
-                  <a:tcPr>
-                    <a:solidFill>
-                      <a:srgbClr val="FFFFFF"/>
-                    </a:solidFill>
-                  </a:tcPr>
-                </a:tc>
-                <a:tc>
-                  <a:txBody>
-                    <a:bodyPr/>
-                    <a:lstStyle/>
-                    <a:p>
-                      <a:r>
-                        <a:rPr sz="1050">
-                          <a:solidFill>
-                            <a:srgbClr val="14231B"/>
-                          </a:solidFill>
-                        </a:rPr>
-                        <a:t>120 bps</a:t>
-                      </a:r>
-                    </a:p>
-                  </a:txBody>
-                  <a:tcPr>
-                    <a:solidFill>
-                      <a:srgbClr val="FFFFFF"/>
-                    </a:solidFill>
-                  </a:tcPr>
-                </a:tc>
-              </a:tr>
-              <a:tr h="365760">
-                <a:tc>
-                  <a:txBody>
-                    <a:bodyPr/>
-                    <a:lstStyle/>
-                    <a:p>
-                      <a:r>
-                        <a:rPr sz="1050">
-                          <a:solidFill>
-                            <a:srgbClr val="14231B"/>
-                          </a:solidFill>
-                        </a:rPr>
-                        <a:t>UZS 50–200 bn</a:t>
+                        <a:t>Nascent</a:t>
                       </a:r>
                     </a:p>
                   </a:txBody>
@@ -8461,7 +9930,7 @@
                             <a:srgbClr val="14231B"/>
                           </a:solidFill>
                         </a:rPr>
-                        <a:t>90 bps</a:t>
+                        <a:t>Grok chat triage + reporting, doc intelligence</a:t>
                       </a:r>
                     </a:p>
                   </a:txBody>
@@ -8484,7 +9953,7 @@
                             <a:srgbClr val="14231B"/>
                           </a:solidFill>
                         </a:rPr>
-                        <a:t>UZS 200–500 bn</a:t>
+                        <a:t>Pricing to bank</a:t>
                       </a:r>
                     </a:p>
                   </a:txBody>
@@ -8505,36 +9974,13 @@
                             <a:srgbClr val="14231B"/>
                           </a:solidFill>
                         </a:rPr>
-                        <a:t>70 bps</a:t>
+                        <a:t>Per-transaction commission</a:t>
                       </a:r>
                     </a:p>
                   </a:txBody>
                   <a:tcPr>
                     <a:solidFill>
                       <a:srgbClr val="FFFFFF"/>
-                    </a:solidFill>
-                  </a:tcPr>
-                </a:tc>
-              </a:tr>
-              <a:tr h="365760">
-                <a:tc>
-                  <a:txBody>
-                    <a:bodyPr/>
-                    <a:lstStyle/>
-                    <a:p>
-                      <a:r>
-                        <a:rPr sz="1050">
-                          <a:solidFill>
-                            <a:srgbClr val="14231B"/>
-                          </a:solidFill>
-                        </a:rPr>
-                        <a:t>Over UZS 500 bn</a:t>
-                      </a:r>
-                    </a:p>
-                  </a:txBody>
-                  <a:tcPr>
-                    <a:solidFill>
-                      <a:srgbClr val="EEEDE5"/>
                     </a:solidFill>
                   </a:tcPr>
                 </a:tc>
@@ -8549,13 +9995,34 @@
                             <a:srgbClr val="14231B"/>
                           </a:solidFill>
                         </a:rPr>
-                        <a:t>55 bps</a:t>
+                        <a:t>Per-transaction commission</a:t>
                       </a:r>
                     </a:p>
                   </a:txBody>
                   <a:tcPr>
                     <a:solidFill>
-                      <a:srgbClr val="EEEDE5"/>
+                      <a:srgbClr val="FFFFFF"/>
+                    </a:solidFill>
+                  </a:tcPr>
+                </a:tc>
+                <a:tc>
+                  <a:txBody>
+                    <a:bodyPr/>
+                    <a:lstStyle/>
+                    <a:p>
+                      <a:r>
+                        <a:rPr sz="1050">
+                          <a:solidFill>
+                            <a:srgbClr val="14231B"/>
+                          </a:solidFill>
+                        </a:rPr>
+                        <a:t>Volume-only bps (no SaaS licence)</a:t>
+                      </a:r>
+                    </a:p>
+                  </a:txBody>
+                  <a:tcPr>
+                    <a:solidFill>
+                      <a:srgbClr val="FFFFFF"/>
                     </a:solidFill>
                   </a:tcPr>
                 </a:tc>
@@ -8592,7 +10059,1013 @@
                   <a:srgbClr val="415046"/>
                 </a:solidFill>
               </a:rPr>
-              <a:t>Illustrative. No SaaS licence, no per-seat, no setup fee — Consistente is paid only when the bank finances an invoice. International SPV module: ~60 bps p.a. on invested AUM + a performance share above an agreed hurdle. Final figures to be set with Universalbank.</a:t>
+              <a:t>Universalbank already signed a cooperation agreement with OzPlanet (Sept 2024) — so it knows the model. The point of this proposal is not to rent a better aggregator, but to own the product outright. (Market data: CBU, Q3 2025.)</a:t>
+            </a:r>
+          </a:p>
+        </p:txBody>
+      </p:sp>
+    </p:spTree>
+  </p:cSld>
+  <p:clrMapOvr>
+    <a:masterClrMapping/>
+  </p:clrMapOvr>
+</p:sld>
+</file>
+
+<file path=ppt/slides/slide6.xml><?xml version="1.0" encoding="utf-8"?>
+<p:sld xmlns:a="http://schemas.openxmlformats.org/drawingml/2006/main" xmlns:p="http://schemas.openxmlformats.org/presentationml/2006/main" xmlns:r="http://schemas.openxmlformats.org/officeDocument/2006/relationships">
+  <p:cSld>
+    <p:spTree>
+      <p:nvGrpSpPr>
+        <p:cNvPr id="1" name=""/>
+        <p:cNvGrpSpPr/>
+        <p:nvPr/>
+      </p:nvGrpSpPr>
+      <p:grpSpPr/>
+      <p:sp>
+        <p:nvSpPr>
+          <p:cNvPr id="2" name="Rectangle 1"/>
+          <p:cNvSpPr/>
+          <p:nvPr/>
+        </p:nvSpPr>
+        <p:spPr>
+          <a:xfrm>
+            <a:off x="0" y="0"/>
+            <a:ext cx="12191695" cy="6858000"/>
+          </a:xfrm>
+          <a:prstGeom prst="rect">
+            <a:avLst/>
+          </a:prstGeom>
+          <a:solidFill>
+            <a:srgbClr val="F7F6F1"/>
+          </a:solidFill>
+          <a:ln>
+            <a:noFill/>
+          </a:ln>
+          <a:effectLst/>
+        </p:spPr>
+        <p:style>
+          <a:lnRef idx="1">
+            <a:schemeClr val="accent1"/>
+          </a:lnRef>
+          <a:fillRef idx="3">
+            <a:schemeClr val="accent1"/>
+          </a:fillRef>
+          <a:effectRef idx="2">
+            <a:schemeClr val="accent1"/>
+          </a:effectRef>
+          <a:fontRef idx="minor">
+            <a:schemeClr val="lt1"/>
+          </a:fontRef>
+        </p:style>
+        <p:txBody>
+          <a:bodyPr rtlCol="0" anchor="ctr"/>
+          <a:lstStyle/>
+          <a:p>
+            <a:pPr algn="ctr"/>
+          </a:p>
+        </p:txBody>
+      </p:sp>
+      <p:sp>
+        <p:nvSpPr>
+          <p:cNvPr id="3" name="TextBox 2"/>
+          <p:cNvSpPr txBox="1"/>
+          <p:nvPr/>
+        </p:nvSpPr>
+        <p:spPr>
+          <a:xfrm>
+            <a:off x="640080" y="365760"/>
+            <a:ext cx="10972800" cy="365760"/>
+          </a:xfrm>
+          <a:prstGeom prst="rect">
+            <a:avLst/>
+          </a:prstGeom>
+          <a:noFill/>
+        </p:spPr>
+        <p:txBody>
+          <a:bodyPr wrap="none">
+            <a:spAutoFit/>
+          </a:bodyPr>
+          <a:lstStyle/>
+          <a:p>
+            <a:r>
+              <a:rPr sz="1100" b="1">
+                <a:solidFill>
+                  <a:srgbClr val="C8A24B"/>
+                </a:solidFill>
+              </a:rPr>
+              <a:t>THE STRATEGIC GAP</a:t>
+            </a:r>
+          </a:p>
+        </p:txBody>
+      </p:sp>
+      <p:sp>
+        <p:nvSpPr>
+          <p:cNvPr id="4" name="Rectangle 3"/>
+          <p:cNvSpPr/>
+          <p:nvPr/>
+        </p:nvSpPr>
+        <p:spPr>
+          <a:xfrm>
+            <a:off x="640080" y="731520"/>
+            <a:ext cx="10881360" cy="777240"/>
+          </a:xfrm>
+          <a:prstGeom prst="rect">
+            <a:avLst/>
+          </a:prstGeom>
+          <a:solidFill>
+            <a:srgbClr val="1F5D43"/>
+          </a:solidFill>
+          <a:ln>
+            <a:noFill/>
+          </a:ln>
+          <a:effectLst/>
+        </p:spPr>
+        <p:style>
+          <a:lnRef idx="1">
+            <a:schemeClr val="accent1"/>
+          </a:lnRef>
+          <a:fillRef idx="3">
+            <a:schemeClr val="accent1"/>
+          </a:fillRef>
+          <a:effectRef idx="2">
+            <a:schemeClr val="accent1"/>
+          </a:effectRef>
+          <a:fontRef idx="minor">
+            <a:schemeClr val="lt1"/>
+          </a:fontRef>
+        </p:style>
+        <p:txBody>
+          <a:bodyPr rtlCol="0" anchor="ctr" wrap="square"/>
+          <a:lstStyle/>
+          <a:p>
+            <a:pPr algn="ctr"/>
+            <a:r>
+              <a:rPr sz="2100" b="1">
+                <a:solidFill>
+                  <a:srgbClr val="FFFFFF"/>
+                </a:solidFill>
+              </a:rPr>
+              <a:t>   No Uzbek bank owns its factoring product</a:t>
+            </a:r>
+          </a:p>
+        </p:txBody>
+      </p:sp>
+      <p:sp>
+        <p:nvSpPr>
+          <p:cNvPr id="5" name="TextBox 4"/>
+          <p:cNvSpPr txBox="1"/>
+          <p:nvPr/>
+        </p:nvSpPr>
+        <p:spPr>
+          <a:xfrm>
+            <a:off x="685800" y="1828800"/>
+            <a:ext cx="10881360" cy="4572000"/>
+          </a:xfrm>
+          <a:prstGeom prst="rect">
+            <a:avLst/>
+          </a:prstGeom>
+          <a:noFill/>
+        </p:spPr>
+        <p:txBody>
+          <a:bodyPr wrap="square">
+            <a:spAutoFit/>
+          </a:bodyPr>
+          <a:lstStyle/>
+          <a:p>
+            <a:pPr>
+              <a:spcAft>
+                <a:spcPts val="900"/>
+              </a:spcAft>
+            </a:pPr>
+            <a:r>
+              <a:rPr sz="1500">
+                <a:solidFill>
+                  <a:srgbClr val="14231B"/>
+                </a:solidFill>
+              </a:rPr>
+              <a:t>•  Today a bank connecting to OzPlanet or FinMakon is a funding partner on someone else's platform — the aggregator owns the brand, the customer relationship and the data.</a:t>
+            </a:r>
+          </a:p>
+          <a:p>
+            <a:pPr>
+              <a:spcAft>
+                <a:spcPts val="900"/>
+              </a:spcAft>
+            </a:pPr>
+            <a:r>
+              <a:rPr sz="1500">
+                <a:solidFill>
+                  <a:srgbClr val="14231B"/>
+                </a:solidFill>
+              </a:rPr>
+              <a:t>•  That is a strategic dependency: the bank cannot differentiate, cannot cross-sell off its own data, and cannot switch without losing the clients.</a:t>
+            </a:r>
+          </a:p>
+          <a:p>
+            <a:pPr>
+              <a:spcAft>
+                <a:spcPts val="900"/>
+              </a:spcAft>
+            </a:pPr>
+            <a:r>
+              <a:rPr sz="1500">
+                <a:solidFill>
+                  <a:srgbClr val="14231B"/>
+                </a:solidFill>
+              </a:rPr>
+              <a:t>•  Factorio flips this. Universalbank runs the platform under its own brand, owns all customer and transaction data, and can export and move it — no platform lock-in.</a:t>
+            </a:r>
+          </a:p>
+          <a:p>
+            <a:pPr>
+              <a:spcAft>
+                <a:spcPts val="900"/>
+              </a:spcAft>
+            </a:pPr>
+            <a:r>
+              <a:rPr sz="1500">
+                <a:solidFill>
+                  <a:srgbClr val="14231B"/>
+                </a:solidFill>
+              </a:rPr>
+              <a:t>•  Same government rails (SoliqOnline, CBU registry), same speed — but the bank owns the asset instead of renting the rails. That ownership is the real product.</a:t>
+            </a:r>
+          </a:p>
+        </p:txBody>
+      </p:sp>
+    </p:spTree>
+  </p:cSld>
+  <p:clrMapOvr>
+    <a:masterClrMapping/>
+  </p:clrMapOvr>
+</p:sld>
+</file>
+
+<file path=ppt/slides/slide7.xml><?xml version="1.0" encoding="utf-8"?>
+<p:sld xmlns:a="http://schemas.openxmlformats.org/drawingml/2006/main" xmlns:p="http://schemas.openxmlformats.org/presentationml/2006/main" xmlns:r="http://schemas.openxmlformats.org/officeDocument/2006/relationships">
+  <p:cSld>
+    <p:spTree>
+      <p:nvGrpSpPr>
+        <p:cNvPr id="1" name=""/>
+        <p:cNvGrpSpPr/>
+        <p:nvPr/>
+      </p:nvGrpSpPr>
+      <p:grpSpPr/>
+      <p:sp>
+        <p:nvSpPr>
+          <p:cNvPr id="2" name="Rectangle 1"/>
+          <p:cNvSpPr/>
+          <p:nvPr/>
+        </p:nvSpPr>
+        <p:spPr>
+          <a:xfrm>
+            <a:off x="0" y="0"/>
+            <a:ext cx="12191695" cy="6858000"/>
+          </a:xfrm>
+          <a:prstGeom prst="rect">
+            <a:avLst/>
+          </a:prstGeom>
+          <a:solidFill>
+            <a:srgbClr val="F7F6F1"/>
+          </a:solidFill>
+          <a:ln>
+            <a:noFill/>
+          </a:ln>
+          <a:effectLst/>
+        </p:spPr>
+        <p:style>
+          <a:lnRef idx="1">
+            <a:schemeClr val="accent1"/>
+          </a:lnRef>
+          <a:fillRef idx="3">
+            <a:schemeClr val="accent1"/>
+          </a:fillRef>
+          <a:effectRef idx="2">
+            <a:schemeClr val="accent1"/>
+          </a:effectRef>
+          <a:fontRef idx="minor">
+            <a:schemeClr val="lt1"/>
+          </a:fontRef>
+        </p:style>
+        <p:txBody>
+          <a:bodyPr rtlCol="0" anchor="ctr"/>
+          <a:lstStyle/>
+          <a:p>
+            <a:pPr algn="ctr"/>
+          </a:p>
+        </p:txBody>
+      </p:sp>
+      <p:sp>
+        <p:nvSpPr>
+          <p:cNvPr id="3" name="TextBox 2"/>
+          <p:cNvSpPr txBox="1"/>
+          <p:nvPr/>
+        </p:nvSpPr>
+        <p:spPr>
+          <a:xfrm>
+            <a:off x="640080" y="365760"/>
+            <a:ext cx="10972800" cy="365760"/>
+          </a:xfrm>
+          <a:prstGeom prst="rect">
+            <a:avLst/>
+          </a:prstGeom>
+          <a:noFill/>
+        </p:spPr>
+        <p:txBody>
+          <a:bodyPr wrap="none">
+            <a:spAutoFit/>
+          </a:bodyPr>
+          <a:lstStyle/>
+          <a:p>
+            <a:r>
+              <a:rPr sz="1100" b="1">
+                <a:solidFill>
+                  <a:srgbClr val="C8A24B"/>
+                </a:solidFill>
+              </a:rPr>
+              <a:t>HOW IT WORKS</a:t>
+            </a:r>
+          </a:p>
+        </p:txBody>
+      </p:sp>
+      <p:sp>
+        <p:nvSpPr>
+          <p:cNvPr id="4" name="Rectangle 3"/>
+          <p:cNvSpPr/>
+          <p:nvPr/>
+        </p:nvSpPr>
+        <p:spPr>
+          <a:xfrm>
+            <a:off x="640080" y="731520"/>
+            <a:ext cx="10881360" cy="777240"/>
+          </a:xfrm>
+          <a:prstGeom prst="rect">
+            <a:avLst/>
+          </a:prstGeom>
+          <a:solidFill>
+            <a:srgbClr val="1F5D43"/>
+          </a:solidFill>
+          <a:ln>
+            <a:noFill/>
+          </a:ln>
+          <a:effectLst/>
+        </p:spPr>
+        <p:style>
+          <a:lnRef idx="1">
+            <a:schemeClr val="accent1"/>
+          </a:lnRef>
+          <a:fillRef idx="3">
+            <a:schemeClr val="accent1"/>
+          </a:fillRef>
+          <a:effectRef idx="2">
+            <a:schemeClr val="accent1"/>
+          </a:effectRef>
+          <a:fontRef idx="minor">
+            <a:schemeClr val="lt1"/>
+          </a:fontRef>
+        </p:style>
+        <p:txBody>
+          <a:bodyPr rtlCol="0" anchor="ctr" wrap="square"/>
+          <a:lstStyle/>
+          <a:p>
+            <a:pPr algn="ctr"/>
+            <a:r>
+              <a:rPr sz="2100" b="1">
+                <a:solidFill>
+                  <a:srgbClr val="FFFFFF"/>
+                </a:solidFill>
+              </a:rPr>
+              <a:t>   How the money moves — and who gets paid</a:t>
+            </a:r>
+          </a:p>
+        </p:txBody>
+      </p:sp>
+      <p:pic>
+        <p:nvPicPr>
+          <p:cNvPr id="5" name="Picture 4" descr="en-15-money-flow.png"/>
+          <p:cNvPicPr>
+            <a:picLocks noChangeAspect="1"/>
+          </p:cNvPicPr>
+          <p:nvPr/>
+        </p:nvPicPr>
+        <p:blipFill>
+          <a:blip r:embed="rId2"/>
+          <a:stretch>
+            <a:fillRect/>
+          </a:stretch>
+        </p:blipFill>
+        <p:spPr>
+          <a:xfrm>
+            <a:off x="548640" y="3293029"/>
+            <a:ext cx="6583680" cy="1552101"/>
+          </a:xfrm>
+          <a:prstGeom prst="rect">
+            <a:avLst/>
+          </a:prstGeom>
+        </p:spPr>
+      </p:pic>
+      <p:sp>
+        <p:nvSpPr>
+          <p:cNvPr id="6" name="TextBox 5"/>
+          <p:cNvSpPr txBox="1"/>
+          <p:nvPr/>
+        </p:nvSpPr>
+        <p:spPr>
+          <a:xfrm>
+            <a:off x="548640" y="6355080"/>
+            <a:ext cx="6583680" cy="365760"/>
+          </a:xfrm>
+          <a:prstGeom prst="rect">
+            <a:avLst/>
+          </a:prstGeom>
+          <a:noFill/>
+        </p:spPr>
+        <p:txBody>
+          <a:bodyPr wrap="none">
+            <a:spAutoFit/>
+          </a:bodyPr>
+          <a:lstStyle/>
+          <a:p>
+            <a:pPr algn="ctr"/>
+            <a:r>
+              <a:rPr sz="1000" i="1">
+                <a:solidFill>
+                  <a:srgbClr val="415046"/>
+                </a:solidFill>
+              </a:rPr>
+              <a:t>Money &amp; payment flow — seller, payer (debtor), platform, capital</a:t>
+            </a:r>
+          </a:p>
+        </p:txBody>
+      </p:sp>
+      <p:sp>
+        <p:nvSpPr>
+          <p:cNvPr id="7" name="TextBox 6"/>
+          <p:cNvSpPr txBox="1"/>
+          <p:nvPr/>
+        </p:nvSpPr>
+        <p:spPr>
+          <a:xfrm>
+            <a:off x="7406640" y="1828800"/>
+            <a:ext cx="4480560" cy="4572000"/>
+          </a:xfrm>
+          <a:prstGeom prst="rect">
+            <a:avLst/>
+          </a:prstGeom>
+          <a:noFill/>
+        </p:spPr>
+        <p:txBody>
+          <a:bodyPr wrap="square">
+            <a:spAutoFit/>
+          </a:bodyPr>
+          <a:lstStyle/>
+          <a:p>
+            <a:pPr>
+              <a:spcAft>
+                <a:spcPts val="900"/>
+              </a:spcAft>
+            </a:pPr>
+            <a:r>
+              <a:rPr sz="1300">
+                <a:solidFill>
+                  <a:srgbClr val="14231B"/>
+                </a:solidFill>
+              </a:rPr>
+              <a:t>•  The payer (debtor) is the anchor: a specific, buyer-confirmed obligation on the SoliqOnline record.</a:t>
+            </a:r>
+          </a:p>
+          <a:p>
+            <a:pPr>
+              <a:spcAft>
+                <a:spcPts val="900"/>
+              </a:spcAft>
+            </a:pPr>
+            <a:r>
+              <a:rPr sz="1300">
+                <a:solidFill>
+                  <a:srgbClr val="14231B"/>
+                </a:solidFill>
+              </a:rPr>
+              <a:t>•  The platform advances ~85% now from the capital source (bank, investor or SPV); at maturity the payer settles 100% and the waterfall pays seller, capital and platform.</a:t>
+            </a:r>
+          </a:p>
+          <a:p>
+            <a:pPr>
+              <a:spcAft>
+                <a:spcPts val="900"/>
+              </a:spcAft>
+            </a:pPr>
+            <a:r>
+              <a:rPr sz="1300">
+                <a:solidFill>
+                  <a:srgbClr val="14231B"/>
+                </a:solidFill>
+              </a:rPr>
+              <a:t>•  Because the flow is identical regardless of who funds it, the capital layer is pluggable — bank first, investors/SPV later.</a:t>
+            </a:r>
+          </a:p>
+        </p:txBody>
+      </p:sp>
+    </p:spTree>
+  </p:cSld>
+  <p:clrMapOvr>
+    <a:masterClrMapping/>
+  </p:clrMapOvr>
+</p:sld>
+</file>
+
+<file path=ppt/slides/slide8.xml><?xml version="1.0" encoding="utf-8"?>
+<p:sld xmlns:a="http://schemas.openxmlformats.org/drawingml/2006/main" xmlns:p="http://schemas.openxmlformats.org/presentationml/2006/main" xmlns:r="http://schemas.openxmlformats.org/officeDocument/2006/relationships">
+  <p:cSld>
+    <p:spTree>
+      <p:nvGrpSpPr>
+        <p:cNvPr id="1" name=""/>
+        <p:cNvGrpSpPr/>
+        <p:nvPr/>
+      </p:nvGrpSpPr>
+      <p:grpSpPr/>
+      <p:sp>
+        <p:nvSpPr>
+          <p:cNvPr id="2" name="Rectangle 1"/>
+          <p:cNvSpPr/>
+          <p:nvPr/>
+        </p:nvSpPr>
+        <p:spPr>
+          <a:xfrm>
+            <a:off x="0" y="0"/>
+            <a:ext cx="12191695" cy="6858000"/>
+          </a:xfrm>
+          <a:prstGeom prst="rect">
+            <a:avLst/>
+          </a:prstGeom>
+          <a:solidFill>
+            <a:srgbClr val="F7F6F1"/>
+          </a:solidFill>
+          <a:ln>
+            <a:noFill/>
+          </a:ln>
+          <a:effectLst/>
+        </p:spPr>
+        <p:style>
+          <a:lnRef idx="1">
+            <a:schemeClr val="accent1"/>
+          </a:lnRef>
+          <a:fillRef idx="3">
+            <a:schemeClr val="accent1"/>
+          </a:fillRef>
+          <a:effectRef idx="2">
+            <a:schemeClr val="accent1"/>
+          </a:effectRef>
+          <a:fontRef idx="minor">
+            <a:schemeClr val="lt1"/>
+          </a:fontRef>
+        </p:style>
+        <p:txBody>
+          <a:bodyPr rtlCol="0" anchor="ctr"/>
+          <a:lstStyle/>
+          <a:p>
+            <a:pPr algn="ctr"/>
+          </a:p>
+        </p:txBody>
+      </p:sp>
+      <p:sp>
+        <p:nvSpPr>
+          <p:cNvPr id="3" name="TextBox 2"/>
+          <p:cNvSpPr txBox="1"/>
+          <p:nvPr/>
+        </p:nvSpPr>
+        <p:spPr>
+          <a:xfrm>
+            <a:off x="640080" y="365760"/>
+            <a:ext cx="10972800" cy="365760"/>
+          </a:xfrm>
+          <a:prstGeom prst="rect">
+            <a:avLst/>
+          </a:prstGeom>
+          <a:noFill/>
+        </p:spPr>
+        <p:txBody>
+          <a:bodyPr wrap="none">
+            <a:spAutoFit/>
+          </a:bodyPr>
+          <a:lstStyle/>
+          <a:p>
+            <a:r>
+              <a:rPr sz="1100" b="1">
+                <a:solidFill>
+                  <a:srgbClr val="C8A24B"/>
+                </a:solidFill>
+              </a:rPr>
+              <a:t>PILLAR 1 · A BETTER PLATFORM</a:t>
+            </a:r>
+          </a:p>
+        </p:txBody>
+      </p:sp>
+      <p:sp>
+        <p:nvSpPr>
+          <p:cNvPr id="4" name="Rectangle 3"/>
+          <p:cNvSpPr/>
+          <p:nvPr/>
+        </p:nvSpPr>
+        <p:spPr>
+          <a:xfrm>
+            <a:off x="640080" y="731520"/>
+            <a:ext cx="10881360" cy="777240"/>
+          </a:xfrm>
+          <a:prstGeom prst="rect">
+            <a:avLst/>
+          </a:prstGeom>
+          <a:solidFill>
+            <a:srgbClr val="1F5D43"/>
+          </a:solidFill>
+          <a:ln>
+            <a:noFill/>
+          </a:ln>
+          <a:effectLst/>
+        </p:spPr>
+        <p:style>
+          <a:lnRef idx="1">
+            <a:schemeClr val="accent1"/>
+          </a:lnRef>
+          <a:fillRef idx="3">
+            <a:schemeClr val="accent1"/>
+          </a:fillRef>
+          <a:effectRef idx="2">
+            <a:schemeClr val="accent1"/>
+          </a:effectRef>
+          <a:fontRef idx="minor">
+            <a:schemeClr val="lt1"/>
+          </a:fontRef>
+        </p:style>
+        <p:txBody>
+          <a:bodyPr rtlCol="0" anchor="ctr" wrap="square"/>
+          <a:lstStyle/>
+          <a:p>
+            <a:pPr algn="ctr"/>
+            <a:r>
+              <a:rPr sz="2100" b="1">
+                <a:solidFill>
+                  <a:srgbClr val="FFFFFF"/>
+                </a:solidFill>
+              </a:rPr>
+              <a:t>   AI at the core, not bolted on</a:t>
+            </a:r>
+          </a:p>
+        </p:txBody>
+      </p:sp>
+      <p:sp>
+        <p:nvSpPr>
+          <p:cNvPr id="5" name="TextBox 4"/>
+          <p:cNvSpPr txBox="1"/>
+          <p:nvPr/>
+        </p:nvSpPr>
+        <p:spPr>
+          <a:xfrm>
+            <a:off x="685800" y="1828800"/>
+            <a:ext cx="10881360" cy="4572000"/>
+          </a:xfrm>
+          <a:prstGeom prst="rect">
+            <a:avLst/>
+          </a:prstGeom>
+          <a:noFill/>
+        </p:spPr>
+        <p:txBody>
+          <a:bodyPr wrap="square">
+            <a:spAutoFit/>
+          </a:bodyPr>
+          <a:lstStyle/>
+          <a:p>
+            <a:pPr>
+              <a:spcAft>
+                <a:spcPts val="900"/>
+              </a:spcAft>
+            </a:pPr>
+            <a:r>
+              <a:rPr sz="1500">
+                <a:solidFill>
+                  <a:srgbClr val="14231B"/>
+                </a:solidFill>
+              </a:rPr>
+              <a:t>•  The same end-to-end factoring workflow — submit, verify, fund, settle — but with AI woven through triage, scoring, documents and reporting.</a:t>
+            </a:r>
+          </a:p>
+          <a:p>
+            <a:pPr>
+              <a:spcAft>
+                <a:spcPts val="900"/>
+              </a:spcAft>
+            </a:pPr>
+            <a:r>
+              <a:rPr sz="1500">
+                <a:solidFill>
+                  <a:srgbClr val="14231B"/>
+                </a:solidFill>
+              </a:rPr>
+              <a:t>•  Built on a lean, server-rendered stack (FastHTML + PostgreSQL) — fast to change, cheap to run, easy to white-label under the bank's brand.</a:t>
+            </a:r>
+          </a:p>
+          <a:p>
+            <a:pPr>
+              <a:spcAft>
+                <a:spcPts val="900"/>
+              </a:spcAft>
+            </a:pPr>
+            <a:r>
+              <a:rPr sz="1500">
+                <a:solidFill>
+                  <a:srgbClr val="14231B"/>
+                </a:solidFill>
+              </a:rPr>
+              <a:t>•  Trilingual by design (English · Oʻzbekcha · Russian); the AI answers in the user's language.</a:t>
+            </a:r>
+          </a:p>
+          <a:p>
+            <a:pPr>
+              <a:spcAft>
+                <a:spcPts val="900"/>
+              </a:spcAft>
+            </a:pPr>
+            <a:r>
+              <a:rPr sz="1500">
+                <a:solidFill>
+                  <a:srgbClr val="14231B"/>
+                </a:solidFill>
+              </a:rPr>
+              <a:t>•  The next three slides detail the AI, the credit-scoring engine, and the commercial model.</a:t>
+            </a:r>
+          </a:p>
+        </p:txBody>
+      </p:sp>
+    </p:spTree>
+  </p:cSld>
+  <p:clrMapOvr>
+    <a:masterClrMapping/>
+  </p:clrMapOvr>
+</p:sld>
+</file>
+
+<file path=ppt/slides/slide9.xml><?xml version="1.0" encoding="utf-8"?>
+<p:sld xmlns:a="http://schemas.openxmlformats.org/drawingml/2006/main" xmlns:p="http://schemas.openxmlformats.org/presentationml/2006/main" xmlns:r="http://schemas.openxmlformats.org/officeDocument/2006/relationships">
+  <p:cSld>
+    <p:spTree>
+      <p:nvGrpSpPr>
+        <p:cNvPr id="1" name=""/>
+        <p:cNvGrpSpPr/>
+        <p:nvPr/>
+      </p:nvGrpSpPr>
+      <p:grpSpPr/>
+      <p:sp>
+        <p:nvSpPr>
+          <p:cNvPr id="2" name="Rectangle 1"/>
+          <p:cNvSpPr/>
+          <p:nvPr/>
+        </p:nvSpPr>
+        <p:spPr>
+          <a:xfrm>
+            <a:off x="0" y="0"/>
+            <a:ext cx="12191695" cy="6858000"/>
+          </a:xfrm>
+          <a:prstGeom prst="rect">
+            <a:avLst/>
+          </a:prstGeom>
+          <a:solidFill>
+            <a:srgbClr val="F7F6F1"/>
+          </a:solidFill>
+          <a:ln>
+            <a:noFill/>
+          </a:ln>
+          <a:effectLst/>
+        </p:spPr>
+        <p:style>
+          <a:lnRef idx="1">
+            <a:schemeClr val="accent1"/>
+          </a:lnRef>
+          <a:fillRef idx="3">
+            <a:schemeClr val="accent1"/>
+          </a:fillRef>
+          <a:effectRef idx="2">
+            <a:schemeClr val="accent1"/>
+          </a:effectRef>
+          <a:fontRef idx="minor">
+            <a:schemeClr val="lt1"/>
+          </a:fontRef>
+        </p:style>
+        <p:txBody>
+          <a:bodyPr rtlCol="0" anchor="ctr"/>
+          <a:lstStyle/>
+          <a:p>
+            <a:pPr algn="ctr"/>
+          </a:p>
+        </p:txBody>
+      </p:sp>
+      <p:sp>
+        <p:nvSpPr>
+          <p:cNvPr id="3" name="TextBox 2"/>
+          <p:cNvSpPr txBox="1"/>
+          <p:nvPr/>
+        </p:nvSpPr>
+        <p:spPr>
+          <a:xfrm>
+            <a:off x="640080" y="365760"/>
+            <a:ext cx="10972800" cy="365760"/>
+          </a:xfrm>
+          <a:prstGeom prst="rect">
+            <a:avLst/>
+          </a:prstGeom>
+          <a:noFill/>
+        </p:spPr>
+        <p:txBody>
+          <a:bodyPr wrap="none">
+            <a:spAutoFit/>
+          </a:bodyPr>
+          <a:lstStyle/>
+          <a:p>
+            <a:r>
+              <a:rPr sz="1100" b="1">
+                <a:solidFill>
+                  <a:srgbClr val="C8A24B"/>
+                </a:solidFill>
+              </a:rPr>
+              <a:t>JOURNEY · BORROWER (ORIGINATION)</a:t>
+            </a:r>
+          </a:p>
+        </p:txBody>
+      </p:sp>
+      <p:sp>
+        <p:nvSpPr>
+          <p:cNvPr id="4" name="Rectangle 3"/>
+          <p:cNvSpPr/>
+          <p:nvPr/>
+        </p:nvSpPr>
+        <p:spPr>
+          <a:xfrm>
+            <a:off x="640080" y="731520"/>
+            <a:ext cx="10881360" cy="777240"/>
+          </a:xfrm>
+          <a:prstGeom prst="rect">
+            <a:avLst/>
+          </a:prstGeom>
+          <a:solidFill>
+            <a:srgbClr val="1F5D43"/>
+          </a:solidFill>
+          <a:ln>
+            <a:noFill/>
+          </a:ln>
+          <a:effectLst/>
+        </p:spPr>
+        <p:style>
+          <a:lnRef idx="1">
+            <a:schemeClr val="accent1"/>
+          </a:lnRef>
+          <a:fillRef idx="3">
+            <a:schemeClr val="accent1"/>
+          </a:fillRef>
+          <a:effectRef idx="2">
+            <a:schemeClr val="accent1"/>
+          </a:effectRef>
+          <a:fontRef idx="minor">
+            <a:schemeClr val="lt1"/>
+          </a:fontRef>
+        </p:style>
+        <p:txBody>
+          <a:bodyPr rtlCol="0" anchor="ctr" wrap="square"/>
+          <a:lstStyle/>
+          <a:p>
+            <a:pPr algn="ctr"/>
+            <a:r>
+              <a:rPr sz="2100" b="1">
+                <a:solidFill>
+                  <a:srgbClr val="FFFFFF"/>
+                </a:solidFill>
+              </a:rPr>
+              <a:t>   The seller's journey — sign-up to cash in 24–48h</a:t>
+            </a:r>
+          </a:p>
+        </p:txBody>
+      </p:sp>
+      <p:pic>
+        <p:nvPicPr>
+          <p:cNvPr id="5" name="Picture 4" descr="en-16-origination-journey.png"/>
+          <p:cNvPicPr>
+            <a:picLocks noChangeAspect="1"/>
+          </p:cNvPicPr>
+          <p:nvPr/>
+        </p:nvPicPr>
+        <p:blipFill>
+          <a:blip r:embed="rId2"/>
+          <a:stretch>
+            <a:fillRect/>
+          </a:stretch>
+        </p:blipFill>
+        <p:spPr>
+          <a:xfrm>
+            <a:off x="548640" y="3875684"/>
+            <a:ext cx="6583680" cy="386791"/>
+          </a:xfrm>
+          <a:prstGeom prst="rect">
+            <a:avLst/>
+          </a:prstGeom>
+        </p:spPr>
+      </p:pic>
+      <p:sp>
+        <p:nvSpPr>
+          <p:cNvPr id="6" name="TextBox 5"/>
+          <p:cNvSpPr txBox="1"/>
+          <p:nvPr/>
+        </p:nvSpPr>
+        <p:spPr>
+          <a:xfrm>
+            <a:off x="548640" y="6355080"/>
+            <a:ext cx="6583680" cy="365760"/>
+          </a:xfrm>
+          <a:prstGeom prst="rect">
+            <a:avLst/>
+          </a:prstGeom>
+          <a:noFill/>
+        </p:spPr>
+        <p:txBody>
+          <a:bodyPr wrap="none">
+            <a:spAutoFit/>
+          </a:bodyPr>
+          <a:lstStyle/>
+          <a:p>
+            <a:pPr algn="ctr"/>
+            <a:r>
+              <a:rPr sz="1000" i="1">
+                <a:solidFill>
+                  <a:srgbClr val="415046"/>
+                </a:solidFill>
+              </a:rPr>
+              <a:t>Origination: SoliqOnline import → AI triage → one-click approval → advance</a:t>
+            </a:r>
+          </a:p>
+        </p:txBody>
+      </p:sp>
+      <p:sp>
+        <p:nvSpPr>
+          <p:cNvPr id="7" name="TextBox 6"/>
+          <p:cNvSpPr txBox="1"/>
+          <p:nvPr/>
+        </p:nvSpPr>
+        <p:spPr>
+          <a:xfrm>
+            <a:off x="7406640" y="1828800"/>
+            <a:ext cx="4480560" cy="4572000"/>
+          </a:xfrm>
+          <a:prstGeom prst="rect">
+            <a:avLst/>
+          </a:prstGeom>
+          <a:noFill/>
+        </p:spPr>
+        <p:txBody>
+          <a:bodyPr wrap="square">
+            <a:spAutoFit/>
+          </a:bodyPr>
+          <a:lstStyle/>
+          <a:p>
+            <a:pPr>
+              <a:spcAft>
+                <a:spcPts val="900"/>
+              </a:spcAft>
+            </a:pPr>
+            <a:r>
+              <a:rPr sz="1300">
+                <a:solidFill>
+                  <a:srgbClr val="14231B"/>
+                </a:solidFill>
+              </a:rPr>
+              <a:t>•  Manual bank involvement is a single approval click on a pre-populated screen; everything else is automated.</a:t>
+            </a:r>
+          </a:p>
+          <a:p>
+            <a:pPr>
+              <a:spcAft>
+                <a:spcPts val="900"/>
+              </a:spcAft>
+            </a:pPr>
+            <a:r>
+              <a:rPr sz="1300">
+                <a:solidFill>
+                  <a:srgbClr val="14231B"/>
+                </a:solidFill>
+              </a:rPr>
+              <a:t>•  The invoice is imported and verified from SoliqOnline; the debtor is scored; collateral is registered with the CBU in under 60 minutes.</a:t>
+            </a:r>
+          </a:p>
+          <a:p>
+            <a:pPr>
+              <a:spcAft>
+                <a:spcPts val="900"/>
+              </a:spcAft>
+            </a:pPr>
+            <a:r>
+              <a:rPr sz="1300">
+                <a:solidFill>
+                  <a:srgbClr val="14231B"/>
+                </a:solidFill>
+              </a:rPr>
+              <a:t>•  This is Module A — it stands alone and can go live first, funded entirely by the bank's balance sheet.</a:t>
             </a:r>
           </a:p>
         </p:txBody>
